--- a/slides/datasets-in-10-minutes-naturalquestions.pptx
+++ b/slides/datasets-in-10-minutes-naturalquestions.pptx
@@ -72,7 +72,6 @@
     <p:sldId id="320" r:id="rId70"/>
     <p:sldId id="321" r:id="rId71"/>
     <p:sldId id="322" r:id="rId72"/>
-    <p:sldId id="323" r:id="rId73"/>
   </p:sldIdLst>
   <p:sldSz cx="9144000" cy="5143500" type="screen16x9"/>
   <p:notesSz cx="6858000" cy="9144000"/>
@@ -7762,7 +7761,7 @@
         <p:spPr>
           <a:xfrm>
             <a:off x="548640" y="1600200"/>
-            <a:ext cx="8046720" cy="1983314"/>
+            <a:ext cx="8046720" cy="1922741"/>
           </a:xfrm>
           <a:prstGeom prst="rect">
             <a:avLst/>
@@ -7790,7 +7789,7 @@
           </a:fontRef>
         </p:style>
         <p:txBody>
-          <a:bodyPr rtlCol="0" anchor="t" wrap="square" lIns="177800" rIns="177800" tIns="63500" bIns="127000">
+          <a:bodyPr rtlCol="0" anchor="t" wrap="square" lIns="177800" rIns="177800" tIns="58024" bIns="127000">
             <a:noAutofit/>
           </a:bodyPr>
           <a:lstStyle/>
@@ -7866,7 +7865,7 @@
         </p:nvSpPr>
         <p:spPr>
           <a:xfrm>
-            <a:off x="594360" y="3693243"/>
+            <a:off x="594360" y="3632670"/>
             <a:ext cx="3886200" cy="682751"/>
           </a:xfrm>
           <a:prstGeom prst="rect">
@@ -7951,7 +7950,7 @@
         </p:nvSpPr>
         <p:spPr>
           <a:xfrm>
-            <a:off x="4681728" y="3693243"/>
+            <a:off x="4681728" y="3632670"/>
             <a:ext cx="3886200" cy="682751"/>
           </a:xfrm>
           <a:prstGeom prst="rect">
@@ -8863,7 +8862,7 @@
         <p:spPr>
           <a:xfrm>
             <a:off x="548640" y="1600200"/>
-            <a:ext cx="8046720" cy="1819238"/>
+            <a:ext cx="8046720" cy="1782225"/>
           </a:xfrm>
           <a:prstGeom prst="rect">
             <a:avLst/>
@@ -8891,7 +8890,7 @@
           </a:fontRef>
         </p:style>
         <p:txBody>
-          <a:bodyPr rtlCol="0" anchor="t" wrap="square" lIns="177800" rIns="177800" tIns="63500" bIns="127000">
+          <a:bodyPr rtlCol="0" anchor="t" wrap="square" lIns="177800" rIns="177800" tIns="39237" bIns="127000">
             <a:noAutofit/>
           </a:bodyPr>
           <a:lstStyle/>
@@ -8967,7 +8966,7 @@
         </p:nvSpPr>
         <p:spPr>
           <a:xfrm>
-            <a:off x="594360" y="3529167"/>
+            <a:off x="594360" y="3492154"/>
             <a:ext cx="7955279" cy="373380"/>
           </a:xfrm>
           <a:prstGeom prst="rect">
@@ -9270,7 +9269,7 @@
         <p:spPr>
           <a:xfrm>
             <a:off x="548640" y="1600200"/>
-            <a:ext cx="8046720" cy="1999702"/>
+            <a:ext cx="8046720" cy="1920560"/>
           </a:xfrm>
           <a:prstGeom prst="rect">
             <a:avLst/>
@@ -9298,7 +9297,7 @@
           </a:fontRef>
         </p:style>
         <p:txBody>
-          <a:bodyPr rtlCol="0" anchor="t" wrap="square" lIns="177800" rIns="177800" tIns="63500" bIns="127000">
+          <a:bodyPr rtlCol="0" anchor="t" wrap="square" lIns="177800" rIns="177800" tIns="47920" bIns="127000">
             <a:noAutofit/>
           </a:bodyPr>
           <a:lstStyle/>
@@ -9374,7 +9373,7 @@
         </p:nvSpPr>
         <p:spPr>
           <a:xfrm>
-            <a:off x="594360" y="3709631"/>
+            <a:off x="594360" y="3630489"/>
             <a:ext cx="7955279" cy="373380"/>
           </a:xfrm>
           <a:prstGeom prst="rect">
@@ -19430,7 +19429,7 @@
         <p:spPr>
           <a:xfrm>
             <a:off x="548640" y="1307592"/>
-            <a:ext cx="8046720" cy="219456"/>
+            <a:ext cx="4480560" cy="219456"/>
           </a:xfrm>
           <a:prstGeom prst="rect">
             <a:avLst/>
@@ -19470,7 +19469,7 @@
                 <a:ea typeface="Noto Sans CJK JP"/>
                 <a:cs typeface="Noto Sans"/>
               </a:rPr>
-              <a:t>記事：Deposition (phase transition) ／ long answer全文・質問・正解注釈</a:t>
+              <a:t>原文：Deposition (phase transition)</a:t>
             </a:r>
           </a:p>
         </p:txBody>
@@ -19484,7 +19483,7 @@
         <p:spPr>
           <a:xfrm>
             <a:off x="548640" y="1600200"/>
-            <a:ext cx="8046720" cy="1546722"/>
+            <a:ext cx="4480560" cy="1976469"/>
           </a:xfrm>
           <a:prstGeom prst="rect">
             <a:avLst/>
@@ -19512,31 +19511,31 @@
           </a:fontRef>
         </p:style>
         <p:txBody>
-          <a:bodyPr rtlCol="0" anchor="t" wrap="square" lIns="177800" rIns="177800" tIns="63500" bIns="127000">
+          <a:bodyPr rtlCol="0" anchor="t" wrap="square" lIns="177800" rIns="177800" tIns="45531" bIns="127000">
             <a:noAutofit/>
           </a:bodyPr>
           <a:lstStyle/>
           <a:p>
             <a:pPr algn="l">
               <a:lnSpc>
-                <a:spcPts val="2142"/>
-              </a:lnSpc>
-              <a:spcBef>
-                <a:spcPts val="0"/>
-              </a:spcBef>
-              <a:spcAft>
-                <a:spcPts val="0"/>
-              </a:spcAft>
-              <a:buNone/>
-              <a:defRPr sz="1800" b="0">
-                <a:solidFill>
-                  <a:srgbClr val="303437"/>
-                </a:solidFill>
-                <a:latin typeface="Noto Sans"/>
-              </a:defRPr>
-            </a:pPr>
-            <a:r>
-              <a:rPr sz="1800" b="0" lang="ja-JP" altLang="en-US">
+                <a:spcPts val="1844"/>
+              </a:lnSpc>
+              <a:spcBef>
+                <a:spcPts val="0"/>
+              </a:spcBef>
+              <a:spcAft>
+                <a:spcPts val="0"/>
+              </a:spcAft>
+              <a:buNone/>
+              <a:defRPr sz="1550" b="0">
+                <a:solidFill>
+                  <a:srgbClr val="303437"/>
+                </a:solidFill>
+                <a:latin typeface="Noto Sans"/>
+              </a:defRPr>
+            </a:pPr>
+            <a:r>
+              <a:rPr sz="1550" b="0" lang="ja-JP" altLang="en-US">
                 <a:solidFill>
                   <a:srgbClr val="303437"/>
                 </a:solidFill>
@@ -19550,24 +19549,24 @@
           <a:p>
             <a:pPr algn="l">
               <a:lnSpc>
-                <a:spcPts val="2142"/>
-              </a:lnSpc>
-              <a:spcBef>
-                <a:spcPts val="0"/>
-              </a:spcBef>
-              <a:spcAft>
-                <a:spcPts val="0"/>
-              </a:spcAft>
-              <a:buNone/>
-              <a:defRPr sz="1800" b="0">
-                <a:solidFill>
-                  <a:srgbClr val="303437"/>
-                </a:solidFill>
-                <a:latin typeface="Noto Sans"/>
-              </a:defRPr>
-            </a:pPr>
-            <a:r>
-              <a:rPr sz="1800" b="0" lang="ja-JP" altLang="en-US">
+                <a:spcPts val="1844"/>
+              </a:lnSpc>
+              <a:spcBef>
+                <a:spcPts val="0"/>
+              </a:spcBef>
+              <a:spcAft>
+                <a:spcPts val="0"/>
+              </a:spcAft>
+              <a:buNone/>
+              <a:defRPr sz="1550" b="0">
+                <a:solidFill>
+                  <a:srgbClr val="303437"/>
+                </a:solidFill>
+                <a:latin typeface="Noto Sans"/>
+              </a:defRPr>
+            </a:pPr>
+            <a:r>
+              <a:rPr sz="1550" b="0" lang="ja-JP" altLang="en-US">
                 <a:solidFill>
                   <a:srgbClr val="303437"/>
                 </a:solidFill>
@@ -19588,8 +19587,8 @@
         </p:nvSpPr>
         <p:spPr>
           <a:xfrm>
-            <a:off x="594360" y="3256651"/>
-            <a:ext cx="3886200" cy="373380"/>
+            <a:off x="548640" y="3686397"/>
+            <a:ext cx="4480560" cy="682751"/>
           </a:xfrm>
           <a:prstGeom prst="rect">
             <a:avLst/>
@@ -19632,6 +19631,37 @@
               <a:t>Deposition</a:t>
             </a:r>
           </a:p>
+          <a:p>
+            <a:pPr algn="l">
+              <a:lnSpc>
+                <a:spcPts val="2436"/>
+              </a:lnSpc>
+              <a:spcBef>
+                <a:spcPts val="0"/>
+              </a:spcBef>
+              <a:spcAft>
+                <a:spcPts val="0"/>
+              </a:spcAft>
+              <a:buNone/>
+              <a:defRPr sz="2100" b="0">
+                <a:solidFill>
+                  <a:srgbClr val="303437"/>
+                </a:solidFill>
+                <a:latin typeface="Noto Sans"/>
+              </a:defRPr>
+            </a:pPr>
+            <a:r>
+              <a:rPr sz="2100" b="1" lang="ja-JP" altLang="en-US">
+                <a:solidFill>
+                  <a:srgbClr val="B13731"/>
+                </a:solidFill>
+                <a:latin typeface="Noto Sans"/>
+                <a:ea typeface="Noto Sans CJK JP"/>
+                <a:cs typeface="Noto Sans"/>
+              </a:rPr>
+              <a:t>desublimation</a:t>
+            </a:r>
+          </a:p>
         </p:txBody>
       </p:sp>
       <p:sp>
@@ -19642,8 +19672,8 @@
         </p:nvSpPr>
         <p:spPr>
           <a:xfrm>
-            <a:off x="4681728" y="3256651"/>
-            <a:ext cx="3886200" cy="373380"/>
+            <a:off x="5212080" y="1307592"/>
+            <a:ext cx="3383279" cy="219456"/>
           </a:xfrm>
           <a:prstGeom prst="rect">
             <a:avLst/>
@@ -19658,6 +19688,165 @@
           <a:p>
             <a:pPr algn="l">
               <a:lnSpc>
+                <a:spcPts val="1404"/>
+              </a:lnSpc>
+              <a:spcBef>
+                <a:spcPts val="0"/>
+              </a:spcBef>
+              <a:spcAft>
+                <a:spcPts val="0"/>
+              </a:spcAft>
+              <a:buNone/>
+              <a:defRPr sz="1200" b="0">
+                <a:solidFill>
+                  <a:srgbClr val="303437"/>
+                </a:solidFill>
+                <a:latin typeface="Noto Sans"/>
+              </a:defRPr>
+            </a:pPr>
+            <a:r>
+              <a:rPr sz="1200" b="0" lang="ja-JP" altLang="en-US">
+                <a:solidFill>
+                  <a:srgbClr val="626669"/>
+                </a:solidFill>
+                <a:latin typeface="Noto Sans"/>
+                <a:ea typeface="Noto Sans CJK JP"/>
+                <a:cs typeface="Noto Sans"/>
+              </a:rPr>
+              <a:t>訳：凝華（相転移）</a:t>
+            </a:r>
+          </a:p>
+        </p:txBody>
+      </p:sp>
+      <p:sp>
+        <p:nvSpPr>
+          <p:cNvPr id="8" name="quote-frame"/>
+          <p:cNvSpPr/>
+          <p:nvPr/>
+        </p:nvSpPr>
+        <p:spPr>
+          <a:xfrm>
+            <a:off x="5212080" y="1600200"/>
+            <a:ext cx="3383279" cy="1775985"/>
+          </a:xfrm>
+          <a:prstGeom prst="rect">
+            <a:avLst/>
+          </a:prstGeom>
+          <a:solidFill>
+            <a:srgbClr val="EBEDEB"/>
+          </a:solidFill>
+          <a:ln>
+            <a:noFill/>
+          </a:ln>
+          <a:effectLst/>
+        </p:spPr>
+        <p:style>
+          <a:lnRef idx="1">
+            <a:schemeClr val="accent1"/>
+          </a:lnRef>
+          <a:fillRef idx="3">
+            <a:schemeClr val="accent1"/>
+          </a:fillRef>
+          <a:effectRef idx="0">
+            <a:schemeClr val="accent1"/>
+          </a:effectRef>
+          <a:fontRef idx="minor">
+            <a:schemeClr val="lt1"/>
+          </a:fontRef>
+        </p:style>
+        <p:txBody>
+          <a:bodyPr rtlCol="0" anchor="t" wrap="square" lIns="177800" rIns="177800" tIns="63451" bIns="127000">
+            <a:noAutofit/>
+          </a:bodyPr>
+          <a:lstStyle/>
+          <a:p>
+            <a:pPr algn="l">
+              <a:lnSpc>
+                <a:spcPts val="1844"/>
+              </a:lnSpc>
+              <a:spcBef>
+                <a:spcPts val="0"/>
+              </a:spcBef>
+              <a:spcAft>
+                <a:spcPts val="0"/>
+              </a:spcAft>
+              <a:buNone/>
+              <a:defRPr sz="1550" b="0">
+                <a:solidFill>
+                  <a:srgbClr val="303437"/>
+                </a:solidFill>
+                <a:latin typeface="Noto Sans"/>
+              </a:defRPr>
+            </a:pPr>
+            <a:r>
+              <a:rPr sz="1550" b="0" lang="ja-JP" altLang="en-US">
+                <a:solidFill>
+                  <a:srgbClr val="303437"/>
+                </a:solidFill>
+                <a:latin typeface="Noto Sans"/>
+                <a:ea typeface="Noto Sans CJK JP"/>
+                <a:cs typeface="Noto Sans"/>
+              </a:rPr>
+              <a:t>凝華は熱力学的な過程で、気体が液体の状態を経ずに固体へ変わる相転移である。凝華の逆は昇華なので、凝華はdesublimationと呼ばれることもある。</a:t>
+            </a:r>
+          </a:p>
+          <a:p>
+            <a:pPr algn="l">
+              <a:lnSpc>
+                <a:spcPts val="1844"/>
+              </a:lnSpc>
+              <a:spcBef>
+                <a:spcPts val="0"/>
+              </a:spcBef>
+              <a:spcAft>
+                <a:spcPts val="0"/>
+              </a:spcAft>
+              <a:buNone/>
+              <a:defRPr sz="1550" b="0">
+                <a:solidFill>
+                  <a:srgbClr val="303437"/>
+                </a:solidFill>
+                <a:latin typeface="Noto Sans"/>
+              </a:defRPr>
+            </a:pPr>
+            <a:r>
+              <a:rPr sz="1550" b="0" lang="ja-JP" altLang="en-US">
+                <a:solidFill>
+                  <a:srgbClr val="303437"/>
+                </a:solidFill>
+                <a:latin typeface="Noto Sans"/>
+                <a:ea typeface="Noto Sans CJK JP"/>
+                <a:cs typeface="Noto Sans"/>
+              </a:rPr>
+              <a:t>質問：気体から固体への相転移は何と呼ばれるか。</a:t>
+            </a:r>
+          </a:p>
+        </p:txBody>
+      </p:sp>
+      <p:sp>
+        <p:nvSpPr>
+          <p:cNvPr id="9" name="TextBox 8"/>
+          <p:cNvSpPr txBox="1"/>
+          <p:nvPr/>
+        </p:nvSpPr>
+        <p:spPr>
+          <a:xfrm>
+            <a:off x="5212080" y="3485913"/>
+            <a:ext cx="3383279" cy="682751"/>
+          </a:xfrm>
+          <a:prstGeom prst="rect">
+            <a:avLst/>
+          </a:prstGeom>
+          <a:noFill/>
+        </p:spPr>
+        <p:txBody>
+          <a:bodyPr wrap="square" lIns="0" rIns="0" tIns="0" bIns="0">
+            <a:noAutofit/>
+          </a:bodyPr>
+          <a:lstStyle/>
+          <a:p>
+            <a:pPr algn="l">
+              <a:lnSpc>
                 <a:spcPts val="2436"/>
               </a:lnSpc>
               <a:spcBef>
@@ -19683,14 +19872,45 @@
                 <a:ea typeface="Noto Sans CJK JP"/>
                 <a:cs typeface="Noto Sans"/>
               </a:rPr>
-              <a:t>desublimation</a:t>
-            </a:r>
-          </a:p>
-        </p:txBody>
-      </p:sp>
-      <p:sp>
-        <p:nvSpPr>
-          <p:cNvPr id="8" name="sources"/>
+              <a:t>deposition（凝華）</a:t>
+            </a:r>
+          </a:p>
+          <a:p>
+            <a:pPr algn="l">
+              <a:lnSpc>
+                <a:spcPts val="2436"/>
+              </a:lnSpc>
+              <a:spcBef>
+                <a:spcPts val="0"/>
+              </a:spcBef>
+              <a:spcAft>
+                <a:spcPts val="0"/>
+              </a:spcAft>
+              <a:buNone/>
+              <a:defRPr sz="2100" b="0">
+                <a:solidFill>
+                  <a:srgbClr val="303437"/>
+                </a:solidFill>
+                <a:latin typeface="Noto Sans"/>
+              </a:defRPr>
+            </a:pPr>
+            <a:r>
+              <a:rPr sz="2100" b="1" lang="ja-JP" altLang="en-US">
+                <a:solidFill>
+                  <a:srgbClr val="B13731"/>
+                </a:solidFill>
+                <a:latin typeface="Noto Sans"/>
+                <a:ea typeface="Noto Sans CJK JP"/>
+                <a:cs typeface="Noto Sans"/>
+              </a:rPr>
+              <a:t>desublimation（凝華）</a:t>
+            </a:r>
+          </a:p>
+        </p:txBody>
+      </p:sp>
+      <p:sp>
+        <p:nvSpPr>
+          <p:cNvPr id="10" name="sources"/>
           <p:cNvSpPr txBox="1"/>
           <p:nvPr/>
         </p:nvSpPr>
@@ -19829,7 +20049,7 @@
                 <a:ea typeface="Noto Sans CJK JP"/>
                 <a:cs typeface="Noto Sans"/>
               </a:rPr>
-              <a:t>実例4：二つの呼び名を抽出する（訳）</a:t>
+              <a:t>実例5：シーズンで歌い手が変わる</a:t>
             </a:r>
           </a:p>
         </p:txBody>
@@ -19931,7 +20151,7 @@
                 <a:ea typeface="Noto Sans CJK JP"/>
                 <a:cs typeface="Noto Sans"/>
               </a:rPr>
-              <a:t>記事：凝華（相転移） ／ 日本語訳・正解注釈</a:t>
+              <a:t>記事：That '70s Show ／ long answer全文・質問・正解注釈</a:t>
             </a:r>
           </a:p>
         </p:txBody>
@@ -19945,7 +20165,7 @@
         <p:spPr>
           <a:xfrm>
             <a:off x="548640" y="1600200"/>
-            <a:ext cx="8046720" cy="1395259"/>
+            <a:ext cx="8046720" cy="965742"/>
           </a:xfrm>
           <a:prstGeom prst="rect">
             <a:avLst/>
@@ -19973,70 +20193,70 @@
           </a:fontRef>
         </p:style>
         <p:txBody>
-          <a:bodyPr rtlCol="0" anchor="t" wrap="square" lIns="177800" rIns="177800" tIns="63500" bIns="127000">
+          <a:bodyPr rtlCol="0" anchor="t" wrap="square" lIns="177800" rIns="177800" tIns="39237" bIns="127000">
             <a:noAutofit/>
           </a:bodyPr>
           <a:lstStyle/>
           <a:p>
             <a:pPr algn="l">
               <a:lnSpc>
-                <a:spcPts val="2379"/>
-              </a:lnSpc>
-              <a:spcBef>
-                <a:spcPts val="0"/>
-              </a:spcBef>
-              <a:spcAft>
-                <a:spcPts val="0"/>
-              </a:spcAft>
-              <a:buNone/>
-              <a:defRPr sz="2000" b="0">
-                <a:solidFill>
-                  <a:srgbClr val="303437"/>
-                </a:solidFill>
-                <a:latin typeface="Noto Sans"/>
-              </a:defRPr>
-            </a:pPr>
-            <a:r>
-              <a:rPr sz="2000" b="0" lang="ja-JP" altLang="en-US">
-                <a:solidFill>
-                  <a:srgbClr val="303437"/>
-                </a:solidFill>
-                <a:latin typeface="Noto Sans"/>
-                <a:ea typeface="Noto Sans CJK JP"/>
-                <a:cs typeface="Noto Sans"/>
-              </a:rPr>
-              <a:t>凝華は熱力学的な過程で、気体が液体の状態を経ずに固体へ変わる相転移である。凝華の逆は昇華なので、凝華はdesublimationと呼ばれることもある。</a:t>
+                <a:spcPts val="2142"/>
+              </a:lnSpc>
+              <a:spcBef>
+                <a:spcPts val="0"/>
+              </a:spcBef>
+              <a:spcAft>
+                <a:spcPts val="0"/>
+              </a:spcAft>
+              <a:buNone/>
+              <a:defRPr sz="1800" b="0">
+                <a:solidFill>
+                  <a:srgbClr val="303437"/>
+                </a:solidFill>
+                <a:latin typeface="Noto Sans"/>
+              </a:defRPr>
+            </a:pPr>
+            <a:r>
+              <a:rPr sz="1800" b="0" lang="ja-JP" altLang="en-US">
+                <a:solidFill>
+                  <a:srgbClr val="303437"/>
+                </a:solidFill>
+                <a:latin typeface="Noto Sans"/>
+                <a:ea typeface="Noto Sans CJK JP"/>
+                <a:cs typeface="Noto Sans"/>
+              </a:rPr>
+              <a:t>Opening theme "In the Street" by Big Star as performed by; Todd Griffin (season 1) Cheap Trick (seasons 2–8)</a:t>
             </a:r>
           </a:p>
           <a:p>
             <a:pPr algn="l">
               <a:lnSpc>
-                <a:spcPts val="2379"/>
-              </a:lnSpc>
-              <a:spcBef>
-                <a:spcPts val="0"/>
-              </a:spcBef>
-              <a:spcAft>
-                <a:spcPts val="0"/>
-              </a:spcAft>
-              <a:buNone/>
-              <a:defRPr sz="2000" b="0">
-                <a:solidFill>
-                  <a:srgbClr val="303437"/>
-                </a:solidFill>
-                <a:latin typeface="Noto Sans"/>
-              </a:defRPr>
-            </a:pPr>
-            <a:r>
-              <a:rPr sz="2000" b="0" lang="ja-JP" altLang="en-US">
-                <a:solidFill>
-                  <a:srgbClr val="303437"/>
-                </a:solidFill>
-                <a:latin typeface="Noto Sans"/>
-                <a:ea typeface="Noto Sans CJK JP"/>
-                <a:cs typeface="Noto Sans"/>
-              </a:rPr>
-              <a:t>質問：気体から固体への相転移は何と呼ばれるか。</a:t>
+                <a:spcPts val="2142"/>
+              </a:lnSpc>
+              <a:spcBef>
+                <a:spcPts val="0"/>
+              </a:spcBef>
+              <a:spcAft>
+                <a:spcPts val="0"/>
+              </a:spcAft>
+              <a:buNone/>
+              <a:defRPr sz="1800" b="0">
+                <a:solidFill>
+                  <a:srgbClr val="303437"/>
+                </a:solidFill>
+                <a:latin typeface="Noto Sans"/>
+              </a:defRPr>
+            </a:pPr>
+            <a:r>
+              <a:rPr sz="1800" b="0" lang="ja-JP" altLang="en-US">
+                <a:solidFill>
+                  <a:srgbClr val="303437"/>
+                </a:solidFill>
+                <a:latin typeface="Noto Sans"/>
+                <a:ea typeface="Noto Sans CJK JP"/>
+                <a:cs typeface="Noto Sans"/>
+              </a:rPr>
+              <a:t>Question: who sang the theme song to that 70s show</a:t>
             </a:r>
           </a:p>
         </p:txBody>
@@ -20049,7 +20269,7 @@
         </p:nvSpPr>
         <p:spPr>
           <a:xfrm>
-            <a:off x="594360" y="3105189"/>
+            <a:off x="594360" y="2675671"/>
             <a:ext cx="3886200" cy="373380"/>
           </a:xfrm>
           <a:prstGeom prst="rect">
@@ -20090,7 +20310,7 @@
                 <a:ea typeface="Noto Sans CJK JP"/>
                 <a:cs typeface="Noto Sans"/>
               </a:rPr>
-              <a:t>deposition（凝華）</a:t>
+              <a:t>Todd Griffin (season 1)</a:t>
             </a:r>
           </a:p>
         </p:txBody>
@@ -20103,7 +20323,7 @@
         </p:nvSpPr>
         <p:spPr>
           <a:xfrm>
-            <a:off x="4681728" y="3105189"/>
+            <a:off x="4681728" y="2675671"/>
             <a:ext cx="3886200" cy="373380"/>
           </a:xfrm>
           <a:prstGeom prst="rect">
@@ -20144,7 +20364,7 @@
                 <a:ea typeface="Noto Sans CJK JP"/>
                 <a:cs typeface="Noto Sans"/>
               </a:rPr>
-              <a:t>desublimation（凝華）</a:t>
+              <a:t>Cheap Trick (seasons 2–8)</a:t>
             </a:r>
           </a:p>
         </p:txBody>
@@ -20198,7 +20418,7 @@
                 <a:ea typeface="Noto Sans CJK JP"/>
                 <a:cs typeface="Noto Sans"/>
               </a:rPr>
-              <a:t>[1] Google Research, Natural Questions. dev / Hugging Face公開配布。 dev / example_id: -716176363900512091</a:t>
+              <a:t>[1] Google Research, Natural Questions. dev / Hugging Face公開配布。 dev / example_id: 1318031841813121387</a:t>
             </a:r>
           </a:p>
           <a:p>
@@ -20290,7 +20510,7 @@
                 <a:ea typeface="Noto Sans CJK JP"/>
                 <a:cs typeface="Noto Sans"/>
               </a:rPr>
-              <a:t>実例5：シーズンで歌い手が変わる</a:t>
+              <a:t>実例5：シーズンで歌い手が変わる（訳）</a:t>
             </a:r>
           </a:p>
         </p:txBody>
@@ -20392,7 +20612,7 @@
                 <a:ea typeface="Noto Sans CJK JP"/>
                 <a:cs typeface="Noto Sans"/>
               </a:rPr>
-              <a:t>記事：That '70s Show ／ long answer全文・質問・正解注釈</a:t>
+              <a:t>記事：ザット'70sショー ／ 日本語訳・正解注釈</a:t>
             </a:r>
           </a:p>
         </p:txBody>
@@ -20406,7 +20626,7 @@
         <p:spPr>
           <a:xfrm>
             <a:off x="548640" y="1600200"/>
-            <a:ext cx="8046720" cy="1002756"/>
+            <a:ext cx="8046720" cy="1334688"/>
           </a:xfrm>
           <a:prstGeom prst="rect">
             <a:avLst/>
@@ -20434,70 +20654,70 @@
           </a:fontRef>
         </p:style>
         <p:txBody>
-          <a:bodyPr rtlCol="0" anchor="t" wrap="square" lIns="177800" rIns="177800" tIns="63500" bIns="127000">
+          <a:bodyPr rtlCol="0" anchor="t" wrap="square" lIns="177800" rIns="177800" tIns="56386" bIns="127000">
             <a:noAutofit/>
           </a:bodyPr>
           <a:lstStyle/>
           <a:p>
             <a:pPr algn="l">
               <a:lnSpc>
-                <a:spcPts val="2142"/>
-              </a:lnSpc>
-              <a:spcBef>
-                <a:spcPts val="0"/>
-              </a:spcBef>
-              <a:spcAft>
-                <a:spcPts val="0"/>
-              </a:spcAft>
-              <a:buNone/>
-              <a:defRPr sz="1800" b="0">
-                <a:solidFill>
-                  <a:srgbClr val="303437"/>
-                </a:solidFill>
-                <a:latin typeface="Noto Sans"/>
-              </a:defRPr>
-            </a:pPr>
-            <a:r>
-              <a:rPr sz="1800" b="0" lang="ja-JP" altLang="en-US">
-                <a:solidFill>
-                  <a:srgbClr val="303437"/>
-                </a:solidFill>
-                <a:latin typeface="Noto Sans"/>
-                <a:ea typeface="Noto Sans CJK JP"/>
-                <a:cs typeface="Noto Sans"/>
-              </a:rPr>
-              <a:t>Opening theme "In the Street" by Big Star as performed by; Todd Griffin (season 1) Cheap Trick (seasons 2–8)</a:t>
+                <a:spcPts val="2379"/>
+              </a:lnSpc>
+              <a:spcBef>
+                <a:spcPts val="0"/>
+              </a:spcBef>
+              <a:spcAft>
+                <a:spcPts val="0"/>
+              </a:spcAft>
+              <a:buNone/>
+              <a:defRPr sz="2000" b="0">
+                <a:solidFill>
+                  <a:srgbClr val="303437"/>
+                </a:solidFill>
+                <a:latin typeface="Noto Sans"/>
+              </a:defRPr>
+            </a:pPr>
+            <a:r>
+              <a:rPr sz="2000" b="0" lang="ja-JP" altLang="en-US">
+                <a:solidFill>
+                  <a:srgbClr val="303437"/>
+                </a:solidFill>
+                <a:latin typeface="Noto Sans"/>
+                <a:ea typeface="Noto Sans CJK JP"/>
+                <a:cs typeface="Noto Sans"/>
+              </a:rPr>
+              <a:t>オープニング曲はBig Starの「In the Street」。歌唱はトッド・グリフィン（シーズン1）、チープ・トリック（シーズン2〜8）。</a:t>
             </a:r>
           </a:p>
           <a:p>
             <a:pPr algn="l">
               <a:lnSpc>
-                <a:spcPts val="2142"/>
-              </a:lnSpc>
-              <a:spcBef>
-                <a:spcPts val="0"/>
-              </a:spcBef>
-              <a:spcAft>
-                <a:spcPts val="0"/>
-              </a:spcAft>
-              <a:buNone/>
-              <a:defRPr sz="1800" b="0">
-                <a:solidFill>
-                  <a:srgbClr val="303437"/>
-                </a:solidFill>
-                <a:latin typeface="Noto Sans"/>
-              </a:defRPr>
-            </a:pPr>
-            <a:r>
-              <a:rPr sz="1800" b="0" lang="ja-JP" altLang="en-US">
-                <a:solidFill>
-                  <a:srgbClr val="303437"/>
-                </a:solidFill>
-                <a:latin typeface="Noto Sans"/>
-                <a:ea typeface="Noto Sans CJK JP"/>
-                <a:cs typeface="Noto Sans"/>
-              </a:rPr>
-              <a:t>Question: who sang the theme song to that 70s show</a:t>
+                <a:spcPts val="2379"/>
+              </a:lnSpc>
+              <a:spcBef>
+                <a:spcPts val="0"/>
+              </a:spcBef>
+              <a:spcAft>
+                <a:spcPts val="0"/>
+              </a:spcAft>
+              <a:buNone/>
+              <a:defRPr sz="2000" b="0">
+                <a:solidFill>
+                  <a:srgbClr val="303437"/>
+                </a:solidFill>
+                <a:latin typeface="Noto Sans"/>
+              </a:defRPr>
+            </a:pPr>
+            <a:r>
+              <a:rPr sz="2000" b="0" lang="ja-JP" altLang="en-US">
+                <a:solidFill>
+                  <a:srgbClr val="303437"/>
+                </a:solidFill>
+                <a:latin typeface="Noto Sans"/>
+                <a:ea typeface="Noto Sans CJK JP"/>
+                <a:cs typeface="Noto Sans"/>
+              </a:rPr>
+              <a:t>質問：「ザット’70sショー」の主題歌を歌ったのは誰か。</a:t>
             </a:r>
           </a:p>
         </p:txBody>
@@ -20510,8 +20730,8 @@
         </p:nvSpPr>
         <p:spPr>
           <a:xfrm>
-            <a:off x="594360" y="2712685"/>
-            <a:ext cx="3886200" cy="373380"/>
+            <a:off x="594360" y="3044618"/>
+            <a:ext cx="3886200" cy="682751"/>
           </a:xfrm>
           <a:prstGeom prst="rect">
             <a:avLst/>
@@ -20551,7 +20771,7 @@
                 <a:ea typeface="Noto Sans CJK JP"/>
                 <a:cs typeface="Noto Sans"/>
               </a:rPr>
-              <a:t>Todd Griffin (season 1)</a:t>
+              <a:t>トッド・グリフィン（シーズン1）</a:t>
             </a:r>
           </a:p>
         </p:txBody>
@@ -20564,8 +20784,8 @@
         </p:nvSpPr>
         <p:spPr>
           <a:xfrm>
-            <a:off x="4681728" y="2712685"/>
-            <a:ext cx="3886200" cy="373380"/>
+            <a:off x="4681728" y="3044618"/>
+            <a:ext cx="3886200" cy="682751"/>
           </a:xfrm>
           <a:prstGeom prst="rect">
             <a:avLst/>
@@ -20605,7 +20825,7 @@
                 <a:ea typeface="Noto Sans CJK JP"/>
                 <a:cs typeface="Noto Sans"/>
               </a:rPr>
-              <a:t>Cheap Trick (seasons 2–8)</a:t>
+              <a:t>チープ・トリック（シーズン2〜8）</a:t>
             </a:r>
           </a:p>
         </p:txBody>
@@ -20751,7 +20971,7 @@
                 <a:ea typeface="Noto Sans CJK JP"/>
                 <a:cs typeface="Noto Sans"/>
               </a:rPr>
-              <a:t>実例5：シーズンで歌い手が変わる（訳）</a:t>
+              <a:t>実例6：病気と微生物の関係</a:t>
             </a:r>
           </a:p>
         </p:txBody>
@@ -20853,7 +21073,7 @@
                 <a:ea typeface="Noto Sans CJK JP"/>
                 <a:cs typeface="Noto Sans"/>
               </a:rPr>
-              <a:t>記事：ザット'70sショー ／ 日本語訳・正解注釈</a:t>
+              <a:t>記事：Germ theory of disease ／ long answer全文・質問・正解注釈</a:t>
             </a:r>
           </a:p>
         </p:txBody>
@@ -20867,7 +21087,7 @@
         <p:spPr>
           <a:xfrm>
             <a:off x="548640" y="1600200"/>
-            <a:ext cx="8046720" cy="1396529"/>
+            <a:ext cx="8046720" cy="1792916"/>
           </a:xfrm>
           <a:prstGeom prst="rect">
             <a:avLst/>
@@ -20895,70 +21115,70 @@
           </a:fontRef>
         </p:style>
         <p:txBody>
-          <a:bodyPr rtlCol="0" anchor="t" wrap="square" lIns="177800" rIns="177800" tIns="63500" bIns="127000">
+          <a:bodyPr rtlCol="0" anchor="t" wrap="square" lIns="177800" rIns="177800" tIns="45531" bIns="127000">
             <a:noAutofit/>
           </a:bodyPr>
           <a:lstStyle/>
           <a:p>
             <a:pPr algn="l">
               <a:lnSpc>
-                <a:spcPts val="2379"/>
-              </a:lnSpc>
-              <a:spcBef>
-                <a:spcPts val="0"/>
-              </a:spcBef>
-              <a:spcAft>
-                <a:spcPts val="0"/>
-              </a:spcAft>
-              <a:buNone/>
-              <a:defRPr sz="2000" b="0">
-                <a:solidFill>
-                  <a:srgbClr val="303437"/>
-                </a:solidFill>
-                <a:latin typeface="Noto Sans"/>
-              </a:defRPr>
-            </a:pPr>
-            <a:r>
-              <a:rPr sz="2000" b="0" lang="ja-JP" altLang="en-US">
-                <a:solidFill>
-                  <a:srgbClr val="303437"/>
-                </a:solidFill>
-                <a:latin typeface="Noto Sans"/>
-                <a:ea typeface="Noto Sans CJK JP"/>
-                <a:cs typeface="Noto Sans"/>
-              </a:rPr>
-              <a:t>オープニング曲はBig Starの「In the Street」。歌唱はトッド・グリフィン（シーズン1）、チープ・トリック（シーズン2〜8）。</a:t>
+                <a:spcPts val="1844"/>
+              </a:lnSpc>
+              <a:spcBef>
+                <a:spcPts val="0"/>
+              </a:spcBef>
+              <a:spcAft>
+                <a:spcPts val="0"/>
+              </a:spcAft>
+              <a:buNone/>
+              <a:defRPr sz="1550" b="0">
+                <a:solidFill>
+                  <a:srgbClr val="303437"/>
+                </a:solidFill>
+                <a:latin typeface="Noto Sans"/>
+              </a:defRPr>
+            </a:pPr>
+            <a:r>
+              <a:rPr sz="1550" b="0" lang="ja-JP" altLang="en-US">
+                <a:solidFill>
+                  <a:srgbClr val="303437"/>
+                </a:solidFill>
+                <a:latin typeface="Noto Sans"/>
+                <a:ea typeface="Noto Sans CJK JP"/>
+                <a:cs typeface="Noto Sans"/>
+              </a:rPr>
+              <a:t>The Italian Agostino Bassi was the first person to prove that a disease was caused by a microorganism when he conducted a series of experiments between 1808 and 1813, demonstrating that a "vegetable parasite" caused a disease in silkworms known as calcinaccio—this disease was devastating the French silk industry at the time. The "vegetable parasite" is now known to be a fungus pathogenic to insects called Beauveria bassiana (named after Bassi).</a:t>
             </a:r>
           </a:p>
           <a:p>
             <a:pPr algn="l">
               <a:lnSpc>
-                <a:spcPts val="2379"/>
-              </a:lnSpc>
-              <a:spcBef>
-                <a:spcPts val="0"/>
-              </a:spcBef>
-              <a:spcAft>
-                <a:spcPts val="0"/>
-              </a:spcAft>
-              <a:buNone/>
-              <a:defRPr sz="2000" b="0">
-                <a:solidFill>
-                  <a:srgbClr val="303437"/>
-                </a:solidFill>
-                <a:latin typeface="Noto Sans"/>
-              </a:defRPr>
-            </a:pPr>
-            <a:r>
-              <a:rPr sz="2000" b="0" lang="ja-JP" altLang="en-US">
-                <a:solidFill>
-                  <a:srgbClr val="303437"/>
-                </a:solidFill>
-                <a:latin typeface="Noto Sans"/>
-                <a:ea typeface="Noto Sans CJK JP"/>
-                <a:cs typeface="Noto Sans"/>
-              </a:rPr>
-              <a:t>質問：「ザット’70sショー」の主題歌を歌ったのは誰か。</a:t>
+                <a:spcPts val="1844"/>
+              </a:lnSpc>
+              <a:spcBef>
+                <a:spcPts val="0"/>
+              </a:spcBef>
+              <a:spcAft>
+                <a:spcPts val="0"/>
+              </a:spcAft>
+              <a:buNone/>
+              <a:defRPr sz="1550" b="0">
+                <a:solidFill>
+                  <a:srgbClr val="303437"/>
+                </a:solidFill>
+                <a:latin typeface="Noto Sans"/>
+              </a:defRPr>
+            </a:pPr>
+            <a:r>
+              <a:rPr sz="1550" b="0" lang="ja-JP" altLang="en-US">
+                <a:solidFill>
+                  <a:srgbClr val="303437"/>
+                </a:solidFill>
+                <a:latin typeface="Noto Sans"/>
+                <a:ea typeface="Noto Sans CJK JP"/>
+                <a:cs typeface="Noto Sans"/>
+              </a:rPr>
+              <a:t>Question: who established the idea that microorganisms play a role in disease</a:t>
             </a:r>
           </a:p>
         </p:txBody>
@@ -20971,8 +21191,8 @@
         </p:nvSpPr>
         <p:spPr>
           <a:xfrm>
-            <a:off x="594360" y="3106459"/>
-            <a:ext cx="3886200" cy="682751"/>
+            <a:off x="594360" y="3502845"/>
+            <a:ext cx="7955279" cy="373380"/>
           </a:xfrm>
           <a:prstGeom prst="rect">
             <a:avLst/>
@@ -21012,21 +21232,21 @@
                 <a:ea typeface="Noto Sans CJK JP"/>
                 <a:cs typeface="Noto Sans"/>
               </a:rPr>
-              <a:t>トッド・グリフィン（シーズン1）</a:t>
-            </a:r>
-          </a:p>
-        </p:txBody>
-      </p:sp>
-      <p:sp>
-        <p:nvSpPr>
-          <p:cNvPr id="7" name="TextBox 6"/>
+              <a:t>Agostino Bassi</a:t>
+            </a:r>
+          </a:p>
+        </p:txBody>
+      </p:sp>
+      <p:sp>
+        <p:nvSpPr>
+          <p:cNvPr id="7" name="sources"/>
           <p:cNvSpPr txBox="1"/>
           <p:nvPr/>
         </p:nvSpPr>
         <p:spPr>
           <a:xfrm>
-            <a:off x="4681728" y="3106459"/>
-            <a:ext cx="3886200" cy="682751"/>
+            <a:off x="502920" y="4700016"/>
+            <a:ext cx="8183879" cy="530352"/>
           </a:xfrm>
           <a:prstGeom prst="rect">
             <a:avLst/>
@@ -21041,60 +21261,6 @@
           <a:p>
             <a:pPr algn="l">
               <a:lnSpc>
-                <a:spcPts val="2436"/>
-              </a:lnSpc>
-              <a:spcBef>
-                <a:spcPts val="0"/>
-              </a:spcBef>
-              <a:spcAft>
-                <a:spcPts val="0"/>
-              </a:spcAft>
-              <a:buNone/>
-              <a:defRPr sz="2100" b="0">
-                <a:solidFill>
-                  <a:srgbClr val="303437"/>
-                </a:solidFill>
-                <a:latin typeface="Noto Sans"/>
-              </a:defRPr>
-            </a:pPr>
-            <a:r>
-              <a:rPr sz="2100" b="1" lang="ja-JP" altLang="en-US">
-                <a:solidFill>
-                  <a:srgbClr val="B13731"/>
-                </a:solidFill>
-                <a:latin typeface="Noto Sans"/>
-                <a:ea typeface="Noto Sans CJK JP"/>
-                <a:cs typeface="Noto Sans"/>
-              </a:rPr>
-              <a:t>チープ・トリック（シーズン2〜8）</a:t>
-            </a:r>
-          </a:p>
-        </p:txBody>
-      </p:sp>
-      <p:sp>
-        <p:nvSpPr>
-          <p:cNvPr id="8" name="sources"/>
-          <p:cNvSpPr txBox="1"/>
-          <p:nvPr/>
-        </p:nvSpPr>
-        <p:spPr>
-          <a:xfrm>
-            <a:off x="502920" y="4700016"/>
-            <a:ext cx="8183879" cy="530352"/>
-          </a:xfrm>
-          <a:prstGeom prst="rect">
-            <a:avLst/>
-          </a:prstGeom>
-          <a:noFill/>
-        </p:spPr>
-        <p:txBody>
-          <a:bodyPr wrap="square" lIns="0" rIns="0" tIns="0" bIns="0">
-            <a:noAutofit/>
-          </a:bodyPr>
-          <a:lstStyle/>
-          <a:p>
-            <a:pPr algn="l">
-              <a:lnSpc>
                 <a:spcPts val="940"/>
               </a:lnSpc>
               <a:spcBef>
@@ -21120,7 +21286,7 @@
                 <a:ea typeface="Noto Sans CJK JP"/>
                 <a:cs typeface="Noto Sans"/>
               </a:rPr>
-              <a:t>[1] Google Research, Natural Questions. dev / Hugging Face公開配布。 dev / example_id: 1318031841813121387</a:t>
+              <a:t>[1] Google Research, Natural Questions. dev / Hugging Face公開配布。 dev / example_id: 8852834747561852791</a:t>
             </a:r>
           </a:p>
           <a:p>
@@ -21212,7 +21378,7 @@
                 <a:ea typeface="Noto Sans CJK JP"/>
                 <a:cs typeface="Noto Sans"/>
               </a:rPr>
-              <a:t>実例6：病気と微生物の関係</a:t>
+              <a:t>実例6：病気と微生物の関係（訳）</a:t>
             </a:r>
           </a:p>
         </p:txBody>
@@ -21314,7 +21480,7 @@
                 <a:ea typeface="Noto Sans CJK JP"/>
                 <a:cs typeface="Noto Sans"/>
               </a:rPr>
-              <a:t>記事：Germ theory of disease ／ long answer全文・質問・正解注釈</a:t>
+              <a:t>記事：病原菌説 ／ 日本語訳・正解注釈</a:t>
             </a:r>
           </a:p>
         </p:txBody>
@@ -21328,7 +21494,7 @@
         <p:spPr>
           <a:xfrm>
             <a:off x="548640" y="1600200"/>
-            <a:ext cx="8046720" cy="1823636"/>
+            <a:ext cx="8046720" cy="1966343"/>
           </a:xfrm>
           <a:prstGeom prst="rect">
             <a:avLst/>
@@ -21356,70 +21522,70 @@
           </a:fontRef>
         </p:style>
         <p:txBody>
-          <a:bodyPr rtlCol="0" anchor="t" wrap="square" lIns="177800" rIns="177800" tIns="63500" bIns="127000">
+          <a:bodyPr rtlCol="0" anchor="t" wrap="square" lIns="177800" rIns="177800" tIns="50904" bIns="127000">
             <a:noAutofit/>
           </a:bodyPr>
           <a:lstStyle/>
           <a:p>
             <a:pPr algn="l">
               <a:lnSpc>
-                <a:spcPts val="1844"/>
-              </a:lnSpc>
-              <a:spcBef>
-                <a:spcPts val="0"/>
-              </a:spcBef>
-              <a:spcAft>
-                <a:spcPts val="0"/>
-              </a:spcAft>
-              <a:buNone/>
-              <a:defRPr sz="1550" b="0">
-                <a:solidFill>
-                  <a:srgbClr val="303437"/>
-                </a:solidFill>
-                <a:latin typeface="Noto Sans"/>
-              </a:defRPr>
-            </a:pPr>
-            <a:r>
-              <a:rPr sz="1550" b="0" lang="ja-JP" altLang="en-US">
-                <a:solidFill>
-                  <a:srgbClr val="303437"/>
-                </a:solidFill>
-                <a:latin typeface="Noto Sans"/>
-                <a:ea typeface="Noto Sans CJK JP"/>
-                <a:cs typeface="Noto Sans"/>
-              </a:rPr>
-              <a:t>The Italian Agostino Bassi was the first person to prove that a disease was caused by a microorganism when he conducted a series of experiments between 1808 and 1813, demonstrating that a "vegetable parasite" caused a disease in silkworms known as calcinaccio—this disease was devastating the French silk industry at the time. The "vegetable parasite" is now known to be a fungus pathogenic to insects called Beauveria bassiana (named after Bassi).</a:t>
+                <a:spcPts val="2082"/>
+              </a:lnSpc>
+              <a:spcBef>
+                <a:spcPts val="0"/>
+              </a:spcBef>
+              <a:spcAft>
+                <a:spcPts val="0"/>
+              </a:spcAft>
+              <a:buNone/>
+              <a:defRPr sz="1750" b="0">
+                <a:solidFill>
+                  <a:srgbClr val="303437"/>
+                </a:solidFill>
+                <a:latin typeface="Noto Sans"/>
+              </a:defRPr>
+            </a:pPr>
+            <a:r>
+              <a:rPr sz="1750" b="0" lang="ja-JP" altLang="en-US">
+                <a:solidFill>
+                  <a:srgbClr val="303437"/>
+                </a:solidFill>
+                <a:latin typeface="Noto Sans"/>
+                <a:ea typeface="Noto Sans CJK JP"/>
+                <a:cs typeface="Noto Sans"/>
+              </a:rPr>
+              <a:t>イタリア人のアゴスティーノ・バッシは、1808年から1813年にかけて一連の実験を行い、病気が微生物によって引き起こされることを初めて証明した。「植物性の寄生体」がカイコのcalcinaccioという病気を引き起こすことを示したのである。この病気は当時、フランスの絹産業に壊滅的な被害を与えていた。この「植物性の寄生体」は現在、昆虫に病気を起こす菌類Beauveria bassiana（バッシにちなむ命名）と分かっている。</a:t>
             </a:r>
           </a:p>
           <a:p>
             <a:pPr algn="l">
               <a:lnSpc>
-                <a:spcPts val="1844"/>
-              </a:lnSpc>
-              <a:spcBef>
-                <a:spcPts val="0"/>
-              </a:spcBef>
-              <a:spcAft>
-                <a:spcPts val="0"/>
-              </a:spcAft>
-              <a:buNone/>
-              <a:defRPr sz="1550" b="0">
-                <a:solidFill>
-                  <a:srgbClr val="303437"/>
-                </a:solidFill>
-                <a:latin typeface="Noto Sans"/>
-              </a:defRPr>
-            </a:pPr>
-            <a:r>
-              <a:rPr sz="1550" b="0" lang="ja-JP" altLang="en-US">
-                <a:solidFill>
-                  <a:srgbClr val="303437"/>
-                </a:solidFill>
-                <a:latin typeface="Noto Sans"/>
-                <a:ea typeface="Noto Sans CJK JP"/>
-                <a:cs typeface="Noto Sans"/>
-              </a:rPr>
-              <a:t>Question: who established the idea that microorganisms play a role in disease</a:t>
+                <a:spcPts val="2082"/>
+              </a:lnSpc>
+              <a:spcBef>
+                <a:spcPts val="0"/>
+              </a:spcBef>
+              <a:spcAft>
+                <a:spcPts val="0"/>
+              </a:spcAft>
+              <a:buNone/>
+              <a:defRPr sz="1750" b="0">
+                <a:solidFill>
+                  <a:srgbClr val="303437"/>
+                </a:solidFill>
+                <a:latin typeface="Noto Sans"/>
+              </a:defRPr>
+            </a:pPr>
+            <a:r>
+              <a:rPr sz="1750" b="0" lang="ja-JP" altLang="en-US">
+                <a:solidFill>
+                  <a:srgbClr val="303437"/>
+                </a:solidFill>
+                <a:latin typeface="Noto Sans"/>
+                <a:ea typeface="Noto Sans CJK JP"/>
+                <a:cs typeface="Noto Sans"/>
+              </a:rPr>
+              <a:t>質問：微生物が病気に関わるという考えを確立したのは誰か。</a:t>
             </a:r>
           </a:p>
         </p:txBody>
@@ -21432,7 +21598,7 @@
         </p:nvSpPr>
         <p:spPr>
           <a:xfrm>
-            <a:off x="594360" y="3533565"/>
+            <a:off x="594360" y="3676272"/>
             <a:ext cx="7955279" cy="373380"/>
           </a:xfrm>
           <a:prstGeom prst="rect">
@@ -21473,7 +21639,7 @@
                 <a:ea typeface="Noto Sans CJK JP"/>
                 <a:cs typeface="Noto Sans"/>
               </a:rPr>
-              <a:t>Agostino Bassi</a:t>
+              <a:t>アゴスティーノ・バッシ</a:t>
             </a:r>
           </a:p>
         </p:txBody>
@@ -21619,7 +21785,7 @@
                 <a:ea typeface="Noto Sans CJK JP"/>
                 <a:cs typeface="Noto Sans"/>
               </a:rPr>
-              <a:t>実例6：病気と微生物の関係（訳）</a:t>
+              <a:t>実例7：データベースの種類</a:t>
             </a:r>
           </a:p>
         </p:txBody>
@@ -21721,7 +21887,7 @@
                 <a:ea typeface="Noto Sans CJK JP"/>
                 <a:cs typeface="Noto Sans"/>
               </a:rPr>
-              <a:t>記事：病原菌説 ／ 日本語訳・正解注釈</a:t>
+              <a:t>記事：Library Literature and Information Science ／ long answer全文・質問・正解注釈</a:t>
             </a:r>
           </a:p>
         </p:txBody>
@@ -21735,7 +21901,7 @@
         <p:spPr>
           <a:xfrm>
             <a:off x="548640" y="1600200"/>
-            <a:ext cx="8046720" cy="2034035"/>
+            <a:ext cx="8046720" cy="2203010"/>
           </a:xfrm>
           <a:prstGeom prst="rect">
             <a:avLst/>
@@ -21763,7 +21929,7 @@
           </a:fontRef>
         </p:style>
         <p:txBody>
-          <a:bodyPr rtlCol="0" anchor="t" wrap="square" lIns="177800" rIns="177800" tIns="63500" bIns="127000">
+          <a:bodyPr rtlCol="0" anchor="t" wrap="square" lIns="177800" rIns="177800" tIns="39158" bIns="127000">
             <a:noAutofit/>
           </a:bodyPr>
           <a:lstStyle/>
@@ -21795,7 +21961,7 @@
                 <a:ea typeface="Noto Sans CJK JP"/>
                 <a:cs typeface="Noto Sans"/>
               </a:rPr>
-              <a:t>イタリア人のアゴスティーノ・バッシは、1808年から1813年にかけて一連の実験を行い、病気が微生物によって引き起こされることを初めて証明した。「植物性の寄生体」がカイコのcalcinaccioという病気を引き起こすことを示したのである。この病気は当時、フランスの絹産業に壊滅的な被害を与えていた。この「植物性の寄生体」は現在、昆虫に病気を起こす菌類Beauveria bassiana（バッシにちなむ命名）と分かっている。</a:t>
+              <a:t>Library Literature and Information Science is a bibliographic database that indexes over 410 library and information science periodicals published internationally. It also covers books, chapters within books, library school theses, and pamphlets. In 2011, the H. W. Wilson Company, the firm that created the index, sold it to EBSCO Publishing along with other H.W. Wilson indexes and databases.[1]</a:t>
             </a:r>
           </a:p>
           <a:p>
@@ -21826,7 +21992,7 @@
                 <a:ea typeface="Noto Sans CJK JP"/>
                 <a:cs typeface="Noto Sans"/>
               </a:rPr>
-              <a:t>質問：微生物が病気に関わるという考えを確立したのは誰か。</a:t>
+              <a:t>Question: what type of database is library literature and information science</a:t>
             </a:r>
           </a:p>
         </p:txBody>
@@ -21839,7 +22005,7 @@
         </p:nvSpPr>
         <p:spPr>
           <a:xfrm>
-            <a:off x="594360" y="3743964"/>
+            <a:off x="594360" y="3912939"/>
             <a:ext cx="7955279" cy="373380"/>
           </a:xfrm>
           <a:prstGeom prst="rect">
@@ -21880,7 +22046,7 @@
                 <a:ea typeface="Noto Sans CJK JP"/>
                 <a:cs typeface="Noto Sans"/>
               </a:rPr>
-              <a:t>アゴスティーノ・バッシ</a:t>
+              <a:t>bibliographic</a:t>
             </a:r>
           </a:p>
         </p:txBody>
@@ -21934,7 +22100,7 @@
                 <a:ea typeface="Noto Sans CJK JP"/>
                 <a:cs typeface="Noto Sans"/>
               </a:rPr>
-              <a:t>[1] Google Research, Natural Questions. dev / Hugging Face公開配布。 dev / example_id: 8852834747561852791</a:t>
+              <a:t>[1] Google Research, Natural Questions. dev / Hugging Face公開配布。 dev / example_id: -693847391395525804</a:t>
             </a:r>
           </a:p>
           <a:p>
@@ -22026,7 +22192,7 @@
                 <a:ea typeface="Noto Sans CJK JP"/>
                 <a:cs typeface="Noto Sans"/>
               </a:rPr>
-              <a:t>実例7：データベースの種類</a:t>
+              <a:t>実例7：データベースの種類（訳）</a:t>
             </a:r>
           </a:p>
         </p:txBody>
@@ -22128,7 +22294,7 @@
                 <a:ea typeface="Noto Sans CJK JP"/>
                 <a:cs typeface="Noto Sans"/>
               </a:rPr>
-              <a:t>記事：Library Literature and Information Science ／ long answer全文・質問・正解注釈</a:t>
+              <a:t>記事：Library Literature and Information Science ／ 日本語訳・正解注釈</a:t>
             </a:r>
           </a:p>
         </p:txBody>
@@ -22142,7 +22308,7 @@
         <p:spPr>
           <a:xfrm>
             <a:off x="548640" y="1600200"/>
-            <a:ext cx="8046720" cy="2299737"/>
+            <a:ext cx="8046720" cy="2067350"/>
           </a:xfrm>
           <a:prstGeom prst="rect">
             <a:avLst/>
@@ -22170,70 +22336,70 @@
           </a:fontRef>
         </p:style>
         <p:txBody>
-          <a:bodyPr rtlCol="0" anchor="t" wrap="square" lIns="177800" rIns="177800" tIns="63500" bIns="127000">
+          <a:bodyPr rtlCol="0" anchor="t" wrap="square" lIns="177800" rIns="177800" tIns="53688" bIns="127000">
             <a:noAutofit/>
           </a:bodyPr>
           <a:lstStyle/>
           <a:p>
             <a:pPr algn="l">
               <a:lnSpc>
-                <a:spcPts val="2082"/>
-              </a:lnSpc>
-              <a:spcBef>
-                <a:spcPts val="0"/>
-              </a:spcBef>
-              <a:spcAft>
-                <a:spcPts val="0"/>
-              </a:spcAft>
-              <a:buNone/>
-              <a:defRPr sz="1750" b="0">
-                <a:solidFill>
-                  <a:srgbClr val="303437"/>
-                </a:solidFill>
-                <a:latin typeface="Noto Sans"/>
-              </a:defRPr>
-            </a:pPr>
-            <a:r>
-              <a:rPr sz="1750" b="0" lang="ja-JP" altLang="en-US">
-                <a:solidFill>
-                  <a:srgbClr val="303437"/>
-                </a:solidFill>
-                <a:latin typeface="Noto Sans"/>
-                <a:ea typeface="Noto Sans CJK JP"/>
-                <a:cs typeface="Noto Sans"/>
-              </a:rPr>
-              <a:t>Library Literature and Information Science is a bibliographic database that indexes over 410 library and information science periodicals published internationally. It also covers books, chapters within books, library school theses, and pamphlets. In 2011, the H. W. Wilson Company, the firm that created the index, sold it to EBSCO Publishing along with other H.W. Wilson indexes and databases.[1]</a:t>
+                <a:spcPts val="2201"/>
+              </a:lnSpc>
+              <a:spcBef>
+                <a:spcPts val="0"/>
+              </a:spcBef>
+              <a:spcAft>
+                <a:spcPts val="0"/>
+              </a:spcAft>
+              <a:buNone/>
+              <a:defRPr sz="1850" b="0">
+                <a:solidFill>
+                  <a:srgbClr val="303437"/>
+                </a:solidFill>
+                <a:latin typeface="Noto Sans"/>
+              </a:defRPr>
+            </a:pPr>
+            <a:r>
+              <a:rPr sz="1850" b="0" lang="ja-JP" altLang="en-US">
+                <a:solidFill>
+                  <a:srgbClr val="303437"/>
+                </a:solidFill>
+                <a:latin typeface="Noto Sans"/>
+                <a:ea typeface="Noto Sans CJK JP"/>
+                <a:cs typeface="Noto Sans"/>
+              </a:rPr>
+              <a:t>Library Literature and Information Scienceは、国際的に発行される図書館学・情報科学の定期刊行物410誌以上を索引化した書誌データベースである。書籍、書籍の章、図書館学の学位論文、パンフレットも扱う。2011年、索引を作ったH. W. Wilson社は、他の索引やデータベースとともに、これをEBSCO Publishingへ売却した。[1]</a:t>
             </a:r>
           </a:p>
           <a:p>
             <a:pPr algn="l">
               <a:lnSpc>
-                <a:spcPts val="2082"/>
-              </a:lnSpc>
-              <a:spcBef>
-                <a:spcPts val="0"/>
-              </a:spcBef>
-              <a:spcAft>
-                <a:spcPts val="0"/>
-              </a:spcAft>
-              <a:buNone/>
-              <a:defRPr sz="1750" b="0">
-                <a:solidFill>
-                  <a:srgbClr val="303437"/>
-                </a:solidFill>
-                <a:latin typeface="Noto Sans"/>
-              </a:defRPr>
-            </a:pPr>
-            <a:r>
-              <a:rPr sz="1750" b="0" lang="ja-JP" altLang="en-US">
-                <a:solidFill>
-                  <a:srgbClr val="303437"/>
-                </a:solidFill>
-                <a:latin typeface="Noto Sans"/>
-                <a:ea typeface="Noto Sans CJK JP"/>
-                <a:cs typeface="Noto Sans"/>
-              </a:rPr>
-              <a:t>Question: what type of database is library literature and information science</a:t>
+                <a:spcPts val="2201"/>
+              </a:lnSpc>
+              <a:spcBef>
+                <a:spcPts val="0"/>
+              </a:spcBef>
+              <a:spcAft>
+                <a:spcPts val="0"/>
+              </a:spcAft>
+              <a:buNone/>
+              <a:defRPr sz="1850" b="0">
+                <a:solidFill>
+                  <a:srgbClr val="303437"/>
+                </a:solidFill>
+                <a:latin typeface="Noto Sans"/>
+              </a:defRPr>
+            </a:pPr>
+            <a:r>
+              <a:rPr sz="1850" b="0" lang="ja-JP" altLang="en-US">
+                <a:solidFill>
+                  <a:srgbClr val="303437"/>
+                </a:solidFill>
+                <a:latin typeface="Noto Sans"/>
+                <a:ea typeface="Noto Sans CJK JP"/>
+                <a:cs typeface="Noto Sans"/>
+              </a:rPr>
+              <a:t>質問：Library Literature and Information Scienceは、どのような種類のデータベースか。</a:t>
             </a:r>
           </a:p>
         </p:txBody>
@@ -22246,7 +22412,7 @@
         </p:nvSpPr>
         <p:spPr>
           <a:xfrm>
-            <a:off x="594360" y="4009666"/>
+            <a:off x="594360" y="3777279"/>
             <a:ext cx="7955279" cy="373380"/>
           </a:xfrm>
           <a:prstGeom prst="rect">
@@ -22287,7 +22453,7 @@
                 <a:ea typeface="Noto Sans CJK JP"/>
                 <a:cs typeface="Noto Sans"/>
               </a:rPr>
-              <a:t>bibliographic</a:t>
+              <a:t>書誌データベース</a:t>
             </a:r>
           </a:p>
         </p:txBody>
@@ -22433,7 +22599,7 @@
                 <a:ea typeface="Noto Sans CJK JP"/>
                 <a:cs typeface="Noto Sans"/>
               </a:rPr>
-              <a:t>実例7：データベースの種類（訳）</a:t>
+              <a:t>実例8：胃から小腸への通り道</a:t>
             </a:r>
           </a:p>
         </p:txBody>
@@ -22495,7 +22661,7 @@
         <p:spPr>
           <a:xfrm>
             <a:off x="548640" y="1307592"/>
-            <a:ext cx="8046720" cy="219456"/>
+            <a:ext cx="3931920" cy="219456"/>
           </a:xfrm>
           <a:prstGeom prst="rect">
             <a:avLst/>
@@ -22535,7 +22701,7 @@
                 <a:ea typeface="Noto Sans CJK JP"/>
                 <a:cs typeface="Noto Sans"/>
               </a:rPr>
-              <a:t>記事：Library Literature and Information Science ／ 日本語訳・正解注釈</a:t>
+              <a:t>原文：Chyme</a:t>
             </a:r>
           </a:p>
         </p:txBody>
@@ -22549,7 +22715,7 @@
         <p:spPr>
           <a:xfrm>
             <a:off x="548640" y="1600200"/>
-            <a:ext cx="8046720" cy="2140725"/>
+            <a:ext cx="3931920" cy="2262686"/>
           </a:xfrm>
           <a:prstGeom prst="rect">
             <a:avLst/>
@@ -22577,70 +22743,70 @@
           </a:fontRef>
         </p:style>
         <p:txBody>
-          <a:bodyPr rtlCol="0" anchor="t" wrap="square" lIns="177800" rIns="177800" tIns="63500" bIns="127000">
+          <a:bodyPr rtlCol="0" anchor="t" wrap="square" lIns="177800" rIns="177800" tIns="37104" bIns="127000">
             <a:noAutofit/>
           </a:bodyPr>
           <a:lstStyle/>
           <a:p>
             <a:pPr algn="l">
               <a:lnSpc>
-                <a:spcPts val="2201"/>
-              </a:lnSpc>
-              <a:spcBef>
-                <a:spcPts val="0"/>
-              </a:spcBef>
-              <a:spcAft>
-                <a:spcPts val="0"/>
-              </a:spcAft>
-              <a:buNone/>
-              <a:defRPr sz="1850" b="0">
-                <a:solidFill>
-                  <a:srgbClr val="303437"/>
-                </a:solidFill>
-                <a:latin typeface="Noto Sans"/>
-              </a:defRPr>
-            </a:pPr>
-            <a:r>
-              <a:rPr sz="1850" b="0" lang="ja-JP" altLang="en-US">
-                <a:solidFill>
-                  <a:srgbClr val="303437"/>
-                </a:solidFill>
-                <a:latin typeface="Noto Sans"/>
-                <a:ea typeface="Noto Sans CJK JP"/>
-                <a:cs typeface="Noto Sans"/>
-              </a:rPr>
-              <a:t>Library Literature and Information Scienceは、国際的に発行される図書館学・情報科学の定期刊行物410誌以上を索引化した書誌データベースである。書籍、書籍の章、図書館学の学位論文、パンフレットも扱う。2011年、索引を作ったH. W. Wilson社は、他の索引やデータベースとともに、これをEBSCO Publishingへ売却した。[1]</a:t>
+                <a:spcPts val="1904"/>
+              </a:lnSpc>
+              <a:spcBef>
+                <a:spcPts val="0"/>
+              </a:spcBef>
+              <a:spcAft>
+                <a:spcPts val="0"/>
+              </a:spcAft>
+              <a:buNone/>
+              <a:defRPr sz="1600" b="0">
+                <a:solidFill>
+                  <a:srgbClr val="303437"/>
+                </a:solidFill>
+                <a:latin typeface="Noto Sans"/>
+              </a:defRPr>
+            </a:pPr>
+            <a:r>
+              <a:rPr sz="1600" b="0" lang="ja-JP" altLang="en-US">
+                <a:solidFill>
+                  <a:srgbClr val="303437"/>
+                </a:solidFill>
+                <a:latin typeface="Noto Sans"/>
+                <a:ea typeface="Noto Sans CJK JP"/>
+                <a:cs typeface="Noto Sans"/>
+              </a:rPr>
+              <a:t>Chyme or chymus (/kaɪm/; from Greek χυμός khymos, "juice"[1][2]) is the semi-fluid mass of partly digested food that is expelled by the stomach, through the pyloric valve, into the duodenum[3] (the beginning of the small intestine).</a:t>
             </a:r>
           </a:p>
           <a:p>
             <a:pPr algn="l">
               <a:lnSpc>
-                <a:spcPts val="2201"/>
-              </a:lnSpc>
-              <a:spcBef>
-                <a:spcPts val="0"/>
-              </a:spcBef>
-              <a:spcAft>
-                <a:spcPts val="0"/>
-              </a:spcAft>
-              <a:buNone/>
-              <a:defRPr sz="1850" b="0">
-                <a:solidFill>
-                  <a:srgbClr val="303437"/>
-                </a:solidFill>
-                <a:latin typeface="Noto Sans"/>
-              </a:defRPr>
-            </a:pPr>
-            <a:r>
-              <a:rPr sz="1850" b="0" lang="ja-JP" altLang="en-US">
-                <a:solidFill>
-                  <a:srgbClr val="303437"/>
-                </a:solidFill>
-                <a:latin typeface="Noto Sans"/>
-                <a:ea typeface="Noto Sans CJK JP"/>
-                <a:cs typeface="Noto Sans"/>
-              </a:rPr>
-              <a:t>質問：Library Literature and Information Scienceは、どのような種類のデータベースか。</a:t>
+                <a:spcPts val="1904"/>
+              </a:lnSpc>
+              <a:spcBef>
+                <a:spcPts val="0"/>
+              </a:spcBef>
+              <a:spcAft>
+                <a:spcPts val="0"/>
+              </a:spcAft>
+              <a:buNone/>
+              <a:defRPr sz="1600" b="0">
+                <a:solidFill>
+                  <a:srgbClr val="303437"/>
+                </a:solidFill>
+                <a:latin typeface="Noto Sans"/>
+              </a:defRPr>
+            </a:pPr>
+            <a:r>
+              <a:rPr sz="1600" b="0" lang="ja-JP" altLang="en-US">
+                <a:solidFill>
+                  <a:srgbClr val="303437"/>
+                </a:solidFill>
+                <a:latin typeface="Noto Sans"/>
+                <a:ea typeface="Noto Sans CJK JP"/>
+                <a:cs typeface="Noto Sans"/>
+              </a:rPr>
+              <a:t>Question: what allows chyme to enter the small intestine</a:t>
             </a:r>
           </a:p>
         </p:txBody>
@@ -22653,8 +22819,8 @@
         </p:nvSpPr>
         <p:spPr>
           <a:xfrm>
-            <a:off x="594360" y="3850654"/>
-            <a:ext cx="7955279" cy="373380"/>
+            <a:off x="548640" y="3972615"/>
+            <a:ext cx="3931920" cy="373380"/>
           </a:xfrm>
           <a:prstGeom prst="rect">
             <a:avLst/>
@@ -22694,21 +22860,21 @@
                 <a:ea typeface="Noto Sans CJK JP"/>
                 <a:cs typeface="Noto Sans"/>
               </a:rPr>
-              <a:t>書誌データベース</a:t>
-            </a:r>
-          </a:p>
-        </p:txBody>
-      </p:sp>
-      <p:sp>
-        <p:nvSpPr>
-          <p:cNvPr id="7" name="sources"/>
+              <a:t>pyloric valve</a:t>
+            </a:r>
+          </a:p>
+        </p:txBody>
+      </p:sp>
+      <p:sp>
+        <p:nvSpPr>
+          <p:cNvPr id="7" name="TextBox 6"/>
           <p:cNvSpPr txBox="1"/>
           <p:nvPr/>
         </p:nvSpPr>
         <p:spPr>
           <a:xfrm>
-            <a:off x="502920" y="4700016"/>
-            <a:ext cx="8183879" cy="530352"/>
+            <a:off x="4663440" y="1307592"/>
+            <a:ext cx="3931920" cy="219456"/>
           </a:xfrm>
           <a:prstGeom prst="rect">
             <a:avLst/>
@@ -22723,6 +22889,219 @@
           <a:p>
             <a:pPr algn="l">
               <a:lnSpc>
+                <a:spcPts val="1404"/>
+              </a:lnSpc>
+              <a:spcBef>
+                <a:spcPts val="0"/>
+              </a:spcBef>
+              <a:spcAft>
+                <a:spcPts val="0"/>
+              </a:spcAft>
+              <a:buNone/>
+              <a:defRPr sz="1200" b="0">
+                <a:solidFill>
+                  <a:srgbClr val="303437"/>
+                </a:solidFill>
+                <a:latin typeface="Noto Sans"/>
+              </a:defRPr>
+            </a:pPr>
+            <a:r>
+              <a:rPr sz="1200" b="0" lang="ja-JP" altLang="en-US">
+                <a:solidFill>
+                  <a:srgbClr val="626669"/>
+                </a:solidFill>
+                <a:latin typeface="Noto Sans"/>
+                <a:ea typeface="Noto Sans CJK JP"/>
+                <a:cs typeface="Noto Sans"/>
+              </a:rPr>
+              <a:t>訳：食糜</a:t>
+            </a:r>
+          </a:p>
+        </p:txBody>
+      </p:sp>
+      <p:sp>
+        <p:nvSpPr>
+          <p:cNvPr id="8" name="quote-frame"/>
+          <p:cNvSpPr/>
+          <p:nvPr/>
+        </p:nvSpPr>
+        <p:spPr>
+          <a:xfrm>
+            <a:off x="4663440" y="1600200"/>
+            <a:ext cx="3931920" cy="1813249"/>
+          </a:xfrm>
+          <a:prstGeom prst="rect">
+            <a:avLst/>
+          </a:prstGeom>
+          <a:solidFill>
+            <a:srgbClr val="EBEDEB"/>
+          </a:solidFill>
+          <a:ln>
+            <a:noFill/>
+          </a:ln>
+          <a:effectLst/>
+        </p:spPr>
+        <p:style>
+          <a:lnRef idx="1">
+            <a:schemeClr val="accent1"/>
+          </a:lnRef>
+          <a:fillRef idx="3">
+            <a:schemeClr val="accent1"/>
+          </a:fillRef>
+          <a:effectRef idx="0">
+            <a:schemeClr val="accent1"/>
+          </a:effectRef>
+          <a:fontRef idx="minor">
+            <a:schemeClr val="lt1"/>
+          </a:fontRef>
+        </p:style>
+        <p:txBody>
+          <a:bodyPr rtlCol="0" anchor="t" wrap="square" lIns="177800" rIns="177800" tIns="55949" bIns="127000">
+            <a:noAutofit/>
+          </a:bodyPr>
+          <a:lstStyle/>
+          <a:p>
+            <a:pPr algn="l">
+              <a:lnSpc>
+                <a:spcPts val="1904"/>
+              </a:lnSpc>
+              <a:spcBef>
+                <a:spcPts val="0"/>
+              </a:spcBef>
+              <a:spcAft>
+                <a:spcPts val="0"/>
+              </a:spcAft>
+              <a:buNone/>
+              <a:defRPr sz="1600" b="0">
+                <a:solidFill>
+                  <a:srgbClr val="303437"/>
+                </a:solidFill>
+                <a:latin typeface="Noto Sans"/>
+              </a:defRPr>
+            </a:pPr>
+            <a:r>
+              <a:rPr sz="1600" b="0" lang="ja-JP" altLang="en-US">
+                <a:solidFill>
+                  <a:srgbClr val="303437"/>
+                </a:solidFill>
+                <a:latin typeface="Noto Sans"/>
+                <a:ea typeface="Noto Sans CJK JP"/>
+                <a:cs typeface="Noto Sans"/>
+              </a:rPr>
+              <a:t>食糜（chyme、chymus、発音/kaɪm/。ギリシャ語χυμός khymos「汁」に由来[1][2]）は、消化途中の食物が半流動状になったもので、胃から幽門弁を通り、十二指腸[3]（小腸の始まり）へ送り出される。</a:t>
+            </a:r>
+          </a:p>
+          <a:p>
+            <a:pPr algn="l">
+              <a:lnSpc>
+                <a:spcPts val="1904"/>
+              </a:lnSpc>
+              <a:spcBef>
+                <a:spcPts val="0"/>
+              </a:spcBef>
+              <a:spcAft>
+                <a:spcPts val="0"/>
+              </a:spcAft>
+              <a:buNone/>
+              <a:defRPr sz="1600" b="0">
+                <a:solidFill>
+                  <a:srgbClr val="303437"/>
+                </a:solidFill>
+                <a:latin typeface="Noto Sans"/>
+              </a:defRPr>
+            </a:pPr>
+            <a:r>
+              <a:rPr sz="1600" b="0" lang="ja-JP" altLang="en-US">
+                <a:solidFill>
+                  <a:srgbClr val="303437"/>
+                </a:solidFill>
+                <a:latin typeface="Noto Sans"/>
+                <a:ea typeface="Noto Sans CJK JP"/>
+                <a:cs typeface="Noto Sans"/>
+              </a:rPr>
+              <a:t>質問：食糜を小腸へ通すのは何か。</a:t>
+            </a:r>
+          </a:p>
+        </p:txBody>
+      </p:sp>
+      <p:sp>
+        <p:nvSpPr>
+          <p:cNvPr id="9" name="TextBox 8"/>
+          <p:cNvSpPr txBox="1"/>
+          <p:nvPr/>
+        </p:nvSpPr>
+        <p:spPr>
+          <a:xfrm>
+            <a:off x="4663440" y="3523178"/>
+            <a:ext cx="3931920" cy="373380"/>
+          </a:xfrm>
+          <a:prstGeom prst="rect">
+            <a:avLst/>
+          </a:prstGeom>
+          <a:noFill/>
+        </p:spPr>
+        <p:txBody>
+          <a:bodyPr wrap="square" lIns="0" rIns="0" tIns="0" bIns="0">
+            <a:noAutofit/>
+          </a:bodyPr>
+          <a:lstStyle/>
+          <a:p>
+            <a:pPr algn="l">
+              <a:lnSpc>
+                <a:spcPts val="2436"/>
+              </a:lnSpc>
+              <a:spcBef>
+                <a:spcPts val="0"/>
+              </a:spcBef>
+              <a:spcAft>
+                <a:spcPts val="0"/>
+              </a:spcAft>
+              <a:buNone/>
+              <a:defRPr sz="2100" b="0">
+                <a:solidFill>
+                  <a:srgbClr val="303437"/>
+                </a:solidFill>
+                <a:latin typeface="Noto Sans"/>
+              </a:defRPr>
+            </a:pPr>
+            <a:r>
+              <a:rPr sz="2100" b="1" lang="ja-JP" altLang="en-US">
+                <a:solidFill>
+                  <a:srgbClr val="B13731"/>
+                </a:solidFill>
+                <a:latin typeface="Noto Sans"/>
+                <a:ea typeface="Noto Sans CJK JP"/>
+                <a:cs typeface="Noto Sans"/>
+              </a:rPr>
+              <a:t>幽門弁</a:t>
+            </a:r>
+          </a:p>
+        </p:txBody>
+      </p:sp>
+      <p:sp>
+        <p:nvSpPr>
+          <p:cNvPr id="10" name="sources"/>
+          <p:cNvSpPr txBox="1"/>
+          <p:nvPr/>
+        </p:nvSpPr>
+        <p:spPr>
+          <a:xfrm>
+            <a:off x="502920" y="4700016"/>
+            <a:ext cx="8183879" cy="530352"/>
+          </a:xfrm>
+          <a:prstGeom prst="rect">
+            <a:avLst/>
+          </a:prstGeom>
+          <a:noFill/>
+        </p:spPr>
+        <p:txBody>
+          <a:bodyPr wrap="square" lIns="0" rIns="0" tIns="0" bIns="0">
+            <a:noAutofit/>
+          </a:bodyPr>
+          <a:lstStyle/>
+          <a:p>
+            <a:pPr algn="l">
+              <a:lnSpc>
                 <a:spcPts val="940"/>
               </a:lnSpc>
               <a:spcBef>
@@ -22748,7 +23127,7 @@
                 <a:ea typeface="Noto Sans CJK JP"/>
                 <a:cs typeface="Noto Sans"/>
               </a:rPr>
-              <a:t>[1] Google Research, Natural Questions. dev / Hugging Face公開配布。 dev / example_id: -693847391395525804</a:t>
+              <a:t>[1] Google Research, Natural Questions. dev / Hugging Face公開配布。 dev / example_id: -510907719981675661</a:t>
             </a:r>
           </a:p>
           <a:p>
@@ -22840,7 +23219,7 @@
                 <a:ea typeface="Noto Sans CJK JP"/>
                 <a:cs typeface="Noto Sans"/>
               </a:rPr>
-              <a:t>実例8：胃から小腸への通り道</a:t>
+              <a:t>実例9：実話に基づく映画か</a:t>
             </a:r>
           </a:p>
         </p:txBody>
@@ -22902,7 +23281,7 @@
         <p:spPr>
           <a:xfrm>
             <a:off x="548640" y="1307592"/>
-            <a:ext cx="3931920" cy="219456"/>
+            <a:ext cx="8046720" cy="219456"/>
           </a:xfrm>
           <a:prstGeom prst="rect">
             <a:avLst/>
@@ -22942,7 +23321,7 @@
                 <a:ea typeface="Noto Sans CJK JP"/>
                 <a:cs typeface="Noto Sans"/>
               </a:rPr>
-              <a:t>原文：Chyme</a:t>
+              <a:t>記事：Draft Day ／ long answer全文・質問・正解注釈</a:t>
             </a:r>
           </a:p>
         </p:txBody>
@@ -22956,7 +23335,7 @@
         <p:spPr>
           <a:xfrm>
             <a:off x="548640" y="1600200"/>
-            <a:ext cx="3931920" cy="2292355"/>
+            <a:ext cx="8046720" cy="1782225"/>
           </a:xfrm>
           <a:prstGeom prst="rect">
             <a:avLst/>
@@ -22984,70 +23363,70 @@
           </a:fontRef>
         </p:style>
         <p:txBody>
-          <a:bodyPr rtlCol="0" anchor="t" wrap="square" lIns="177800" rIns="177800" tIns="63500" bIns="127000">
+          <a:bodyPr rtlCol="0" anchor="t" wrap="square" lIns="177800" rIns="177800" tIns="39237" bIns="127000">
             <a:noAutofit/>
           </a:bodyPr>
           <a:lstStyle/>
           <a:p>
             <a:pPr algn="l">
               <a:lnSpc>
-                <a:spcPts val="1844"/>
-              </a:lnSpc>
-              <a:spcBef>
-                <a:spcPts val="0"/>
-              </a:spcBef>
-              <a:spcAft>
-                <a:spcPts val="0"/>
-              </a:spcAft>
-              <a:buNone/>
-              <a:defRPr sz="1550" b="0">
-                <a:solidFill>
-                  <a:srgbClr val="303437"/>
-                </a:solidFill>
-                <a:latin typeface="Noto Sans"/>
-              </a:defRPr>
-            </a:pPr>
-            <a:r>
-              <a:rPr sz="1550" b="0" lang="ja-JP" altLang="en-US">
-                <a:solidFill>
-                  <a:srgbClr val="303437"/>
-                </a:solidFill>
-                <a:latin typeface="Noto Sans"/>
-                <a:ea typeface="Noto Sans CJK JP"/>
-                <a:cs typeface="Noto Sans"/>
-              </a:rPr>
-              <a:t>Chyme or chymus (/kaɪm/; from Greek χυμός khymos, "juice"[1][2]) is the semi-fluid mass of partly digested food that is expelled by the stomach, through the pyloric valve, into the duodenum[3] (the beginning of the small intestine).</a:t>
+                <a:spcPts val="2142"/>
+              </a:lnSpc>
+              <a:spcBef>
+                <a:spcPts val="0"/>
+              </a:spcBef>
+              <a:spcAft>
+                <a:spcPts val="0"/>
+              </a:spcAft>
+              <a:buNone/>
+              <a:defRPr sz="1800" b="0">
+                <a:solidFill>
+                  <a:srgbClr val="303437"/>
+                </a:solidFill>
+                <a:latin typeface="Noto Sans"/>
+              </a:defRPr>
+            </a:pPr>
+            <a:r>
+              <a:rPr sz="1800" b="0" lang="ja-JP" altLang="en-US">
+                <a:solidFill>
+                  <a:srgbClr val="303437"/>
+                </a:solidFill>
+                <a:latin typeface="Noto Sans"/>
+                <a:ea typeface="Noto Sans CJK JP"/>
+                <a:cs typeface="Noto Sans"/>
+              </a:rPr>
+              <a:t>Draft Day is a 2014 American sports drama film directed by Ivan Reitman and starring Kevin Costner. The premise revolves around the fictional general manager of the Cleveland Browns (Costner) deciding what to do after his team acquires the number one draft pick in the upcoming National Football League draft.</a:t>
             </a:r>
           </a:p>
           <a:p>
             <a:pPr algn="l">
               <a:lnSpc>
-                <a:spcPts val="1844"/>
-              </a:lnSpc>
-              <a:spcBef>
-                <a:spcPts val="0"/>
-              </a:spcBef>
-              <a:spcAft>
-                <a:spcPts val="0"/>
-              </a:spcAft>
-              <a:buNone/>
-              <a:defRPr sz="1550" b="0">
-                <a:solidFill>
-                  <a:srgbClr val="303437"/>
-                </a:solidFill>
-                <a:latin typeface="Noto Sans"/>
-              </a:defRPr>
-            </a:pPr>
-            <a:r>
-              <a:rPr sz="1550" b="0" lang="ja-JP" altLang="en-US">
-                <a:solidFill>
-                  <a:srgbClr val="303437"/>
-                </a:solidFill>
-                <a:latin typeface="Noto Sans"/>
-                <a:ea typeface="Noto Sans CJK JP"/>
-                <a:cs typeface="Noto Sans"/>
-              </a:rPr>
-              <a:t>Question: what allows chyme to enter the small intestine</a:t>
+                <a:spcPts val="2142"/>
+              </a:lnSpc>
+              <a:spcBef>
+                <a:spcPts val="0"/>
+              </a:spcBef>
+              <a:spcAft>
+                <a:spcPts val="0"/>
+              </a:spcAft>
+              <a:buNone/>
+              <a:defRPr sz="1800" b="0">
+                <a:solidFill>
+                  <a:srgbClr val="303437"/>
+                </a:solidFill>
+                <a:latin typeface="Noto Sans"/>
+              </a:defRPr>
+            </a:pPr>
+            <a:r>
+              <a:rPr sz="1800" b="0" lang="ja-JP" altLang="en-US">
+                <a:solidFill>
+                  <a:srgbClr val="303437"/>
+                </a:solidFill>
+                <a:latin typeface="Noto Sans"/>
+                <a:ea typeface="Noto Sans CJK JP"/>
+                <a:cs typeface="Noto Sans"/>
+              </a:rPr>
+              <a:t>Question: is draft day the movie based on a true story</a:t>
             </a:r>
           </a:p>
         </p:txBody>
@@ -23060,8 +23439,8 @@
         </p:nvSpPr>
         <p:spPr>
           <a:xfrm>
-            <a:off x="548640" y="4002284"/>
-            <a:ext cx="3931920" cy="373380"/>
+            <a:off x="594360" y="3492154"/>
+            <a:ext cx="7955279" cy="373380"/>
           </a:xfrm>
           <a:prstGeom prst="rect">
             <a:avLst/>
@@ -23101,21 +23480,21 @@
                 <a:ea typeface="Noto Sans CJK JP"/>
                 <a:cs typeface="Noto Sans"/>
               </a:rPr>
-              <a:t>pyloric valve</a:t>
-            </a:r>
-          </a:p>
-        </p:txBody>
-      </p:sp>
-      <p:sp>
-        <p:nvSpPr>
-          <p:cNvPr id="7" name="TextBox 6"/>
+              <a:t>NO</a:t>
+            </a:r>
+          </a:p>
+        </p:txBody>
+      </p:sp>
+      <p:sp>
+        <p:nvSpPr>
+          <p:cNvPr id="7" name="sources"/>
           <p:cNvSpPr txBox="1"/>
           <p:nvPr/>
         </p:nvSpPr>
         <p:spPr>
           <a:xfrm>
-            <a:off x="4663440" y="1307592"/>
-            <a:ext cx="3931920" cy="219456"/>
+            <a:off x="502920" y="4700016"/>
+            <a:ext cx="8183879" cy="530352"/>
           </a:xfrm>
           <a:prstGeom prst="rect">
             <a:avLst/>
@@ -23130,24 +23509,24 @@
           <a:p>
             <a:pPr algn="l">
               <a:lnSpc>
-                <a:spcPts val="1404"/>
-              </a:lnSpc>
-              <a:spcBef>
-                <a:spcPts val="0"/>
-              </a:spcBef>
-              <a:spcAft>
-                <a:spcPts val="0"/>
-              </a:spcAft>
-              <a:buNone/>
-              <a:defRPr sz="1200" b="0">
-                <a:solidFill>
-                  <a:srgbClr val="303437"/>
-                </a:solidFill>
-                <a:latin typeface="Noto Sans"/>
-              </a:defRPr>
-            </a:pPr>
-            <a:r>
-              <a:rPr sz="1200" b="0" lang="ja-JP" altLang="en-US">
+                <a:spcPts val="940"/>
+              </a:lnSpc>
+              <a:spcBef>
+                <a:spcPts val="0"/>
+              </a:spcBef>
+              <a:spcAft>
+                <a:spcPts val="140"/>
+              </a:spcAft>
+              <a:buNone/>
+              <a:defRPr sz="810" b="0">
+                <a:solidFill>
+                  <a:srgbClr val="303437"/>
+                </a:solidFill>
+                <a:latin typeface="Noto Sans"/>
+              </a:defRPr>
+            </a:pPr>
+            <a:r>
+              <a:rPr sz="810" b="0" lang="ja-JP" altLang="en-US">
                 <a:solidFill>
                   <a:srgbClr val="626669"/>
                 </a:solidFill>
@@ -23155,220 +23534,7 @@
                 <a:ea typeface="Noto Sans CJK JP"/>
                 <a:cs typeface="Noto Sans"/>
               </a:rPr>
-              <a:t>訳：食糜</a:t>
-            </a:r>
-          </a:p>
-        </p:txBody>
-      </p:sp>
-      <p:sp>
-        <p:nvSpPr>
-          <p:cNvPr id="8" name="quote-frame"/>
-          <p:cNvSpPr/>
-          <p:nvPr/>
-        </p:nvSpPr>
-        <p:spPr>
-          <a:xfrm>
-            <a:off x="4663440" y="1600200"/>
-            <a:ext cx="3931920" cy="1929607"/>
-          </a:xfrm>
-          <a:prstGeom prst="rect">
-            <a:avLst/>
-          </a:prstGeom>
-          <a:solidFill>
-            <a:srgbClr val="EBEDEB"/>
-          </a:solidFill>
-          <a:ln>
-            <a:noFill/>
-          </a:ln>
-          <a:effectLst/>
-        </p:spPr>
-        <p:style>
-          <a:lnRef idx="1">
-            <a:schemeClr val="accent1"/>
-          </a:lnRef>
-          <a:fillRef idx="3">
-            <a:schemeClr val="accent1"/>
-          </a:fillRef>
-          <a:effectRef idx="0">
-            <a:schemeClr val="accent1"/>
-          </a:effectRef>
-          <a:fontRef idx="minor">
-            <a:schemeClr val="lt1"/>
-          </a:fontRef>
-        </p:style>
-        <p:txBody>
-          <a:bodyPr rtlCol="0" anchor="t" wrap="square" lIns="177800" rIns="177800" tIns="63500" bIns="127000">
-            <a:noAutofit/>
-          </a:bodyPr>
-          <a:lstStyle/>
-          <a:p>
-            <a:pPr algn="l">
-              <a:lnSpc>
-                <a:spcPts val="1963"/>
-              </a:lnSpc>
-              <a:spcBef>
-                <a:spcPts val="0"/>
-              </a:spcBef>
-              <a:spcAft>
-                <a:spcPts val="0"/>
-              </a:spcAft>
-              <a:buNone/>
-              <a:defRPr sz="1650" b="0">
-                <a:solidFill>
-                  <a:srgbClr val="303437"/>
-                </a:solidFill>
-                <a:latin typeface="Noto Sans"/>
-              </a:defRPr>
-            </a:pPr>
-            <a:r>
-              <a:rPr sz="1650" b="0" lang="ja-JP" altLang="en-US">
-                <a:solidFill>
-                  <a:srgbClr val="303437"/>
-                </a:solidFill>
-                <a:latin typeface="Noto Sans"/>
-                <a:ea typeface="Noto Sans CJK JP"/>
-                <a:cs typeface="Noto Sans"/>
-              </a:rPr>
-              <a:t>食糜（chyme、chymus、発音/kaɪm/。ギリシャ語χυμός khymos「汁」に由来[1][2]）は、消化途中の食物が半流動状になったもので、胃から幽門弁を通り、十二指腸[3]（小腸の始まり）へ送り出される。</a:t>
-            </a:r>
-          </a:p>
-          <a:p>
-            <a:pPr algn="l">
-              <a:lnSpc>
-                <a:spcPts val="1963"/>
-              </a:lnSpc>
-              <a:spcBef>
-                <a:spcPts val="0"/>
-              </a:spcBef>
-              <a:spcAft>
-                <a:spcPts val="0"/>
-              </a:spcAft>
-              <a:buNone/>
-              <a:defRPr sz="1650" b="0">
-                <a:solidFill>
-                  <a:srgbClr val="303437"/>
-                </a:solidFill>
-                <a:latin typeface="Noto Sans"/>
-              </a:defRPr>
-            </a:pPr>
-            <a:r>
-              <a:rPr sz="1650" b="0" lang="ja-JP" altLang="en-US">
-                <a:solidFill>
-                  <a:srgbClr val="303437"/>
-                </a:solidFill>
-                <a:latin typeface="Noto Sans"/>
-                <a:ea typeface="Noto Sans CJK JP"/>
-                <a:cs typeface="Noto Sans"/>
-              </a:rPr>
-              <a:t>質問：食糜を小腸へ通すのは何か。</a:t>
-            </a:r>
-          </a:p>
-        </p:txBody>
-      </p:sp>
-      <p:sp>
-        <p:nvSpPr>
-          <p:cNvPr id="9" name="TextBox 8"/>
-          <p:cNvSpPr txBox="1"/>
-          <p:nvPr/>
-        </p:nvSpPr>
-        <p:spPr>
-          <a:xfrm>
-            <a:off x="4663440" y="3639536"/>
-            <a:ext cx="3931920" cy="373380"/>
-          </a:xfrm>
-          <a:prstGeom prst="rect">
-            <a:avLst/>
-          </a:prstGeom>
-          <a:noFill/>
-        </p:spPr>
-        <p:txBody>
-          <a:bodyPr wrap="square" lIns="0" rIns="0" tIns="0" bIns="0">
-            <a:noAutofit/>
-          </a:bodyPr>
-          <a:lstStyle/>
-          <a:p>
-            <a:pPr algn="l">
-              <a:lnSpc>
-                <a:spcPts val="2436"/>
-              </a:lnSpc>
-              <a:spcBef>
-                <a:spcPts val="0"/>
-              </a:spcBef>
-              <a:spcAft>
-                <a:spcPts val="0"/>
-              </a:spcAft>
-              <a:buNone/>
-              <a:defRPr sz="2100" b="0">
-                <a:solidFill>
-                  <a:srgbClr val="303437"/>
-                </a:solidFill>
-                <a:latin typeface="Noto Sans"/>
-              </a:defRPr>
-            </a:pPr>
-            <a:r>
-              <a:rPr sz="2100" b="1" lang="ja-JP" altLang="en-US">
-                <a:solidFill>
-                  <a:srgbClr val="B13731"/>
-                </a:solidFill>
-                <a:latin typeface="Noto Sans"/>
-                <a:ea typeface="Noto Sans CJK JP"/>
-                <a:cs typeface="Noto Sans"/>
-              </a:rPr>
-              <a:t>幽門弁</a:t>
-            </a:r>
-          </a:p>
-        </p:txBody>
-      </p:sp>
-      <p:sp>
-        <p:nvSpPr>
-          <p:cNvPr id="10" name="sources"/>
-          <p:cNvSpPr txBox="1"/>
-          <p:nvPr/>
-        </p:nvSpPr>
-        <p:spPr>
-          <a:xfrm>
-            <a:off x="502920" y="4700016"/>
-            <a:ext cx="8183879" cy="530352"/>
-          </a:xfrm>
-          <a:prstGeom prst="rect">
-            <a:avLst/>
-          </a:prstGeom>
-          <a:noFill/>
-        </p:spPr>
-        <p:txBody>
-          <a:bodyPr wrap="square" lIns="0" rIns="0" tIns="0" bIns="0">
-            <a:noAutofit/>
-          </a:bodyPr>
-          <a:lstStyle/>
-          <a:p>
-            <a:pPr algn="l">
-              <a:lnSpc>
-                <a:spcPts val="940"/>
-              </a:lnSpc>
-              <a:spcBef>
-                <a:spcPts val="0"/>
-              </a:spcBef>
-              <a:spcAft>
-                <a:spcPts val="140"/>
-              </a:spcAft>
-              <a:buNone/>
-              <a:defRPr sz="810" b="0">
-                <a:solidFill>
-                  <a:srgbClr val="303437"/>
-                </a:solidFill>
-                <a:latin typeface="Noto Sans"/>
-              </a:defRPr>
-            </a:pPr>
-            <a:r>
-              <a:rPr sz="810" b="0" lang="ja-JP" altLang="en-US">
-                <a:solidFill>
-                  <a:srgbClr val="626669"/>
-                </a:solidFill>
-                <a:latin typeface="Noto Sans"/>
-                <a:ea typeface="Noto Sans CJK JP"/>
-                <a:cs typeface="Noto Sans"/>
-              </a:rPr>
-              <a:t>[1] Google Research, Natural Questions. dev / Hugging Face公開配布。 dev / example_id: -510907719981675661</a:t>
+              <a:t>[1] Google Research, Natural Questions. dev / Hugging Face公開配布。 dev / example_id: 9100188456643224075</a:t>
             </a:r>
           </a:p>
           <a:p>
@@ -23764,7 +23930,7 @@
                 <a:ea typeface="Noto Sans CJK JP"/>
                 <a:cs typeface="Noto Sans"/>
               </a:rPr>
-              <a:t>実例9：実話に基づく映画か</a:t>
+              <a:t>実例9：実話に基づく映画か（訳）</a:t>
             </a:r>
           </a:p>
         </p:txBody>
@@ -23866,7 +24032,7 @@
                 <a:ea typeface="Noto Sans CJK JP"/>
                 <a:cs typeface="Noto Sans"/>
               </a:rPr>
-              <a:t>記事：Draft Day ／ long answer全文・質問・正解注釈</a:t>
+              <a:t>記事：ドラフト・デイ ／ 日本語訳・正解注釈</a:t>
             </a:r>
           </a:p>
         </p:txBody>
@@ -23880,7 +24046,7 @@
         <p:spPr>
           <a:xfrm>
             <a:off x="548640" y="1600200"/>
-            <a:ext cx="8046720" cy="1819238"/>
+            <a:ext cx="8046720" cy="1937493"/>
           </a:xfrm>
           <a:prstGeom prst="rect">
             <a:avLst/>
@@ -23908,70 +24074,70 @@
           </a:fontRef>
         </p:style>
         <p:txBody>
-          <a:bodyPr rtlCol="0" anchor="t" wrap="square" lIns="177800" rIns="177800" tIns="63500" bIns="127000">
+          <a:bodyPr rtlCol="0" anchor="t" wrap="square" lIns="177800" rIns="177800" tIns="56386" bIns="127000">
             <a:noAutofit/>
           </a:bodyPr>
           <a:lstStyle/>
           <a:p>
             <a:pPr algn="l">
               <a:lnSpc>
-                <a:spcPts val="2142"/>
-              </a:lnSpc>
-              <a:spcBef>
-                <a:spcPts val="0"/>
-              </a:spcBef>
-              <a:spcAft>
-                <a:spcPts val="0"/>
-              </a:spcAft>
-              <a:buNone/>
-              <a:defRPr sz="1800" b="0">
-                <a:solidFill>
-                  <a:srgbClr val="303437"/>
-                </a:solidFill>
-                <a:latin typeface="Noto Sans"/>
-              </a:defRPr>
-            </a:pPr>
-            <a:r>
-              <a:rPr sz="1800" b="0" lang="ja-JP" altLang="en-US">
-                <a:solidFill>
-                  <a:srgbClr val="303437"/>
-                </a:solidFill>
-                <a:latin typeface="Noto Sans"/>
-                <a:ea typeface="Noto Sans CJK JP"/>
-                <a:cs typeface="Noto Sans"/>
-              </a:rPr>
-              <a:t>Draft Day is a 2014 American sports drama film directed by Ivan Reitman and starring Kevin Costner. The premise revolves around the fictional general manager of the Cleveland Browns (Costner) deciding what to do after his team acquires the number one draft pick in the upcoming National Football League draft.</a:t>
+                <a:spcPts val="2379"/>
+              </a:lnSpc>
+              <a:spcBef>
+                <a:spcPts val="0"/>
+              </a:spcBef>
+              <a:spcAft>
+                <a:spcPts val="0"/>
+              </a:spcAft>
+              <a:buNone/>
+              <a:defRPr sz="2000" b="0">
+                <a:solidFill>
+                  <a:srgbClr val="303437"/>
+                </a:solidFill>
+                <a:latin typeface="Noto Sans"/>
+              </a:defRPr>
+            </a:pPr>
+            <a:r>
+              <a:rPr sz="2000" b="0" lang="ja-JP" altLang="en-US">
+                <a:solidFill>
+                  <a:srgbClr val="303437"/>
+                </a:solidFill>
+                <a:latin typeface="Noto Sans"/>
+                <a:ea typeface="Noto Sans CJK JP"/>
+                <a:cs typeface="Noto Sans"/>
+              </a:rPr>
+              <a:t>「ドラフト・デイ」は、アイヴァン・ライトマン監督、ケビン・コスナー主演の2014年の米国のスポーツドラマ映画である。クリーブランド・ブラウンズの架空のゼネラルマネジャー（コスナー）が、次のNFLドラフトの全体1位指名権を獲得した後、何をするかを決めるという筋書きである。</a:t>
             </a:r>
           </a:p>
           <a:p>
             <a:pPr algn="l">
               <a:lnSpc>
-                <a:spcPts val="2142"/>
-              </a:lnSpc>
-              <a:spcBef>
-                <a:spcPts val="0"/>
-              </a:spcBef>
-              <a:spcAft>
-                <a:spcPts val="0"/>
-              </a:spcAft>
-              <a:buNone/>
-              <a:defRPr sz="1800" b="0">
-                <a:solidFill>
-                  <a:srgbClr val="303437"/>
-                </a:solidFill>
-                <a:latin typeface="Noto Sans"/>
-              </a:defRPr>
-            </a:pPr>
-            <a:r>
-              <a:rPr sz="1800" b="0" lang="ja-JP" altLang="en-US">
-                <a:solidFill>
-                  <a:srgbClr val="303437"/>
-                </a:solidFill>
-                <a:latin typeface="Noto Sans"/>
-                <a:ea typeface="Noto Sans CJK JP"/>
-                <a:cs typeface="Noto Sans"/>
-              </a:rPr>
-              <a:t>Question: is draft day the movie based on a true story</a:t>
+                <a:spcPts val="2379"/>
+              </a:lnSpc>
+              <a:spcBef>
+                <a:spcPts val="0"/>
+              </a:spcBef>
+              <a:spcAft>
+                <a:spcPts val="0"/>
+              </a:spcAft>
+              <a:buNone/>
+              <a:defRPr sz="2000" b="0">
+                <a:solidFill>
+                  <a:srgbClr val="303437"/>
+                </a:solidFill>
+                <a:latin typeface="Noto Sans"/>
+              </a:defRPr>
+            </a:pPr>
+            <a:r>
+              <a:rPr sz="2000" b="0" lang="ja-JP" altLang="en-US">
+                <a:solidFill>
+                  <a:srgbClr val="303437"/>
+                </a:solidFill>
+                <a:latin typeface="Noto Sans"/>
+                <a:ea typeface="Noto Sans CJK JP"/>
+                <a:cs typeface="Noto Sans"/>
+              </a:rPr>
+              <a:t>質問：映画「ドラフト・デイ」は実話に基づいているか。</a:t>
             </a:r>
           </a:p>
         </p:txBody>
@@ -23984,7 +24150,7 @@
         </p:nvSpPr>
         <p:spPr>
           <a:xfrm>
-            <a:off x="594360" y="3529167"/>
+            <a:off x="594360" y="3647422"/>
             <a:ext cx="7955279" cy="373380"/>
           </a:xfrm>
           <a:prstGeom prst="rect">
@@ -24025,7 +24191,7 @@
                 <a:ea typeface="Noto Sans CJK JP"/>
                 <a:cs typeface="Noto Sans"/>
               </a:rPr>
-              <a:t>NO</a:t>
+              <a:t>いいえ（NO）</a:t>
             </a:r>
           </a:p>
         </p:txBody>
@@ -24171,7 +24337,7 @@
                 <a:ea typeface="Noto Sans CJK JP"/>
                 <a:cs typeface="Noto Sans"/>
               </a:rPr>
-              <a:t>実例9：実話に基づく映画か（訳）</a:t>
+              <a:t>実例10：過去に発生したことがあるか</a:t>
             </a:r>
           </a:p>
         </p:txBody>
@@ -24233,7 +24399,7 @@
         <p:spPr>
           <a:xfrm>
             <a:off x="548640" y="1307592"/>
-            <a:ext cx="8046720" cy="219456"/>
+            <a:ext cx="3931920" cy="219456"/>
           </a:xfrm>
           <a:prstGeom prst="rect">
             <a:avLst/>
@@ -24273,7 +24439,7 @@
                 <a:ea typeface="Noto Sans CJK JP"/>
                 <a:cs typeface="Noto Sans"/>
               </a:rPr>
-              <a:t>記事：ドラフト・デイ ／ 日本語訳・正解注釈</a:t>
+              <a:t>原文：Tornadoes in the United States</a:t>
             </a:r>
           </a:p>
         </p:txBody>
@@ -24287,7 +24453,7 @@
         <p:spPr>
           <a:xfrm>
             <a:off x="548640" y="1600200"/>
-            <a:ext cx="8046720" cy="1999702"/>
+            <a:ext cx="3931920" cy="2262686"/>
           </a:xfrm>
           <a:prstGeom prst="rect">
             <a:avLst/>
@@ -24315,70 +24481,70 @@
           </a:fontRef>
         </p:style>
         <p:txBody>
-          <a:bodyPr rtlCol="0" anchor="t" wrap="square" lIns="177800" rIns="177800" tIns="63500" bIns="127000">
+          <a:bodyPr rtlCol="0" anchor="t" wrap="square" lIns="177800" rIns="177800" tIns="37104" bIns="127000">
             <a:noAutofit/>
           </a:bodyPr>
           <a:lstStyle/>
           <a:p>
             <a:pPr algn="l">
               <a:lnSpc>
-                <a:spcPts val="2379"/>
-              </a:lnSpc>
-              <a:spcBef>
-                <a:spcPts val="0"/>
-              </a:spcBef>
-              <a:spcAft>
-                <a:spcPts val="0"/>
-              </a:spcAft>
-              <a:buNone/>
-              <a:defRPr sz="2000" b="0">
-                <a:solidFill>
-                  <a:srgbClr val="303437"/>
-                </a:solidFill>
-                <a:latin typeface="Noto Sans"/>
-              </a:defRPr>
-            </a:pPr>
-            <a:r>
-              <a:rPr sz="2000" b="0" lang="ja-JP" altLang="en-US">
-                <a:solidFill>
-                  <a:srgbClr val="303437"/>
-                </a:solidFill>
-                <a:latin typeface="Noto Sans"/>
-                <a:ea typeface="Noto Sans CJK JP"/>
-                <a:cs typeface="Noto Sans"/>
-              </a:rPr>
-              <a:t>「ドラフト・デイ」は、アイヴァン・ライトマン監督、ケビン・コスナー主演の2014年の米国のスポーツドラマ映画である。クリーブランド・ブラウンズの架空のゼネラルマネジャー（コスナー）が、次のNFLドラフトの全体1位指名権を獲得した後、何をするかを決めるという筋書きである。</a:t>
+                <a:spcPts val="1904"/>
+              </a:lnSpc>
+              <a:spcBef>
+                <a:spcPts val="0"/>
+              </a:spcBef>
+              <a:spcAft>
+                <a:spcPts val="0"/>
+              </a:spcAft>
+              <a:buNone/>
+              <a:defRPr sz="1600" b="0">
+                <a:solidFill>
+                  <a:srgbClr val="303437"/>
+                </a:solidFill>
+                <a:latin typeface="Noto Sans"/>
+              </a:defRPr>
+            </a:pPr>
+            <a:r>
+              <a:rPr sz="1600" b="0" lang="ja-JP" altLang="en-US">
+                <a:solidFill>
+                  <a:srgbClr val="303437"/>
+                </a:solidFill>
+                <a:latin typeface="Noto Sans"/>
+                <a:ea typeface="Noto Sans CJK JP"/>
+                <a:cs typeface="Noto Sans"/>
+              </a:rPr>
+              <a:t>Alaska has only been hit by 2 tornadoes between 1950 and 2006 (the first being November 4, 1959[38] and the other was August 2, 2005[39]); both were only F0. Hawaii has only been hit by 49 tornadoes since 1950.</a:t>
             </a:r>
           </a:p>
           <a:p>
             <a:pPr algn="l">
               <a:lnSpc>
-                <a:spcPts val="2379"/>
-              </a:lnSpc>
-              <a:spcBef>
-                <a:spcPts val="0"/>
-              </a:spcBef>
-              <a:spcAft>
-                <a:spcPts val="0"/>
-              </a:spcAft>
-              <a:buNone/>
-              <a:defRPr sz="2000" b="0">
-                <a:solidFill>
-                  <a:srgbClr val="303437"/>
-                </a:solidFill>
-                <a:latin typeface="Noto Sans"/>
-              </a:defRPr>
-            </a:pPr>
-            <a:r>
-              <a:rPr sz="2000" b="0" lang="ja-JP" altLang="en-US">
-                <a:solidFill>
-                  <a:srgbClr val="303437"/>
-                </a:solidFill>
-                <a:latin typeface="Noto Sans"/>
-                <a:ea typeface="Noto Sans CJK JP"/>
-                <a:cs typeface="Noto Sans"/>
-              </a:rPr>
-              <a:t>質問：映画「ドラフト・デイ」は実話に基づいているか。</a:t>
+                <a:spcPts val="1904"/>
+              </a:lnSpc>
+              <a:spcBef>
+                <a:spcPts val="0"/>
+              </a:spcBef>
+              <a:spcAft>
+                <a:spcPts val="0"/>
+              </a:spcAft>
+              <a:buNone/>
+              <a:defRPr sz="1600" b="0">
+                <a:solidFill>
+                  <a:srgbClr val="303437"/>
+                </a:solidFill>
+                <a:latin typeface="Noto Sans"/>
+              </a:defRPr>
+            </a:pPr>
+            <a:r>
+              <a:rPr sz="1600" b="0" lang="ja-JP" altLang="en-US">
+                <a:solidFill>
+                  <a:srgbClr val="303437"/>
+                </a:solidFill>
+                <a:latin typeface="Noto Sans"/>
+                <a:ea typeface="Noto Sans CJK JP"/>
+                <a:cs typeface="Noto Sans"/>
+              </a:rPr>
+              <a:t>Question: has there ever been a tornado in alaska</a:t>
             </a:r>
           </a:p>
         </p:txBody>
@@ -24391,8 +24557,8 @@
         </p:nvSpPr>
         <p:spPr>
           <a:xfrm>
-            <a:off x="594360" y="3709631"/>
-            <a:ext cx="7955279" cy="373380"/>
+            <a:off x="548640" y="3972615"/>
+            <a:ext cx="3931920" cy="373380"/>
           </a:xfrm>
           <a:prstGeom prst="rect">
             <a:avLst/>
@@ -24432,21 +24598,21 @@
                 <a:ea typeface="Noto Sans CJK JP"/>
                 <a:cs typeface="Noto Sans"/>
               </a:rPr>
-              <a:t>いいえ（NO）</a:t>
-            </a:r>
-          </a:p>
-        </p:txBody>
-      </p:sp>
-      <p:sp>
-        <p:nvSpPr>
-          <p:cNvPr id="7" name="sources"/>
+              <a:t>YES</a:t>
+            </a:r>
+          </a:p>
+        </p:txBody>
+      </p:sp>
+      <p:sp>
+        <p:nvSpPr>
+          <p:cNvPr id="7" name="TextBox 6"/>
           <p:cNvSpPr txBox="1"/>
           <p:nvPr/>
         </p:nvSpPr>
         <p:spPr>
           <a:xfrm>
-            <a:off x="502920" y="4700016"/>
-            <a:ext cx="8183879" cy="530352"/>
+            <a:off x="4663440" y="1307592"/>
+            <a:ext cx="3931920" cy="219456"/>
           </a:xfrm>
           <a:prstGeom prst="rect">
             <a:avLst/>
@@ -24461,6 +24627,219 @@
           <a:p>
             <a:pPr algn="l">
               <a:lnSpc>
+                <a:spcPts val="1404"/>
+              </a:lnSpc>
+              <a:spcBef>
+                <a:spcPts val="0"/>
+              </a:spcBef>
+              <a:spcAft>
+                <a:spcPts val="0"/>
+              </a:spcAft>
+              <a:buNone/>
+              <a:defRPr sz="1200" b="0">
+                <a:solidFill>
+                  <a:srgbClr val="303437"/>
+                </a:solidFill>
+                <a:latin typeface="Noto Sans"/>
+              </a:defRPr>
+            </a:pPr>
+            <a:r>
+              <a:rPr sz="1200" b="0" lang="ja-JP" altLang="en-US">
+                <a:solidFill>
+                  <a:srgbClr val="626669"/>
+                </a:solidFill>
+                <a:latin typeface="Noto Sans"/>
+                <a:ea typeface="Noto Sans CJK JP"/>
+                <a:cs typeface="Noto Sans"/>
+              </a:rPr>
+              <a:t>訳：米国の竜巻</a:t>
+            </a:r>
+          </a:p>
+        </p:txBody>
+      </p:sp>
+      <p:sp>
+        <p:nvSpPr>
+          <p:cNvPr id="8" name="quote-frame"/>
+          <p:cNvSpPr/>
+          <p:nvPr/>
+        </p:nvSpPr>
+        <p:spPr>
+          <a:xfrm>
+            <a:off x="4663440" y="1600200"/>
+            <a:ext cx="3931920" cy="2297094"/>
+          </a:xfrm>
+          <a:prstGeom prst="rect">
+            <a:avLst/>
+          </a:prstGeom>
+          <a:solidFill>
+            <a:srgbClr val="EBEDEB"/>
+          </a:solidFill>
+          <a:ln>
+            <a:noFill/>
+          </a:ln>
+          <a:effectLst/>
+        </p:spPr>
+        <p:style>
+          <a:lnRef idx="1">
+            <a:schemeClr val="accent1"/>
+          </a:lnRef>
+          <a:fillRef idx="3">
+            <a:schemeClr val="accent1"/>
+          </a:fillRef>
+          <a:effectRef idx="0">
+            <a:schemeClr val="accent1"/>
+          </a:effectRef>
+          <a:fontRef idx="minor">
+            <a:schemeClr val="lt1"/>
+          </a:fontRef>
+        </p:style>
+        <p:txBody>
+          <a:bodyPr rtlCol="0" anchor="t" wrap="square" lIns="177800" rIns="177800" tIns="55949" bIns="127000">
+            <a:noAutofit/>
+          </a:bodyPr>
+          <a:lstStyle/>
+          <a:p>
+            <a:pPr algn="l">
+              <a:lnSpc>
+                <a:spcPts val="1904"/>
+              </a:lnSpc>
+              <a:spcBef>
+                <a:spcPts val="0"/>
+              </a:spcBef>
+              <a:spcAft>
+                <a:spcPts val="0"/>
+              </a:spcAft>
+              <a:buNone/>
+              <a:defRPr sz="1600" b="0">
+                <a:solidFill>
+                  <a:srgbClr val="303437"/>
+                </a:solidFill>
+                <a:latin typeface="Noto Sans"/>
+              </a:defRPr>
+            </a:pPr>
+            <a:r>
+              <a:rPr sz="1600" b="0" lang="ja-JP" altLang="en-US">
+                <a:solidFill>
+                  <a:srgbClr val="303437"/>
+                </a:solidFill>
+                <a:latin typeface="Noto Sans"/>
+                <a:ea typeface="Noto Sans CJK JP"/>
+                <a:cs typeface="Noto Sans"/>
+              </a:rPr>
+              <a:t>アラスカで1950年から2006年までに発生した竜巻は2件だけで、最初は1959年11月4日[38]、もう1件は2005年8月2日[39]だった。いずれもF0にすぎなかった。ハワイでは1950年以降、49件の竜巻しか発生していない。</a:t>
+            </a:r>
+          </a:p>
+          <a:p>
+            <a:pPr algn="l">
+              <a:lnSpc>
+                <a:spcPts val="1904"/>
+              </a:lnSpc>
+              <a:spcBef>
+                <a:spcPts val="0"/>
+              </a:spcBef>
+              <a:spcAft>
+                <a:spcPts val="0"/>
+              </a:spcAft>
+              <a:buNone/>
+              <a:defRPr sz="1600" b="0">
+                <a:solidFill>
+                  <a:srgbClr val="303437"/>
+                </a:solidFill>
+                <a:latin typeface="Noto Sans"/>
+              </a:defRPr>
+            </a:pPr>
+            <a:r>
+              <a:rPr sz="1600" b="0" lang="ja-JP" altLang="en-US">
+                <a:solidFill>
+                  <a:srgbClr val="303437"/>
+                </a:solidFill>
+                <a:latin typeface="Noto Sans"/>
+                <a:ea typeface="Noto Sans CJK JP"/>
+                <a:cs typeface="Noto Sans"/>
+              </a:rPr>
+              <a:t>質問：アラスカで竜巻が発生したことはあるか。</a:t>
+            </a:r>
+          </a:p>
+        </p:txBody>
+      </p:sp>
+      <p:sp>
+        <p:nvSpPr>
+          <p:cNvPr id="9" name="TextBox 8"/>
+          <p:cNvSpPr txBox="1"/>
+          <p:nvPr/>
+        </p:nvSpPr>
+        <p:spPr>
+          <a:xfrm>
+            <a:off x="4663440" y="4007023"/>
+            <a:ext cx="3931920" cy="373380"/>
+          </a:xfrm>
+          <a:prstGeom prst="rect">
+            <a:avLst/>
+          </a:prstGeom>
+          <a:noFill/>
+        </p:spPr>
+        <p:txBody>
+          <a:bodyPr wrap="square" lIns="0" rIns="0" tIns="0" bIns="0">
+            <a:noAutofit/>
+          </a:bodyPr>
+          <a:lstStyle/>
+          <a:p>
+            <a:pPr algn="l">
+              <a:lnSpc>
+                <a:spcPts val="2436"/>
+              </a:lnSpc>
+              <a:spcBef>
+                <a:spcPts val="0"/>
+              </a:spcBef>
+              <a:spcAft>
+                <a:spcPts val="0"/>
+              </a:spcAft>
+              <a:buNone/>
+              <a:defRPr sz="2100" b="0">
+                <a:solidFill>
+                  <a:srgbClr val="303437"/>
+                </a:solidFill>
+                <a:latin typeface="Noto Sans"/>
+              </a:defRPr>
+            </a:pPr>
+            <a:r>
+              <a:rPr sz="2100" b="1" lang="ja-JP" altLang="en-US">
+                <a:solidFill>
+                  <a:srgbClr val="B13731"/>
+                </a:solidFill>
+                <a:latin typeface="Noto Sans"/>
+                <a:ea typeface="Noto Sans CJK JP"/>
+                <a:cs typeface="Noto Sans"/>
+              </a:rPr>
+              <a:t>はい（YES）</a:t>
+            </a:r>
+          </a:p>
+        </p:txBody>
+      </p:sp>
+      <p:sp>
+        <p:nvSpPr>
+          <p:cNvPr id="10" name="sources"/>
+          <p:cNvSpPr txBox="1"/>
+          <p:nvPr/>
+        </p:nvSpPr>
+        <p:spPr>
+          <a:xfrm>
+            <a:off x="502920" y="4700016"/>
+            <a:ext cx="8183879" cy="530352"/>
+          </a:xfrm>
+          <a:prstGeom prst="rect">
+            <a:avLst/>
+          </a:prstGeom>
+          <a:noFill/>
+        </p:spPr>
+        <p:txBody>
+          <a:bodyPr wrap="square" lIns="0" rIns="0" tIns="0" bIns="0">
+            <a:noAutofit/>
+          </a:bodyPr>
+          <a:lstStyle/>
+          <a:p>
+            <a:pPr algn="l">
+              <a:lnSpc>
                 <a:spcPts val="940"/>
               </a:lnSpc>
               <a:spcBef>
@@ -24486,7 +24865,7 @@
                 <a:ea typeface="Noto Sans CJK JP"/>
                 <a:cs typeface="Noto Sans"/>
               </a:rPr>
-              <a:t>[1] Google Research, Natural Questions. dev / Hugging Face公開配布。 dev / example_id: 9100188456643224075</a:t>
+              <a:t>[1] Google Research, Natural Questions. dev / Hugging Face公開配布。 dev / example_id: -2051272193055915930</a:t>
             </a:r>
           </a:p>
           <a:p>
@@ -24578,7 +24957,7 @@
                 <a:ea typeface="Noto Sans CJK JP"/>
                 <a:cs typeface="Noto Sans"/>
               </a:rPr>
-              <a:t>実例10：過去に発生したことがあるか</a:t>
+              <a:t>実例11：通行方向を記事名から読む</a:t>
             </a:r>
           </a:p>
         </p:txBody>
@@ -24640,7 +25019,7 @@
         <p:spPr>
           <a:xfrm>
             <a:off x="548640" y="1307592"/>
-            <a:ext cx="3931920" cy="219456"/>
+            <a:ext cx="8046720" cy="219456"/>
           </a:xfrm>
           <a:prstGeom prst="rect">
             <a:avLst/>
@@ -24680,7 +25059,7 @@
                 <a:ea typeface="Noto Sans CJK JP"/>
                 <a:cs typeface="Noto Sans"/>
               </a:rPr>
-              <a:t>原文：Tornadoes in the United States</a:t>
+              <a:t>記事：List of countries with left-hand traffic ／ long answer全文・質問・正解注釈</a:t>
             </a:r>
           </a:p>
         </p:txBody>
@@ -24694,7 +25073,7 @@
         <p:spPr>
           <a:xfrm>
             <a:off x="548640" y="1600200"/>
-            <a:ext cx="3931920" cy="2058001"/>
+            <a:ext cx="8046720" cy="2054373"/>
           </a:xfrm>
           <a:prstGeom prst="rect">
             <a:avLst/>
@@ -24722,70 +25101,101 @@
           </a:fontRef>
         </p:style>
         <p:txBody>
-          <a:bodyPr rtlCol="0" anchor="t" wrap="square" lIns="177800" rIns="177800" tIns="63500" bIns="127000">
+          <a:bodyPr rtlCol="0" anchor="t" wrap="square" lIns="177800" rIns="177800" tIns="39237" bIns="127000">
             <a:noAutofit/>
           </a:bodyPr>
           <a:lstStyle/>
           <a:p>
             <a:pPr algn="l">
               <a:lnSpc>
-                <a:spcPts val="1844"/>
-              </a:lnSpc>
-              <a:spcBef>
-                <a:spcPts val="0"/>
-              </a:spcBef>
-              <a:spcAft>
-                <a:spcPts val="0"/>
-              </a:spcAft>
-              <a:buNone/>
-              <a:defRPr sz="1550" b="0">
-                <a:solidFill>
-                  <a:srgbClr val="303437"/>
-                </a:solidFill>
-                <a:latin typeface="Noto Sans"/>
-              </a:defRPr>
-            </a:pPr>
-            <a:r>
-              <a:rPr sz="1550" b="0" lang="ja-JP" altLang="en-US">
-                <a:solidFill>
-                  <a:srgbClr val="303437"/>
-                </a:solidFill>
-                <a:latin typeface="Noto Sans"/>
-                <a:ea typeface="Noto Sans CJK JP"/>
-                <a:cs typeface="Noto Sans"/>
-              </a:rPr>
-              <a:t>Alaska has only been hit by 2 tornadoes between 1950 and 2006 (the first being November 4, 1959[38] and the other was August 2, 2005[39]); both were only F0. Hawaii has only been hit by 49 tornadoes since 1950.</a:t>
+                <a:spcPts val="2142"/>
+              </a:lnSpc>
+              <a:spcBef>
+                <a:spcPts val="0"/>
+              </a:spcBef>
+              <a:spcAft>
+                <a:spcPts val="0"/>
+              </a:spcAft>
+              <a:buNone/>
+              <a:defRPr sz="1800" b="0">
+                <a:solidFill>
+                  <a:srgbClr val="303437"/>
+                </a:solidFill>
+                <a:latin typeface="Noto Sans"/>
+              </a:defRPr>
+            </a:pPr>
+            <a:r>
+              <a:rPr sz="1800" b="0" lang="ja-JP" altLang="en-US">
+                <a:solidFill>
+                  <a:srgbClr val="303437"/>
+                </a:solidFill>
+                <a:latin typeface="Noto Sans"/>
+                <a:ea typeface="Noto Sans CJK JP"/>
+                <a:cs typeface="Noto Sans"/>
+              </a:rPr>
+              <a:t>Title: List of countries with left-hand traffic</a:t>
             </a:r>
           </a:p>
           <a:p>
             <a:pPr algn="l">
               <a:lnSpc>
-                <a:spcPts val="1844"/>
-              </a:lnSpc>
-              <a:spcBef>
-                <a:spcPts val="0"/>
-              </a:spcBef>
-              <a:spcAft>
-                <a:spcPts val="0"/>
-              </a:spcAft>
-              <a:buNone/>
-              <a:defRPr sz="1550" b="0">
-                <a:solidFill>
-                  <a:srgbClr val="303437"/>
-                </a:solidFill>
-                <a:latin typeface="Noto Sans"/>
-              </a:defRPr>
-            </a:pPr>
-            <a:r>
-              <a:rPr sz="1550" b="0" lang="ja-JP" altLang="en-US">
-                <a:solidFill>
-                  <a:srgbClr val="303437"/>
-                </a:solidFill>
-                <a:latin typeface="Noto Sans"/>
-                <a:ea typeface="Noto Sans CJK JP"/>
-                <a:cs typeface="Noto Sans"/>
-              </a:rPr>
-              <a:t>Question: has there ever been a tornado in alaska</a:t>
+                <a:spcPts val="2142"/>
+              </a:lnSpc>
+              <a:spcBef>
+                <a:spcPts val="0"/>
+              </a:spcBef>
+              <a:spcAft>
+                <a:spcPts val="0"/>
+              </a:spcAft>
+              <a:buNone/>
+              <a:defRPr sz="1800" b="0">
+                <a:solidFill>
+                  <a:srgbClr val="303437"/>
+                </a:solidFill>
+                <a:latin typeface="Noto Sans"/>
+              </a:defRPr>
+            </a:pPr>
+            <a:r>
+              <a:rPr sz="1800" b="0" lang="ja-JP" altLang="en-US">
+                <a:solidFill>
+                  <a:srgbClr val="303437"/>
+                </a:solidFill>
+                <a:latin typeface="Noto Sans"/>
+                <a:ea typeface="Noto Sans CJK JP"/>
+                <a:cs typeface="Noto Sans"/>
+              </a:rPr>
+              <a:t>Australia Christmas Island (Australia) Cocos (Keeling) Islands (Australia) Cook Islands (New Zealand) Fiji Kiribati Nauru New Zealand Niue Norfolk Island (Australia) Papua New Guinea Pitcairn Islands (U.K. Overseas Territory) Solomon Islands Samoa (since September 1, 2009) Tokelau (New Zealand) Tonga Tuvalu</a:t>
+            </a:r>
+          </a:p>
+          <a:p>
+            <a:pPr algn="l">
+              <a:lnSpc>
+                <a:spcPts val="2142"/>
+              </a:lnSpc>
+              <a:spcBef>
+                <a:spcPts val="0"/>
+              </a:spcBef>
+              <a:spcAft>
+                <a:spcPts val="0"/>
+              </a:spcAft>
+              <a:buNone/>
+              <a:defRPr sz="1800" b="0">
+                <a:solidFill>
+                  <a:srgbClr val="303437"/>
+                </a:solidFill>
+                <a:latin typeface="Noto Sans"/>
+              </a:defRPr>
+            </a:pPr>
+            <a:r>
+              <a:rPr sz="1800" b="0" lang="ja-JP" altLang="en-US">
+                <a:solidFill>
+                  <a:srgbClr val="303437"/>
+                </a:solidFill>
+                <a:latin typeface="Noto Sans"/>
+                <a:ea typeface="Noto Sans CJK JP"/>
+                <a:cs typeface="Noto Sans"/>
+              </a:rPr>
+              <a:t>Question: does australia drive on the right side of the road</a:t>
             </a:r>
           </a:p>
         </p:txBody>
@@ -24798,8 +25208,8 @@
         </p:nvSpPr>
         <p:spPr>
           <a:xfrm>
-            <a:off x="548640" y="3767930"/>
-            <a:ext cx="3931920" cy="373380"/>
+            <a:off x="594360" y="3764302"/>
+            <a:ext cx="7955279" cy="373380"/>
           </a:xfrm>
           <a:prstGeom prst="rect">
             <a:avLst/>
@@ -24839,21 +25249,21 @@
                 <a:ea typeface="Noto Sans CJK JP"/>
                 <a:cs typeface="Noto Sans"/>
               </a:rPr>
-              <a:t>YES</a:t>
-            </a:r>
-          </a:p>
-        </p:txBody>
-      </p:sp>
-      <p:sp>
-        <p:nvSpPr>
-          <p:cNvPr id="7" name="TextBox 6"/>
+              <a:t>NO</a:t>
+            </a:r>
+          </a:p>
+        </p:txBody>
+      </p:sp>
+      <p:sp>
+        <p:nvSpPr>
+          <p:cNvPr id="7" name="sources"/>
           <p:cNvSpPr txBox="1"/>
           <p:nvPr/>
         </p:nvSpPr>
         <p:spPr>
           <a:xfrm>
-            <a:off x="4663440" y="1307592"/>
-            <a:ext cx="3931920" cy="219456"/>
+            <a:off x="502920" y="4700016"/>
+            <a:ext cx="8183879" cy="530352"/>
           </a:xfrm>
           <a:prstGeom prst="rect">
             <a:avLst/>
@@ -24868,24 +25278,24 @@
           <a:p>
             <a:pPr algn="l">
               <a:lnSpc>
-                <a:spcPts val="1404"/>
-              </a:lnSpc>
-              <a:spcBef>
-                <a:spcPts val="0"/>
-              </a:spcBef>
-              <a:spcAft>
-                <a:spcPts val="0"/>
-              </a:spcAft>
-              <a:buNone/>
-              <a:defRPr sz="1200" b="0">
-                <a:solidFill>
-                  <a:srgbClr val="303437"/>
-                </a:solidFill>
-                <a:latin typeface="Noto Sans"/>
-              </a:defRPr>
-            </a:pPr>
-            <a:r>
-              <a:rPr sz="1200" b="0" lang="ja-JP" altLang="en-US">
+                <a:spcPts val="940"/>
+              </a:lnSpc>
+              <a:spcBef>
+                <a:spcPts val="0"/>
+              </a:spcBef>
+              <a:spcAft>
+                <a:spcPts val="140"/>
+              </a:spcAft>
+              <a:buNone/>
+              <a:defRPr sz="810" b="0">
+                <a:solidFill>
+                  <a:srgbClr val="303437"/>
+                </a:solidFill>
+                <a:latin typeface="Noto Sans"/>
+              </a:defRPr>
+            </a:pPr>
+            <a:r>
+              <a:rPr sz="810" b="0" lang="ja-JP" altLang="en-US">
                 <a:solidFill>
                   <a:srgbClr val="626669"/>
                 </a:solidFill>
@@ -24893,220 +25303,7 @@
                 <a:ea typeface="Noto Sans CJK JP"/>
                 <a:cs typeface="Noto Sans"/>
               </a:rPr>
-              <a:t>訳：米国の竜巻</a:t>
-            </a:r>
-          </a:p>
-        </p:txBody>
-      </p:sp>
-      <p:sp>
-        <p:nvSpPr>
-          <p:cNvPr id="8" name="quote-frame"/>
-          <p:cNvSpPr/>
-          <p:nvPr/>
-        </p:nvSpPr>
-        <p:spPr>
-          <a:xfrm>
-            <a:off x="4663440" y="1600200"/>
-            <a:ext cx="3931920" cy="2291370"/>
-          </a:xfrm>
-          <a:prstGeom prst="rect">
-            <a:avLst/>
-          </a:prstGeom>
-          <a:solidFill>
-            <a:srgbClr val="EBEDEB"/>
-          </a:solidFill>
-          <a:ln>
-            <a:noFill/>
-          </a:ln>
-          <a:effectLst/>
-        </p:spPr>
-        <p:style>
-          <a:lnRef idx="1">
-            <a:schemeClr val="accent1"/>
-          </a:lnRef>
-          <a:fillRef idx="3">
-            <a:schemeClr val="accent1"/>
-          </a:fillRef>
-          <a:effectRef idx="0">
-            <a:schemeClr val="accent1"/>
-          </a:effectRef>
-          <a:fontRef idx="minor">
-            <a:schemeClr val="lt1"/>
-          </a:fontRef>
-        </p:style>
-        <p:txBody>
-          <a:bodyPr rtlCol="0" anchor="t" wrap="square" lIns="177800" rIns="177800" tIns="63500" bIns="127000">
-            <a:noAutofit/>
-          </a:bodyPr>
-          <a:lstStyle/>
-          <a:p>
-            <a:pPr algn="l">
-              <a:lnSpc>
-                <a:spcPts val="1844"/>
-              </a:lnSpc>
-              <a:spcBef>
-                <a:spcPts val="0"/>
-              </a:spcBef>
-              <a:spcAft>
-                <a:spcPts val="0"/>
-              </a:spcAft>
-              <a:buNone/>
-              <a:defRPr sz="1550" b="0">
-                <a:solidFill>
-                  <a:srgbClr val="303437"/>
-                </a:solidFill>
-                <a:latin typeface="Noto Sans"/>
-              </a:defRPr>
-            </a:pPr>
-            <a:r>
-              <a:rPr sz="1550" b="0" lang="ja-JP" altLang="en-US">
-                <a:solidFill>
-                  <a:srgbClr val="303437"/>
-                </a:solidFill>
-                <a:latin typeface="Noto Sans"/>
-                <a:ea typeface="Noto Sans CJK JP"/>
-                <a:cs typeface="Noto Sans"/>
-              </a:rPr>
-              <a:t>アラスカで1950年から2006年までに発生した竜巻は2件だけで、最初は1959年11月4日[38]、もう1件は2005年8月2日[39]だった。いずれもF0にすぎなかった。ハワイでは1950年以降、49件の竜巻しか発生していない。</a:t>
-            </a:r>
-          </a:p>
-          <a:p>
-            <a:pPr algn="l">
-              <a:lnSpc>
-                <a:spcPts val="1844"/>
-              </a:lnSpc>
-              <a:spcBef>
-                <a:spcPts val="0"/>
-              </a:spcBef>
-              <a:spcAft>
-                <a:spcPts val="0"/>
-              </a:spcAft>
-              <a:buNone/>
-              <a:defRPr sz="1550" b="0">
-                <a:solidFill>
-                  <a:srgbClr val="303437"/>
-                </a:solidFill>
-                <a:latin typeface="Noto Sans"/>
-              </a:defRPr>
-            </a:pPr>
-            <a:r>
-              <a:rPr sz="1550" b="0" lang="ja-JP" altLang="en-US">
-                <a:solidFill>
-                  <a:srgbClr val="303437"/>
-                </a:solidFill>
-                <a:latin typeface="Noto Sans"/>
-                <a:ea typeface="Noto Sans CJK JP"/>
-                <a:cs typeface="Noto Sans"/>
-              </a:rPr>
-              <a:t>質問：アラスカで竜巻が発生したことはあるか。</a:t>
-            </a:r>
-          </a:p>
-        </p:txBody>
-      </p:sp>
-      <p:sp>
-        <p:nvSpPr>
-          <p:cNvPr id="9" name="TextBox 8"/>
-          <p:cNvSpPr txBox="1"/>
-          <p:nvPr/>
-        </p:nvSpPr>
-        <p:spPr>
-          <a:xfrm>
-            <a:off x="4663440" y="4001299"/>
-            <a:ext cx="3931920" cy="373380"/>
-          </a:xfrm>
-          <a:prstGeom prst="rect">
-            <a:avLst/>
-          </a:prstGeom>
-          <a:noFill/>
-        </p:spPr>
-        <p:txBody>
-          <a:bodyPr wrap="square" lIns="0" rIns="0" tIns="0" bIns="0">
-            <a:noAutofit/>
-          </a:bodyPr>
-          <a:lstStyle/>
-          <a:p>
-            <a:pPr algn="l">
-              <a:lnSpc>
-                <a:spcPts val="2436"/>
-              </a:lnSpc>
-              <a:spcBef>
-                <a:spcPts val="0"/>
-              </a:spcBef>
-              <a:spcAft>
-                <a:spcPts val="0"/>
-              </a:spcAft>
-              <a:buNone/>
-              <a:defRPr sz="2100" b="0">
-                <a:solidFill>
-                  <a:srgbClr val="303437"/>
-                </a:solidFill>
-                <a:latin typeface="Noto Sans"/>
-              </a:defRPr>
-            </a:pPr>
-            <a:r>
-              <a:rPr sz="2100" b="1" lang="ja-JP" altLang="en-US">
-                <a:solidFill>
-                  <a:srgbClr val="B13731"/>
-                </a:solidFill>
-                <a:latin typeface="Noto Sans"/>
-                <a:ea typeface="Noto Sans CJK JP"/>
-                <a:cs typeface="Noto Sans"/>
-              </a:rPr>
-              <a:t>はい（YES）</a:t>
-            </a:r>
-          </a:p>
-        </p:txBody>
-      </p:sp>
-      <p:sp>
-        <p:nvSpPr>
-          <p:cNvPr id="10" name="sources"/>
-          <p:cNvSpPr txBox="1"/>
-          <p:nvPr/>
-        </p:nvSpPr>
-        <p:spPr>
-          <a:xfrm>
-            <a:off x="502920" y="4700016"/>
-            <a:ext cx="8183879" cy="530352"/>
-          </a:xfrm>
-          <a:prstGeom prst="rect">
-            <a:avLst/>
-          </a:prstGeom>
-          <a:noFill/>
-        </p:spPr>
-        <p:txBody>
-          <a:bodyPr wrap="square" lIns="0" rIns="0" tIns="0" bIns="0">
-            <a:noAutofit/>
-          </a:bodyPr>
-          <a:lstStyle/>
-          <a:p>
-            <a:pPr algn="l">
-              <a:lnSpc>
-                <a:spcPts val="940"/>
-              </a:lnSpc>
-              <a:spcBef>
-                <a:spcPts val="0"/>
-              </a:spcBef>
-              <a:spcAft>
-                <a:spcPts val="140"/>
-              </a:spcAft>
-              <a:buNone/>
-              <a:defRPr sz="810" b="0">
-                <a:solidFill>
-                  <a:srgbClr val="303437"/>
-                </a:solidFill>
-                <a:latin typeface="Noto Sans"/>
-              </a:defRPr>
-            </a:pPr>
-            <a:r>
-              <a:rPr sz="810" b="0" lang="ja-JP" altLang="en-US">
-                <a:solidFill>
-                  <a:srgbClr val="626669"/>
-                </a:solidFill>
-                <a:latin typeface="Noto Sans"/>
-                <a:ea typeface="Noto Sans CJK JP"/>
-                <a:cs typeface="Noto Sans"/>
-              </a:rPr>
-              <a:t>[1] Google Research, Natural Questions. dev / Hugging Face公開配布。 dev / example_id: -2051272193055915930</a:t>
+              <a:t>[1] Google Research, Natural Questions. dev / Hugging Face公開配布。 dev / example_id: 3525408608203192577</a:t>
             </a:r>
           </a:p>
           <a:p>
@@ -25198,7 +25395,7 @@
                 <a:ea typeface="Noto Sans CJK JP"/>
                 <a:cs typeface="Noto Sans"/>
               </a:rPr>
-              <a:t>実例11：通行方向を記事名から読む</a:t>
+              <a:t>実例11：通行方向を記事名から読む（訳）</a:t>
             </a:r>
           </a:p>
         </p:txBody>
@@ -25300,7 +25497,7 @@
                 <a:ea typeface="Noto Sans CJK JP"/>
                 <a:cs typeface="Noto Sans"/>
               </a:rPr>
-              <a:t>記事：List of countries with left-hand traffic ／ long answer全文・質問・正解注釈</a:t>
+              <a:t>記事：左側通行の国・地域の一覧 ／ 日本語訳・正解注釈</a:t>
             </a:r>
           </a:p>
         </p:txBody>
@@ -25314,7 +25511,7 @@
         <p:spPr>
           <a:xfrm>
             <a:off x="548640" y="1600200"/>
-            <a:ext cx="8046720" cy="2091399"/>
+            <a:ext cx="8046720" cy="2239046"/>
           </a:xfrm>
           <a:prstGeom prst="rect">
             <a:avLst/>
@@ -25342,101 +25539,101 @@
           </a:fontRef>
         </p:style>
         <p:txBody>
-          <a:bodyPr rtlCol="0" anchor="t" wrap="square" lIns="177800" rIns="177800" tIns="63500" bIns="127000">
+          <a:bodyPr rtlCol="0" anchor="t" wrap="square" lIns="177800" rIns="177800" tIns="59003" bIns="127000">
             <a:noAutofit/>
           </a:bodyPr>
           <a:lstStyle/>
           <a:p>
             <a:pPr algn="l">
               <a:lnSpc>
-                <a:spcPts val="2142"/>
-              </a:lnSpc>
-              <a:spcBef>
-                <a:spcPts val="0"/>
-              </a:spcBef>
-              <a:spcAft>
-                <a:spcPts val="0"/>
-              </a:spcAft>
-              <a:buNone/>
-              <a:defRPr sz="1800" b="0">
-                <a:solidFill>
-                  <a:srgbClr val="303437"/>
-                </a:solidFill>
-                <a:latin typeface="Noto Sans"/>
-              </a:defRPr>
-            </a:pPr>
-            <a:r>
-              <a:rPr sz="1800" b="0" lang="ja-JP" altLang="en-US">
-                <a:solidFill>
-                  <a:srgbClr val="303437"/>
-                </a:solidFill>
-                <a:latin typeface="Noto Sans"/>
-                <a:ea typeface="Noto Sans CJK JP"/>
-                <a:cs typeface="Noto Sans"/>
-              </a:rPr>
-              <a:t>Title: List of countries with left-hand traffic</a:t>
+                <a:spcPts val="2082"/>
+              </a:lnSpc>
+              <a:spcBef>
+                <a:spcPts val="0"/>
+              </a:spcBef>
+              <a:spcAft>
+                <a:spcPts val="0"/>
+              </a:spcAft>
+              <a:buNone/>
+              <a:defRPr sz="1750" b="0">
+                <a:solidFill>
+                  <a:srgbClr val="303437"/>
+                </a:solidFill>
+                <a:latin typeface="Noto Sans"/>
+              </a:defRPr>
+            </a:pPr>
+            <a:r>
+              <a:rPr sz="1750" b="0" lang="ja-JP" altLang="en-US">
+                <a:solidFill>
+                  <a:srgbClr val="303437"/>
+                </a:solidFill>
+                <a:latin typeface="Noto Sans"/>
+                <a:ea typeface="Noto Sans CJK JP"/>
+                <a:cs typeface="Noto Sans"/>
+              </a:rPr>
+              <a:t>記事名：左側通行の国・地域の一覧</a:t>
             </a:r>
           </a:p>
           <a:p>
             <a:pPr algn="l">
               <a:lnSpc>
-                <a:spcPts val="2142"/>
-              </a:lnSpc>
-              <a:spcBef>
-                <a:spcPts val="0"/>
-              </a:spcBef>
-              <a:spcAft>
-                <a:spcPts val="0"/>
-              </a:spcAft>
-              <a:buNone/>
-              <a:defRPr sz="1800" b="0">
-                <a:solidFill>
-                  <a:srgbClr val="303437"/>
-                </a:solidFill>
-                <a:latin typeface="Noto Sans"/>
-              </a:defRPr>
-            </a:pPr>
-            <a:r>
-              <a:rPr sz="1800" b="0" lang="ja-JP" altLang="en-US">
-                <a:solidFill>
-                  <a:srgbClr val="303437"/>
-                </a:solidFill>
-                <a:latin typeface="Noto Sans"/>
-                <a:ea typeface="Noto Sans CJK JP"/>
-                <a:cs typeface="Noto Sans"/>
-              </a:rPr>
-              <a:t>Australia Christmas Island (Australia) Cocos (Keeling) Islands (Australia) Cook Islands (New Zealand) Fiji Kiribati Nauru New Zealand Niue Norfolk Island (Australia) Papua New Guinea Pitcairn Islands (U.K. Overseas Territory) Solomon Islands Samoa (since September 1, 2009) Tokelau (New Zealand) Tonga Tuvalu</a:t>
+                <a:spcPts val="2082"/>
+              </a:lnSpc>
+              <a:spcBef>
+                <a:spcPts val="0"/>
+              </a:spcBef>
+              <a:spcAft>
+                <a:spcPts val="0"/>
+              </a:spcAft>
+              <a:buNone/>
+              <a:defRPr sz="1750" b="0">
+                <a:solidFill>
+                  <a:srgbClr val="303437"/>
+                </a:solidFill>
+                <a:latin typeface="Noto Sans"/>
+              </a:defRPr>
+            </a:pPr>
+            <a:r>
+              <a:rPr sz="1750" b="0" lang="ja-JP" altLang="en-US">
+                <a:solidFill>
+                  <a:srgbClr val="303437"/>
+                </a:solidFill>
+                <a:latin typeface="Noto Sans"/>
+                <a:ea typeface="Noto Sans CJK JP"/>
+                <a:cs typeface="Noto Sans"/>
+              </a:rPr>
+              <a:t>オーストラリア、クリスマス島（オーストラリア）、ココス（キーリング）諸島（オーストラリア）、クック諸島（ニュージーランド）、フィジー、キリバス、ナウル、ニュージーランド、ニウエ、ノーフォーク島（オーストラリア）、パプアニューギニア、ピトケアン諸島（英国海外領土）、ソロモン諸島、サモア（2009年9月1日から）、トケラウ（ニュージーランド）、トンガ、ツバル。</a:t>
             </a:r>
           </a:p>
           <a:p>
             <a:pPr algn="l">
               <a:lnSpc>
-                <a:spcPts val="2142"/>
-              </a:lnSpc>
-              <a:spcBef>
-                <a:spcPts val="0"/>
-              </a:spcBef>
-              <a:spcAft>
-                <a:spcPts val="0"/>
-              </a:spcAft>
-              <a:buNone/>
-              <a:defRPr sz="1800" b="0">
-                <a:solidFill>
-                  <a:srgbClr val="303437"/>
-                </a:solidFill>
-                <a:latin typeface="Noto Sans"/>
-              </a:defRPr>
-            </a:pPr>
-            <a:r>
-              <a:rPr sz="1800" b="0" lang="ja-JP" altLang="en-US">
-                <a:solidFill>
-                  <a:srgbClr val="303437"/>
-                </a:solidFill>
-                <a:latin typeface="Noto Sans"/>
-                <a:ea typeface="Noto Sans CJK JP"/>
-                <a:cs typeface="Noto Sans"/>
-              </a:rPr>
-              <a:t>Question: does australia drive on the right side of the road</a:t>
+                <a:spcPts val="2082"/>
+              </a:lnSpc>
+              <a:spcBef>
+                <a:spcPts val="0"/>
+              </a:spcBef>
+              <a:spcAft>
+                <a:spcPts val="0"/>
+              </a:spcAft>
+              <a:buNone/>
+              <a:defRPr sz="1750" b="0">
+                <a:solidFill>
+                  <a:srgbClr val="303437"/>
+                </a:solidFill>
+                <a:latin typeface="Noto Sans"/>
+              </a:defRPr>
+            </a:pPr>
+            <a:r>
+              <a:rPr sz="1750" b="0" lang="ja-JP" altLang="en-US">
+                <a:solidFill>
+                  <a:srgbClr val="303437"/>
+                </a:solidFill>
+                <a:latin typeface="Noto Sans"/>
+                <a:ea typeface="Noto Sans CJK JP"/>
+                <a:cs typeface="Noto Sans"/>
+              </a:rPr>
+              <a:t>質問：オーストラリアでは道路の右側を通行するか。</a:t>
             </a:r>
           </a:p>
         </p:txBody>
@@ -25449,7 +25646,7 @@
         </p:nvSpPr>
         <p:spPr>
           <a:xfrm>
-            <a:off x="594360" y="3801328"/>
+            <a:off x="594360" y="3948975"/>
             <a:ext cx="7955279" cy="373380"/>
           </a:xfrm>
           <a:prstGeom prst="rect">
@@ -25490,7 +25687,7 @@
                 <a:ea typeface="Noto Sans CJK JP"/>
                 <a:cs typeface="Noto Sans"/>
               </a:rPr>
-              <a:t>NO</a:t>
+              <a:t>いいえ（NO）</a:t>
             </a:r>
           </a:p>
         </p:txBody>
@@ -25636,7 +25833,7 @@
                 <a:ea typeface="Noto Sans CJK JP"/>
                 <a:cs typeface="Noto Sans"/>
               </a:rPr>
-              <a:t>実例11：通行方向を記事名から読む（訳）</a:t>
+              <a:t>実例12：複数の州を拾う</a:t>
             </a:r>
           </a:p>
         </p:txBody>
@@ -25738,7 +25935,7 @@
                 <a:ea typeface="Noto Sans CJK JP"/>
                 <a:cs typeface="Noto Sans"/>
               </a:rPr>
-              <a:t>記事：左側通行の国・地域の一覧 ／ 日本語訳・正解注釈</a:t>
+              <a:t>記事：Dust Bowl ／ long answer全文・質問・正解注釈</a:t>
             </a:r>
           </a:p>
         </p:txBody>
@@ -25752,7 +25949,7 @@
         <p:spPr>
           <a:xfrm>
             <a:off x="548640" y="1600200"/>
-            <a:ext cx="8046720" cy="2298627"/>
+            <a:ext cx="8046720" cy="1229423"/>
           </a:xfrm>
           <a:prstGeom prst="rect">
             <a:avLst/>
@@ -25780,101 +25977,70 @@
           </a:fontRef>
         </p:style>
         <p:txBody>
-          <a:bodyPr rtlCol="0" anchor="t" wrap="square" lIns="177800" rIns="177800" tIns="63500" bIns="127000">
+          <a:bodyPr rtlCol="0" anchor="t" wrap="square" lIns="177800" rIns="177800" tIns="39592" bIns="127000">
             <a:noAutofit/>
           </a:bodyPr>
           <a:lstStyle/>
           <a:p>
             <a:pPr algn="l">
               <a:lnSpc>
-                <a:spcPts val="2082"/>
-              </a:lnSpc>
-              <a:spcBef>
-                <a:spcPts val="0"/>
-              </a:spcBef>
-              <a:spcAft>
-                <a:spcPts val="0"/>
-              </a:spcAft>
-              <a:buNone/>
-              <a:defRPr sz="1750" b="0">
-                <a:solidFill>
-                  <a:srgbClr val="303437"/>
-                </a:solidFill>
-                <a:latin typeface="Noto Sans"/>
-              </a:defRPr>
-            </a:pPr>
-            <a:r>
-              <a:rPr sz="1750" b="0" lang="ja-JP" altLang="en-US">
-                <a:solidFill>
-                  <a:srgbClr val="303437"/>
-                </a:solidFill>
-                <a:latin typeface="Noto Sans"/>
-                <a:ea typeface="Noto Sans CJK JP"/>
-                <a:cs typeface="Noto Sans"/>
-              </a:rPr>
-              <a:t>記事名：左側通行の国・地域の一覧</a:t>
+                <a:spcPts val="2142"/>
+              </a:lnSpc>
+              <a:spcBef>
+                <a:spcPts val="0"/>
+              </a:spcBef>
+              <a:spcAft>
+                <a:spcPts val="0"/>
+              </a:spcAft>
+              <a:buNone/>
+              <a:defRPr sz="1800" b="0">
+                <a:solidFill>
+                  <a:srgbClr val="303437"/>
+                </a:solidFill>
+                <a:latin typeface="Noto Sans"/>
+              </a:defRPr>
+            </a:pPr>
+            <a:r>
+              <a:rPr sz="1800" b="0" lang="ja-JP" altLang="en-US">
+                <a:solidFill>
+                  <a:srgbClr val="303437"/>
+                </a:solidFill>
+                <a:latin typeface="Noto Sans"/>
+                <a:ea typeface="Noto Sans CJK JP"/>
+                <a:cs typeface="Noto Sans"/>
+              </a:rPr>
+              <a:t>The drought and erosion of the Dust Bowl affected 100,000,000 acres (400,000 km2) that centered on the panhandles of Texas and Oklahoma and touched adjacent sections of New Mexico, Colorado, and Kansas.[5]</a:t>
             </a:r>
           </a:p>
           <a:p>
             <a:pPr algn="l">
               <a:lnSpc>
-                <a:spcPts val="2082"/>
-              </a:lnSpc>
-              <a:spcBef>
-                <a:spcPts val="0"/>
-              </a:spcBef>
-              <a:spcAft>
-                <a:spcPts val="0"/>
-              </a:spcAft>
-              <a:buNone/>
-              <a:defRPr sz="1750" b="0">
-                <a:solidFill>
-                  <a:srgbClr val="303437"/>
-                </a:solidFill>
-                <a:latin typeface="Noto Sans"/>
-              </a:defRPr>
-            </a:pPr>
-            <a:r>
-              <a:rPr sz="1750" b="0" lang="ja-JP" altLang="en-US">
-                <a:solidFill>
-                  <a:srgbClr val="303437"/>
-                </a:solidFill>
-                <a:latin typeface="Noto Sans"/>
-                <a:ea typeface="Noto Sans CJK JP"/>
-                <a:cs typeface="Noto Sans"/>
-              </a:rPr>
-              <a:t>オーストラリア、クリスマス島（オーストラリア）、ココス（キーリング）諸島（オーストラリア）、クック諸島（ニュージーランド）、フィジー、キリバス、ナウル、ニュージーランド、ニウエ、ノーフォーク島（オーストラリア）、パプアニューギニア、ピトケアン諸島（英国海外領土）、ソロモン諸島、サモア（2009年9月1日から）、トケラウ（ニュージーランド）、トンガ、ツバル。</a:t>
-            </a:r>
-          </a:p>
-          <a:p>
-            <a:pPr algn="l">
-              <a:lnSpc>
-                <a:spcPts val="2082"/>
-              </a:lnSpc>
-              <a:spcBef>
-                <a:spcPts val="0"/>
-              </a:spcBef>
-              <a:spcAft>
-                <a:spcPts val="0"/>
-              </a:spcAft>
-              <a:buNone/>
-              <a:defRPr sz="1750" b="0">
-                <a:solidFill>
-                  <a:srgbClr val="303437"/>
-                </a:solidFill>
-                <a:latin typeface="Noto Sans"/>
-              </a:defRPr>
-            </a:pPr>
-            <a:r>
-              <a:rPr sz="1750" b="0" lang="ja-JP" altLang="en-US">
-                <a:solidFill>
-                  <a:srgbClr val="303437"/>
-                </a:solidFill>
-                <a:latin typeface="Noto Sans"/>
-                <a:ea typeface="Noto Sans CJK JP"/>
-                <a:cs typeface="Noto Sans"/>
-              </a:rPr>
-              <a:t>質問：オーストラリアでは道路の右側を通行するか。</a:t>
+                <a:spcPts val="2142"/>
+              </a:lnSpc>
+              <a:spcBef>
+                <a:spcPts val="0"/>
+              </a:spcBef>
+              <a:spcAft>
+                <a:spcPts val="0"/>
+              </a:spcAft>
+              <a:buNone/>
+              <a:defRPr sz="1800" b="0">
+                <a:solidFill>
+                  <a:srgbClr val="303437"/>
+                </a:solidFill>
+                <a:latin typeface="Noto Sans"/>
+              </a:defRPr>
+            </a:pPr>
+            <a:r>
+              <a:rPr sz="1800" b="0" lang="ja-JP" altLang="en-US">
+                <a:solidFill>
+                  <a:srgbClr val="303437"/>
+                </a:solidFill>
+                <a:latin typeface="Noto Sans"/>
+                <a:ea typeface="Noto Sans CJK JP"/>
+                <a:cs typeface="Noto Sans"/>
+              </a:rPr>
+              <a:t>Question: what states were most affected by the dust bowl</a:t>
             </a:r>
           </a:p>
         </p:txBody>
@@ -25887,8 +26053,8 @@
         </p:nvSpPr>
         <p:spPr>
           <a:xfrm>
-            <a:off x="594360" y="4008556"/>
-            <a:ext cx="7955279" cy="373380"/>
+            <a:off x="594360" y="2939352"/>
+            <a:ext cx="3886200" cy="992124"/>
           </a:xfrm>
           <a:prstGeom prst="rect">
             <a:avLst/>
@@ -25928,21 +26094,83 @@
                 <a:ea typeface="Noto Sans CJK JP"/>
                 <a:cs typeface="Noto Sans"/>
               </a:rPr>
-              <a:t>いいえ（NO）</a:t>
-            </a:r>
-          </a:p>
-        </p:txBody>
-      </p:sp>
-      <p:sp>
-        <p:nvSpPr>
-          <p:cNvPr id="7" name="sources"/>
+              <a:t>Texas</a:t>
+            </a:r>
+          </a:p>
+          <a:p>
+            <a:pPr algn="l">
+              <a:lnSpc>
+                <a:spcPts val="2436"/>
+              </a:lnSpc>
+              <a:spcBef>
+                <a:spcPts val="0"/>
+              </a:spcBef>
+              <a:spcAft>
+                <a:spcPts val="0"/>
+              </a:spcAft>
+              <a:buNone/>
+              <a:defRPr sz="2100" b="0">
+                <a:solidFill>
+                  <a:srgbClr val="303437"/>
+                </a:solidFill>
+                <a:latin typeface="Noto Sans"/>
+              </a:defRPr>
+            </a:pPr>
+            <a:r>
+              <a:rPr sz="2100" b="1" lang="ja-JP" altLang="en-US">
+                <a:solidFill>
+                  <a:srgbClr val="B13731"/>
+                </a:solidFill>
+                <a:latin typeface="Noto Sans"/>
+                <a:ea typeface="Noto Sans CJK JP"/>
+                <a:cs typeface="Noto Sans"/>
+              </a:rPr>
+              <a:t>Oklahoma</a:t>
+            </a:r>
+          </a:p>
+          <a:p>
+            <a:pPr algn="l">
+              <a:lnSpc>
+                <a:spcPts val="2436"/>
+              </a:lnSpc>
+              <a:spcBef>
+                <a:spcPts val="0"/>
+              </a:spcBef>
+              <a:spcAft>
+                <a:spcPts val="0"/>
+              </a:spcAft>
+              <a:buNone/>
+              <a:defRPr sz="2100" b="0">
+                <a:solidFill>
+                  <a:srgbClr val="303437"/>
+                </a:solidFill>
+                <a:latin typeface="Noto Sans"/>
+              </a:defRPr>
+            </a:pPr>
+            <a:r>
+              <a:rPr sz="2100" b="1" lang="ja-JP" altLang="en-US">
+                <a:solidFill>
+                  <a:srgbClr val="B13731"/>
+                </a:solidFill>
+                <a:latin typeface="Noto Sans"/>
+                <a:ea typeface="Noto Sans CJK JP"/>
+                <a:cs typeface="Noto Sans"/>
+              </a:rPr>
+              <a:t>New Mexico</a:t>
+            </a:r>
+          </a:p>
+        </p:txBody>
+      </p:sp>
+      <p:sp>
+        <p:nvSpPr>
+          <p:cNvPr id="7" name="TextBox 6"/>
           <p:cNvSpPr txBox="1"/>
           <p:nvPr/>
         </p:nvSpPr>
         <p:spPr>
           <a:xfrm>
-            <a:off x="502920" y="4700016"/>
-            <a:ext cx="8183879" cy="530352"/>
+            <a:off x="4681728" y="2939352"/>
+            <a:ext cx="3886200" cy="992124"/>
           </a:xfrm>
           <a:prstGeom prst="rect">
             <a:avLst/>
@@ -25957,6 +26185,91 @@
           <a:p>
             <a:pPr algn="l">
               <a:lnSpc>
+                <a:spcPts val="2436"/>
+              </a:lnSpc>
+              <a:spcBef>
+                <a:spcPts val="0"/>
+              </a:spcBef>
+              <a:spcAft>
+                <a:spcPts val="0"/>
+              </a:spcAft>
+              <a:buNone/>
+              <a:defRPr sz="2100" b="0">
+                <a:solidFill>
+                  <a:srgbClr val="303437"/>
+                </a:solidFill>
+                <a:latin typeface="Noto Sans"/>
+              </a:defRPr>
+            </a:pPr>
+            <a:r>
+              <a:rPr sz="2100" b="1" lang="ja-JP" altLang="en-US">
+                <a:solidFill>
+                  <a:srgbClr val="B13731"/>
+                </a:solidFill>
+                <a:latin typeface="Noto Sans"/>
+                <a:ea typeface="Noto Sans CJK JP"/>
+                <a:cs typeface="Noto Sans"/>
+              </a:rPr>
+              <a:t>Colorado</a:t>
+            </a:r>
+          </a:p>
+          <a:p>
+            <a:pPr algn="l">
+              <a:lnSpc>
+                <a:spcPts val="2436"/>
+              </a:lnSpc>
+              <a:spcBef>
+                <a:spcPts val="0"/>
+              </a:spcBef>
+              <a:spcAft>
+                <a:spcPts val="0"/>
+              </a:spcAft>
+              <a:buNone/>
+              <a:defRPr sz="2100" b="0">
+                <a:solidFill>
+                  <a:srgbClr val="303437"/>
+                </a:solidFill>
+                <a:latin typeface="Noto Sans"/>
+              </a:defRPr>
+            </a:pPr>
+            <a:r>
+              <a:rPr sz="2100" b="1" lang="ja-JP" altLang="en-US">
+                <a:solidFill>
+                  <a:srgbClr val="B13731"/>
+                </a:solidFill>
+                <a:latin typeface="Noto Sans"/>
+                <a:ea typeface="Noto Sans CJK JP"/>
+                <a:cs typeface="Noto Sans"/>
+              </a:rPr>
+              <a:t>Kansas</a:t>
+            </a:r>
+          </a:p>
+        </p:txBody>
+      </p:sp>
+      <p:sp>
+        <p:nvSpPr>
+          <p:cNvPr id="8" name="sources"/>
+          <p:cNvSpPr txBox="1"/>
+          <p:nvPr/>
+        </p:nvSpPr>
+        <p:spPr>
+          <a:xfrm>
+            <a:off x="502920" y="4700016"/>
+            <a:ext cx="8183879" cy="530352"/>
+          </a:xfrm>
+          <a:prstGeom prst="rect">
+            <a:avLst/>
+          </a:prstGeom>
+          <a:noFill/>
+        </p:spPr>
+        <p:txBody>
+          <a:bodyPr wrap="square" lIns="0" rIns="0" tIns="0" bIns="0">
+            <a:noAutofit/>
+          </a:bodyPr>
+          <a:lstStyle/>
+          <a:p>
+            <a:pPr algn="l">
+              <a:lnSpc>
                 <a:spcPts val="940"/>
               </a:lnSpc>
               <a:spcBef>
@@ -25982,7 +26295,7 @@
                 <a:ea typeface="Noto Sans CJK JP"/>
                 <a:cs typeface="Noto Sans"/>
               </a:rPr>
-              <a:t>[1] Google Research, Natural Questions. dev / Hugging Face公開配布。 dev / example_id: 3525408608203192577</a:t>
+              <a:t>[1] Google Research, Natural Questions. dev / Hugging Face公開配布。 dev / example_id: 7354980942032766409</a:t>
             </a:r>
           </a:p>
           <a:p>
@@ -26074,7 +26387,7 @@
                 <a:ea typeface="Noto Sans CJK JP"/>
                 <a:cs typeface="Noto Sans"/>
               </a:rPr>
-              <a:t>実例12：複数の州を拾う</a:t>
+              <a:t>実例12：複数の州を拾う（訳）</a:t>
             </a:r>
           </a:p>
         </p:txBody>
@@ -26176,7 +26489,7 @@
                 <a:ea typeface="Noto Sans CJK JP"/>
                 <a:cs typeface="Noto Sans"/>
               </a:rPr>
-              <a:t>記事：Dust Bowl ／ long answer全文・質問・正解注釈</a:t>
+              <a:t>記事：ダストボウル ／ 日本語訳・正解注釈</a:t>
             </a:r>
           </a:p>
         </p:txBody>
@@ -26190,7 +26503,7 @@
         <p:spPr>
           <a:xfrm>
             <a:off x="548640" y="1600200"/>
-            <a:ext cx="8046720" cy="1274561"/>
+            <a:ext cx="8046720" cy="1618528"/>
           </a:xfrm>
           <a:prstGeom prst="rect">
             <a:avLst/>
@@ -26218,70 +26531,70 @@
           </a:fontRef>
         </p:style>
         <p:txBody>
-          <a:bodyPr rtlCol="0" anchor="t" wrap="square" lIns="177800" rIns="177800" tIns="63500" bIns="127000">
+          <a:bodyPr rtlCol="0" anchor="t" wrap="square" lIns="177800" rIns="177800" tIns="47920" bIns="127000">
             <a:noAutofit/>
           </a:bodyPr>
           <a:lstStyle/>
           <a:p>
             <a:pPr algn="l">
               <a:lnSpc>
-                <a:spcPts val="2142"/>
-              </a:lnSpc>
-              <a:spcBef>
-                <a:spcPts val="0"/>
-              </a:spcBef>
-              <a:spcAft>
-                <a:spcPts val="0"/>
-              </a:spcAft>
-              <a:buNone/>
-              <a:defRPr sz="1800" b="0">
-                <a:solidFill>
-                  <a:srgbClr val="303437"/>
-                </a:solidFill>
-                <a:latin typeface="Noto Sans"/>
-              </a:defRPr>
-            </a:pPr>
-            <a:r>
-              <a:rPr sz="1800" b="0" lang="ja-JP" altLang="en-US">
-                <a:solidFill>
-                  <a:srgbClr val="303437"/>
-                </a:solidFill>
-                <a:latin typeface="Noto Sans"/>
-                <a:ea typeface="Noto Sans CJK JP"/>
-                <a:cs typeface="Noto Sans"/>
-              </a:rPr>
-              <a:t>The drought and erosion of the Dust Bowl affected 100,000,000 acres (400,000 km2) that centered on the panhandles of Texas and Oklahoma and touched adjacent sections of New Mexico, Colorado, and Kansas.[5]</a:t>
+                <a:spcPts val="2379"/>
+              </a:lnSpc>
+              <a:spcBef>
+                <a:spcPts val="0"/>
+              </a:spcBef>
+              <a:spcAft>
+                <a:spcPts val="0"/>
+              </a:spcAft>
+              <a:buNone/>
+              <a:defRPr sz="2000" b="0">
+                <a:solidFill>
+                  <a:srgbClr val="303437"/>
+                </a:solidFill>
+                <a:latin typeface="Noto Sans"/>
+              </a:defRPr>
+            </a:pPr>
+            <a:r>
+              <a:rPr sz="2000" b="0" lang="ja-JP" altLang="en-US">
+                <a:solidFill>
+                  <a:srgbClr val="303437"/>
+                </a:solidFill>
+                <a:latin typeface="Noto Sans"/>
+                <a:ea typeface="Noto Sans CJK JP"/>
+                <a:cs typeface="Noto Sans"/>
+              </a:rPr>
+              <a:t>ダストボウルによる干ばつと侵食は、テキサス州とオクラホマ州のパンハンドル地域を中心に、隣接するニューメキシコ州、コロラド州、カンザス州の一部にも及ぶ1億エーカー（40万km2）の土地に影響した。[5]</a:t>
             </a:r>
           </a:p>
           <a:p>
             <a:pPr algn="l">
               <a:lnSpc>
-                <a:spcPts val="2142"/>
-              </a:lnSpc>
-              <a:spcBef>
-                <a:spcPts val="0"/>
-              </a:spcBef>
-              <a:spcAft>
-                <a:spcPts val="0"/>
-              </a:spcAft>
-              <a:buNone/>
-              <a:defRPr sz="1800" b="0">
-                <a:solidFill>
-                  <a:srgbClr val="303437"/>
-                </a:solidFill>
-                <a:latin typeface="Noto Sans"/>
-              </a:defRPr>
-            </a:pPr>
-            <a:r>
-              <a:rPr sz="1800" b="0" lang="ja-JP" altLang="en-US">
-                <a:solidFill>
-                  <a:srgbClr val="303437"/>
-                </a:solidFill>
-                <a:latin typeface="Noto Sans"/>
-                <a:ea typeface="Noto Sans CJK JP"/>
-                <a:cs typeface="Noto Sans"/>
-              </a:rPr>
-              <a:t>Question: what states were most affected by the dust bowl</a:t>
+                <a:spcPts val="2379"/>
+              </a:lnSpc>
+              <a:spcBef>
+                <a:spcPts val="0"/>
+              </a:spcBef>
+              <a:spcAft>
+                <a:spcPts val="0"/>
+              </a:spcAft>
+              <a:buNone/>
+              <a:defRPr sz="2000" b="0">
+                <a:solidFill>
+                  <a:srgbClr val="303437"/>
+                </a:solidFill>
+                <a:latin typeface="Noto Sans"/>
+              </a:defRPr>
+            </a:pPr>
+            <a:r>
+              <a:rPr sz="2000" b="0" lang="ja-JP" altLang="en-US">
+                <a:solidFill>
+                  <a:srgbClr val="303437"/>
+                </a:solidFill>
+                <a:latin typeface="Noto Sans"/>
+                <a:ea typeface="Noto Sans CJK JP"/>
+                <a:cs typeface="Noto Sans"/>
+              </a:rPr>
+              <a:t>質問：ダストボウルの被害が最も大きかったのはどの州か。</a:t>
             </a:r>
           </a:p>
         </p:txBody>
@@ -26294,7 +26607,7 @@
         </p:nvSpPr>
         <p:spPr>
           <a:xfrm>
-            <a:off x="594360" y="2984490"/>
+            <a:off x="594360" y="3328457"/>
             <a:ext cx="3886200" cy="992124"/>
           </a:xfrm>
           <a:prstGeom prst="rect">
@@ -26335,7 +26648,7 @@
                 <a:ea typeface="Noto Sans CJK JP"/>
                 <a:cs typeface="Noto Sans"/>
               </a:rPr>
-              <a:t>Texas</a:t>
+              <a:t>テキサス</a:t>
             </a:r>
           </a:p>
           <a:p>
@@ -26366,7 +26679,7 @@
                 <a:ea typeface="Noto Sans CJK JP"/>
                 <a:cs typeface="Noto Sans"/>
               </a:rPr>
-              <a:t>Oklahoma</a:t>
+              <a:t>オクラホマ</a:t>
             </a:r>
           </a:p>
           <a:p>
@@ -26397,7 +26710,7 @@
                 <a:ea typeface="Noto Sans CJK JP"/>
                 <a:cs typeface="Noto Sans"/>
               </a:rPr>
-              <a:t>New Mexico</a:t>
+              <a:t>ニューメキシコ</a:t>
             </a:r>
           </a:p>
         </p:txBody>
@@ -26410,7 +26723,7 @@
         </p:nvSpPr>
         <p:spPr>
           <a:xfrm>
-            <a:off x="4681728" y="2984490"/>
+            <a:off x="4681728" y="3328457"/>
             <a:ext cx="3886200" cy="992124"/>
           </a:xfrm>
           <a:prstGeom prst="rect">
@@ -26451,7 +26764,7 @@
                 <a:ea typeface="Noto Sans CJK JP"/>
                 <a:cs typeface="Noto Sans"/>
               </a:rPr>
-              <a:t>Colorado</a:t>
+              <a:t>コロラド</a:t>
             </a:r>
           </a:p>
           <a:p>
@@ -26482,7 +26795,7 @@
                 <a:ea typeface="Noto Sans CJK JP"/>
                 <a:cs typeface="Noto Sans"/>
               </a:rPr>
-              <a:t>Kansas</a:t>
+              <a:t>カンザス</a:t>
             </a:r>
           </a:p>
         </p:txBody>
@@ -26628,7 +26941,7 @@
                 <a:ea typeface="Noto Sans CJK JP"/>
                 <a:cs typeface="Noto Sans"/>
               </a:rPr>
-              <a:t>実例12：複数の州を拾う（訳）</a:t>
+              <a:t>実例13：複数の機能を答える</a:t>
             </a:r>
           </a:p>
         </p:txBody>
@@ -26730,7 +27043,7 @@
                 <a:ea typeface="Noto Sans CJK JP"/>
                 <a:cs typeface="Noto Sans"/>
               </a:rPr>
-              <a:t>記事：ダストボウル ／ 日本語訳・正解注釈</a:t>
+              <a:t>記事：Pericardium ／ long answer全文・質問・正解注釈</a:t>
             </a:r>
           </a:p>
         </p:txBody>
@@ -26744,7 +27057,7 @@
         <p:spPr>
           <a:xfrm>
             <a:off x="548640" y="1600200"/>
-            <a:ext cx="8046720" cy="1697302"/>
+            <a:ext cx="8046720" cy="1057231"/>
           </a:xfrm>
           <a:prstGeom prst="rect">
             <a:avLst/>
@@ -26772,70 +27085,70 @@
           </a:fontRef>
         </p:style>
         <p:txBody>
-          <a:bodyPr rtlCol="0" anchor="t" wrap="square" lIns="177800" rIns="177800" tIns="63500" bIns="127000">
+          <a:bodyPr rtlCol="0" anchor="t" wrap="square" lIns="177800" rIns="177800" tIns="45426" bIns="127000">
             <a:noAutofit/>
           </a:bodyPr>
           <a:lstStyle/>
           <a:p>
             <a:pPr algn="l">
               <a:lnSpc>
-                <a:spcPts val="2379"/>
-              </a:lnSpc>
-              <a:spcBef>
-                <a:spcPts val="0"/>
-              </a:spcBef>
-              <a:spcAft>
-                <a:spcPts val="0"/>
-              </a:spcAft>
-              <a:buNone/>
-              <a:defRPr sz="2000" b="0">
-                <a:solidFill>
-                  <a:srgbClr val="303437"/>
-                </a:solidFill>
-                <a:latin typeface="Noto Sans"/>
-              </a:defRPr>
-            </a:pPr>
-            <a:r>
-              <a:rPr sz="2000" b="0" lang="ja-JP" altLang="en-US">
-                <a:solidFill>
-                  <a:srgbClr val="303437"/>
-                </a:solidFill>
-                <a:latin typeface="Noto Sans"/>
-                <a:ea typeface="Noto Sans CJK JP"/>
-                <a:cs typeface="Noto Sans"/>
-              </a:rPr>
-              <a:t>ダストボウルによる干ばつと侵食は、テキサス州とオクラホマ州のパンハンドル地域を中心に、隣接するニューメキシコ州、コロラド州、カンザス州の一部にも及ぶ1億エーカー（40万km2）の土地に影響した。[5]</a:t>
+                <a:spcPts val="1784"/>
+              </a:lnSpc>
+              <a:spcBef>
+                <a:spcPts val="0"/>
+              </a:spcBef>
+              <a:spcAft>
+                <a:spcPts val="0"/>
+              </a:spcAft>
+              <a:buNone/>
+              <a:defRPr sz="1500" b="0">
+                <a:solidFill>
+                  <a:srgbClr val="303437"/>
+                </a:solidFill>
+                <a:latin typeface="Noto Sans"/>
+              </a:defRPr>
+            </a:pPr>
+            <a:r>
+              <a:rPr sz="1500" b="0" lang="ja-JP" altLang="en-US">
+                <a:solidFill>
+                  <a:srgbClr val="303437"/>
+                </a:solidFill>
+                <a:latin typeface="Noto Sans"/>
+                <a:ea typeface="Noto Sans CJK JP"/>
+                <a:cs typeface="Noto Sans"/>
+              </a:rPr>
+              <a:t>Sets heart in mediastinum and limits its motion Protects it from infections coming from other organs (such as lungs) Prevents excessive dilation of the heart in cases of acute volume overload Lubricates the heart</a:t>
             </a:r>
           </a:p>
           <a:p>
             <a:pPr algn="l">
               <a:lnSpc>
-                <a:spcPts val="2379"/>
-              </a:lnSpc>
-              <a:spcBef>
-                <a:spcPts val="0"/>
-              </a:spcBef>
-              <a:spcAft>
-                <a:spcPts val="0"/>
-              </a:spcAft>
-              <a:buNone/>
-              <a:defRPr sz="2000" b="0">
-                <a:solidFill>
-                  <a:srgbClr val="303437"/>
-                </a:solidFill>
-                <a:latin typeface="Noto Sans"/>
-              </a:defRPr>
-            </a:pPr>
-            <a:r>
-              <a:rPr sz="2000" b="0" lang="ja-JP" altLang="en-US">
-                <a:solidFill>
-                  <a:srgbClr val="303437"/>
-                </a:solidFill>
-                <a:latin typeface="Noto Sans"/>
-                <a:ea typeface="Noto Sans CJK JP"/>
-                <a:cs typeface="Noto Sans"/>
-              </a:rPr>
-              <a:t>質問：ダストボウルの被害が最も大きかったのはどの州か。</a:t>
+                <a:spcPts val="1784"/>
+              </a:lnSpc>
+              <a:spcBef>
+                <a:spcPts val="0"/>
+              </a:spcBef>
+              <a:spcAft>
+                <a:spcPts val="0"/>
+              </a:spcAft>
+              <a:buNone/>
+              <a:defRPr sz="1500" b="0">
+                <a:solidFill>
+                  <a:srgbClr val="303437"/>
+                </a:solidFill>
+                <a:latin typeface="Noto Sans"/>
+              </a:defRPr>
+            </a:pPr>
+            <a:r>
+              <a:rPr sz="1500" b="0" lang="ja-JP" altLang="en-US">
+                <a:solidFill>
+                  <a:srgbClr val="303437"/>
+                </a:solidFill>
+                <a:latin typeface="Noto Sans"/>
+                <a:ea typeface="Noto Sans CJK JP"/>
+                <a:cs typeface="Noto Sans"/>
+              </a:rPr>
+              <a:t>Question: what is the function of the pericardial sac</a:t>
             </a:r>
           </a:p>
         </p:txBody>
@@ -26848,8 +27161,8 @@
         </p:nvSpPr>
         <p:spPr>
           <a:xfrm>
-            <a:off x="594360" y="3407231"/>
-            <a:ext cx="3886200" cy="992124"/>
+            <a:off x="594360" y="2767160"/>
+            <a:ext cx="3886200" cy="1610868"/>
           </a:xfrm>
           <a:prstGeom prst="rect">
             <a:avLst/>
@@ -26889,7 +27202,7 @@
                 <a:ea typeface="Noto Sans CJK JP"/>
                 <a:cs typeface="Noto Sans"/>
               </a:rPr>
-              <a:t>テキサス</a:t>
+              <a:t>Sets heart in mediastinum and limits its motion</a:t>
             </a:r>
           </a:p>
           <a:p>
@@ -26920,38 +27233,7 @@
                 <a:ea typeface="Noto Sans CJK JP"/>
                 <a:cs typeface="Noto Sans"/>
               </a:rPr>
-              <a:t>オクラホマ</a:t>
-            </a:r>
-          </a:p>
-          <a:p>
-            <a:pPr algn="l">
-              <a:lnSpc>
-                <a:spcPts val="2436"/>
-              </a:lnSpc>
-              <a:spcBef>
-                <a:spcPts val="0"/>
-              </a:spcBef>
-              <a:spcAft>
-                <a:spcPts val="0"/>
-              </a:spcAft>
-              <a:buNone/>
-              <a:defRPr sz="2100" b="0">
-                <a:solidFill>
-                  <a:srgbClr val="303437"/>
-                </a:solidFill>
-                <a:latin typeface="Noto Sans"/>
-              </a:defRPr>
-            </a:pPr>
-            <a:r>
-              <a:rPr sz="2100" b="1" lang="ja-JP" altLang="en-US">
-                <a:solidFill>
-                  <a:srgbClr val="B13731"/>
-                </a:solidFill>
-                <a:latin typeface="Noto Sans"/>
-                <a:ea typeface="Noto Sans CJK JP"/>
-                <a:cs typeface="Noto Sans"/>
-              </a:rPr>
-              <a:t>ニューメキシコ</a:t>
+              <a:t>Protects it from infections coming from other organs (such as lungs)</a:t>
             </a:r>
           </a:p>
         </p:txBody>
@@ -26964,8 +27246,8 @@
         </p:nvSpPr>
         <p:spPr>
           <a:xfrm>
-            <a:off x="4681728" y="3407231"/>
-            <a:ext cx="3886200" cy="992124"/>
+            <a:off x="4681728" y="2767160"/>
+            <a:ext cx="3886200" cy="1610868"/>
           </a:xfrm>
           <a:prstGeom prst="rect">
             <a:avLst/>
@@ -27005,7 +27287,7 @@
                 <a:ea typeface="Noto Sans CJK JP"/>
                 <a:cs typeface="Noto Sans"/>
               </a:rPr>
-              <a:t>コロラド</a:t>
+              <a:t>Prevents excessive dilation of the heart in cases of acute volume overload</a:t>
             </a:r>
           </a:p>
           <a:p>
@@ -27036,7 +27318,7 @@
                 <a:ea typeface="Noto Sans CJK JP"/>
                 <a:cs typeface="Noto Sans"/>
               </a:rPr>
-              <a:t>カンザス</a:t>
+              <a:t>Lubricates the heart</a:t>
             </a:r>
           </a:p>
         </p:txBody>
@@ -27090,7 +27372,7 @@
                 <a:ea typeface="Noto Sans CJK JP"/>
                 <a:cs typeface="Noto Sans"/>
               </a:rPr>
-              <a:t>[1] Google Research, Natural Questions. dev / Hugging Face公開配布。 dev / example_id: 7354980942032766409</a:t>
+              <a:t>[1] Google Research, Natural Questions. dev / Hugging Face公開配布。 dev / example_id: -7044678620071639460</a:t>
             </a:r>
           </a:p>
           <a:p>
@@ -27182,7 +27464,7 @@
                 <a:ea typeface="Noto Sans CJK JP"/>
                 <a:cs typeface="Noto Sans"/>
               </a:rPr>
-              <a:t>実例13：複数の機能を答える</a:t>
+              <a:t>実例13：複数の機能を答える（訳）</a:t>
             </a:r>
           </a:p>
         </p:txBody>
@@ -27284,7 +27566,7 @@
                 <a:ea typeface="Noto Sans CJK JP"/>
                 <a:cs typeface="Noto Sans"/>
               </a:rPr>
-              <a:t>記事：Pericardium ／ long answer全文・質問・正解注釈</a:t>
+              <a:t>記事：心膜 ／ 日本語訳・正解注釈</a:t>
             </a:r>
           </a:p>
         </p:txBody>
@@ -27298,7 +27580,7 @@
         <p:spPr>
           <a:xfrm>
             <a:off x="548640" y="1600200"/>
-            <a:ext cx="8046720" cy="1088056"/>
+            <a:ext cx="8046720" cy="1324950"/>
           </a:xfrm>
           <a:prstGeom prst="rect">
             <a:avLst/>
@@ -27326,70 +27608,70 @@
           </a:fontRef>
         </p:style>
         <p:txBody>
-          <a:bodyPr rtlCol="0" anchor="t" wrap="square" lIns="177800" rIns="177800" tIns="63500" bIns="127000">
+          <a:bodyPr rtlCol="0" anchor="t" wrap="square" lIns="177800" rIns="177800" tIns="48289" bIns="127000">
             <a:noAutofit/>
           </a:bodyPr>
           <a:lstStyle/>
           <a:p>
             <a:pPr algn="l">
               <a:lnSpc>
-                <a:spcPts val="1784"/>
-              </a:lnSpc>
-              <a:spcBef>
-                <a:spcPts val="0"/>
-              </a:spcBef>
-              <a:spcAft>
-                <a:spcPts val="0"/>
-              </a:spcAft>
-              <a:buNone/>
-              <a:defRPr sz="1500" b="0">
-                <a:solidFill>
-                  <a:srgbClr val="303437"/>
-                </a:solidFill>
-                <a:latin typeface="Noto Sans"/>
-              </a:defRPr>
-            </a:pPr>
-            <a:r>
-              <a:rPr sz="1500" b="0" lang="ja-JP" altLang="en-US">
-                <a:solidFill>
-                  <a:srgbClr val="303437"/>
-                </a:solidFill>
-                <a:latin typeface="Noto Sans"/>
-                <a:ea typeface="Noto Sans CJK JP"/>
-                <a:cs typeface="Noto Sans"/>
-              </a:rPr>
-              <a:t>Sets heart in mediastinum and limits its motion Protects it from infections coming from other organs (such as lungs) Prevents excessive dilation of the heart in cases of acute volume overload Lubricates the heart</a:t>
+                <a:spcPts val="2379"/>
+              </a:lnSpc>
+              <a:spcBef>
+                <a:spcPts val="0"/>
+              </a:spcBef>
+              <a:spcAft>
+                <a:spcPts val="0"/>
+              </a:spcAft>
+              <a:buNone/>
+              <a:defRPr sz="2000" b="0">
+                <a:solidFill>
+                  <a:srgbClr val="303437"/>
+                </a:solidFill>
+                <a:latin typeface="Noto Sans"/>
+              </a:defRPr>
+            </a:pPr>
+            <a:r>
+              <a:rPr sz="2000" b="0" lang="ja-JP" altLang="en-US">
+                <a:solidFill>
+                  <a:srgbClr val="303437"/>
+                </a:solidFill>
+                <a:latin typeface="Noto Sans"/>
+                <a:ea typeface="Noto Sans CJK JP"/>
+                <a:cs typeface="Noto Sans"/>
+              </a:rPr>
+              <a:t>心臓を縦隔内に固定し、動きを制限する。他の臓器（肺など）からの感染を防ぐ。急激な容量負荷の際に心臓が過度に拡張するのを防ぐ。心臓の動きを滑らかにする。</a:t>
             </a:r>
           </a:p>
           <a:p>
             <a:pPr algn="l">
               <a:lnSpc>
-                <a:spcPts val="1784"/>
-              </a:lnSpc>
-              <a:spcBef>
-                <a:spcPts val="0"/>
-              </a:spcBef>
-              <a:spcAft>
-                <a:spcPts val="0"/>
-              </a:spcAft>
-              <a:buNone/>
-              <a:defRPr sz="1500" b="0">
-                <a:solidFill>
-                  <a:srgbClr val="303437"/>
-                </a:solidFill>
-                <a:latin typeface="Noto Sans"/>
-              </a:defRPr>
-            </a:pPr>
-            <a:r>
-              <a:rPr sz="1500" b="0" lang="ja-JP" altLang="en-US">
-                <a:solidFill>
-                  <a:srgbClr val="303437"/>
-                </a:solidFill>
-                <a:latin typeface="Noto Sans"/>
-                <a:ea typeface="Noto Sans CJK JP"/>
-                <a:cs typeface="Noto Sans"/>
-              </a:rPr>
-              <a:t>Question: what is the function of the pericardial sac</a:t>
+                <a:spcPts val="2379"/>
+              </a:lnSpc>
+              <a:spcBef>
+                <a:spcPts val="0"/>
+              </a:spcBef>
+              <a:spcAft>
+                <a:spcPts val="0"/>
+              </a:spcAft>
+              <a:buNone/>
+              <a:defRPr sz="2000" b="0">
+                <a:solidFill>
+                  <a:srgbClr val="303437"/>
+                </a:solidFill>
+                <a:latin typeface="Noto Sans"/>
+              </a:defRPr>
+            </a:pPr>
+            <a:r>
+              <a:rPr sz="2000" b="0" lang="ja-JP" altLang="en-US">
+                <a:solidFill>
+                  <a:srgbClr val="303437"/>
+                </a:solidFill>
+                <a:latin typeface="Noto Sans"/>
+                <a:ea typeface="Noto Sans CJK JP"/>
+                <a:cs typeface="Noto Sans"/>
+              </a:rPr>
+              <a:t>質問：心嚢にはどのような働きがあるか。</a:t>
             </a:r>
           </a:p>
         </p:txBody>
@@ -27402,8 +27684,8 @@
         </p:nvSpPr>
         <p:spPr>
           <a:xfrm>
-            <a:off x="594360" y="2797985"/>
-            <a:ext cx="3886200" cy="1610868"/>
+            <a:off x="594360" y="3034880"/>
+            <a:ext cx="3886200" cy="1301496"/>
           </a:xfrm>
           <a:prstGeom prst="rect">
             <a:avLst/>
@@ -27443,7 +27725,7 @@
                 <a:ea typeface="Noto Sans CJK JP"/>
                 <a:cs typeface="Noto Sans"/>
               </a:rPr>
-              <a:t>Sets heart in mediastinum and limits its motion</a:t>
+              <a:t>心臓を縦隔内に固定し、動きを制限する</a:t>
             </a:r>
           </a:p>
           <a:p>
@@ -27474,7 +27756,7 @@
                 <a:ea typeface="Noto Sans CJK JP"/>
                 <a:cs typeface="Noto Sans"/>
               </a:rPr>
-              <a:t>Protects it from infections coming from other organs (such as lungs)</a:t>
+              <a:t>他の臓器（肺など）からの感染を防ぐ</a:t>
             </a:r>
           </a:p>
         </p:txBody>
@@ -27487,8 +27769,8 @@
         </p:nvSpPr>
         <p:spPr>
           <a:xfrm>
-            <a:off x="4681728" y="2797985"/>
-            <a:ext cx="3886200" cy="1610868"/>
+            <a:off x="4681728" y="3034880"/>
+            <a:ext cx="3886200" cy="1301496"/>
           </a:xfrm>
           <a:prstGeom prst="rect">
             <a:avLst/>
@@ -27528,7 +27810,7 @@
                 <a:ea typeface="Noto Sans CJK JP"/>
                 <a:cs typeface="Noto Sans"/>
               </a:rPr>
-              <a:t>Prevents excessive dilation of the heart in cases of acute volume overload</a:t>
+              <a:t>急激な容量負荷時の心臓の過度な拡張を防ぐ</a:t>
             </a:r>
           </a:p>
           <a:p>
@@ -27559,7 +27841,7 @@
                 <a:ea typeface="Noto Sans CJK JP"/>
                 <a:cs typeface="Noto Sans"/>
               </a:rPr>
-              <a:t>Lubricates the heart</a:t>
+              <a:t>心臓の動きを滑らかにする</a:t>
             </a:r>
           </a:p>
         </p:txBody>
@@ -27674,38 +27956,38 @@
         </p:nvSpPr>
         <p:spPr>
           <a:xfrm>
-            <a:off x="468172" y="650138"/>
-            <a:ext cx="8206740" cy="616305"/>
-          </a:xfrm>
-        </p:spPr>
-        <p:txBody>
-          <a:bodyPr wrap="square" lIns="0" rIns="0" tIns="0" bIns="0">
+            <a:off x="548640" y="2506875"/>
+            <a:ext cx="8046720" cy="585216"/>
+          </a:xfrm>
+        </p:spPr>
+        <p:txBody>
+          <a:bodyPr wrap="square" lIns="0" rIns="0" tIns="0" bIns="0" anchor="ctr">
             <a:noAutofit/>
           </a:bodyPr>
           <a:lstStyle/>
           <a:p>
-            <a:pPr algn="l">
+            <a:pPr algn="ctr">
               <a:lnSpc>
                 <a:spcPct val="110000"/>
               </a:lnSpc>
               <a:buNone/>
-              <a:defRPr sz="2800" b="0">
-                <a:solidFill>
-                  <a:srgbClr val="303437"/>
-                </a:solidFill>
-                <a:latin typeface="Noto Sans"/>
-              </a:defRPr>
-            </a:pPr>
-            <a:r>
-              <a:rPr sz="2800" b="1" lang="ja-JP" altLang="en-US">
-                <a:solidFill>
-                  <a:srgbClr val="303437"/>
-                </a:solidFill>
-                <a:latin typeface="Noto Sans"/>
-                <a:ea typeface="Noto Sans CJK JP"/>
-                <a:cs typeface="Noto Sans"/>
-              </a:rPr>
-              <a:t>実例13：複数の機能を答える（訳）</a:t>
+              <a:defRPr sz="3600" b="0">
+                <a:solidFill>
+                  <a:srgbClr val="303437"/>
+                </a:solidFill>
+                <a:latin typeface="Noto Sans"/>
+              </a:defRPr>
+            </a:pPr>
+            <a:r>
+              <a:rPr sz="3600" b="1" lang="ja-JP" altLang="en-US">
+                <a:solidFill>
+                  <a:srgbClr val="303437"/>
+                </a:solidFill>
+                <a:latin typeface="Noto Sans"/>
+                <a:ea typeface="Noto Sans CJK JP"/>
+                <a:cs typeface="Noto Sans"/>
+              </a:rPr>
+              <a:t>注釈と実行条件の補足</a:t>
             </a:r>
           </a:p>
         </p:txBody>
@@ -27753,416 +28035,7 @@
                 <a:ea typeface="Noto Sans CJK JP"/>
                 <a:cs typeface="Noto Sans"/>
               </a:rPr>
-              <a:t>Appendix: 1. 追加の実例</a:t>
-            </a:r>
-          </a:p>
-        </p:txBody>
-      </p:sp>
-      <p:sp>
-        <p:nvSpPr>
-          <p:cNvPr id="4" name="TextBox 3"/>
-          <p:cNvSpPr txBox="1"/>
-          <p:nvPr/>
-        </p:nvSpPr>
-        <p:spPr>
-          <a:xfrm>
-            <a:off x="548640" y="1307592"/>
-            <a:ext cx="8046720" cy="219456"/>
-          </a:xfrm>
-          <a:prstGeom prst="rect">
-            <a:avLst/>
-          </a:prstGeom>
-          <a:noFill/>
-        </p:spPr>
-        <p:txBody>
-          <a:bodyPr wrap="square" lIns="0" rIns="0" tIns="0" bIns="0">
-            <a:noAutofit/>
-          </a:bodyPr>
-          <a:lstStyle/>
-          <a:p>
-            <a:pPr algn="l">
-              <a:lnSpc>
-                <a:spcPts val="1404"/>
-              </a:lnSpc>
-              <a:spcBef>
-                <a:spcPts val="0"/>
-              </a:spcBef>
-              <a:spcAft>
-                <a:spcPts val="0"/>
-              </a:spcAft>
-              <a:buNone/>
-              <a:defRPr sz="1200" b="0">
-                <a:solidFill>
-                  <a:srgbClr val="303437"/>
-                </a:solidFill>
-                <a:latin typeface="Noto Sans"/>
-              </a:defRPr>
-            </a:pPr>
-            <a:r>
-              <a:rPr sz="1200" b="0" lang="ja-JP" altLang="en-US">
-                <a:solidFill>
-                  <a:srgbClr val="626669"/>
-                </a:solidFill>
-                <a:latin typeface="Noto Sans"/>
-                <a:ea typeface="Noto Sans CJK JP"/>
-                <a:cs typeface="Noto Sans"/>
-              </a:rPr>
-              <a:t>記事：心膜 ／ 日本語訳・正解注釈</a:t>
-            </a:r>
-          </a:p>
-        </p:txBody>
-      </p:sp>
-      <p:sp>
-        <p:nvSpPr>
-          <p:cNvPr id="5" name="quote-frame"/>
-          <p:cNvSpPr/>
-          <p:nvPr/>
-        </p:nvSpPr>
-        <p:spPr>
-          <a:xfrm>
-            <a:off x="548640" y="1600200"/>
-            <a:ext cx="8046720" cy="1395259"/>
-          </a:xfrm>
-          <a:prstGeom prst="rect">
-            <a:avLst/>
-          </a:prstGeom>
-          <a:solidFill>
-            <a:srgbClr val="EBEDEB"/>
-          </a:solidFill>
-          <a:ln>
-            <a:noFill/>
-          </a:ln>
-          <a:effectLst/>
-        </p:spPr>
-        <p:style>
-          <a:lnRef idx="1">
-            <a:schemeClr val="accent1"/>
-          </a:lnRef>
-          <a:fillRef idx="3">
-            <a:schemeClr val="accent1"/>
-          </a:fillRef>
-          <a:effectRef idx="0">
-            <a:schemeClr val="accent1"/>
-          </a:effectRef>
-          <a:fontRef idx="minor">
-            <a:schemeClr val="lt1"/>
-          </a:fontRef>
-        </p:style>
-        <p:txBody>
-          <a:bodyPr rtlCol="0" anchor="t" wrap="square" lIns="177800" rIns="177800" tIns="63500" bIns="127000">
-            <a:noAutofit/>
-          </a:bodyPr>
-          <a:lstStyle/>
-          <a:p>
-            <a:pPr algn="l">
-              <a:lnSpc>
-                <a:spcPts val="2379"/>
-              </a:lnSpc>
-              <a:spcBef>
-                <a:spcPts val="0"/>
-              </a:spcBef>
-              <a:spcAft>
-                <a:spcPts val="0"/>
-              </a:spcAft>
-              <a:buNone/>
-              <a:defRPr sz="2000" b="0">
-                <a:solidFill>
-                  <a:srgbClr val="303437"/>
-                </a:solidFill>
-                <a:latin typeface="Noto Sans"/>
-              </a:defRPr>
-            </a:pPr>
-            <a:r>
-              <a:rPr sz="2000" b="0" lang="ja-JP" altLang="en-US">
-                <a:solidFill>
-                  <a:srgbClr val="303437"/>
-                </a:solidFill>
-                <a:latin typeface="Noto Sans"/>
-                <a:ea typeface="Noto Sans CJK JP"/>
-                <a:cs typeface="Noto Sans"/>
-              </a:rPr>
-              <a:t>心臓を縦隔内に固定し、動きを制限する。他の臓器（肺など）からの感染を防ぐ。急激な容量負荷の際に心臓が過度に拡張するのを防ぐ。心臓の動きを滑らかにする。</a:t>
-            </a:r>
-          </a:p>
-          <a:p>
-            <a:pPr algn="l">
-              <a:lnSpc>
-                <a:spcPts val="2379"/>
-              </a:lnSpc>
-              <a:spcBef>
-                <a:spcPts val="0"/>
-              </a:spcBef>
-              <a:spcAft>
-                <a:spcPts val="0"/>
-              </a:spcAft>
-              <a:buNone/>
-              <a:defRPr sz="2000" b="0">
-                <a:solidFill>
-                  <a:srgbClr val="303437"/>
-                </a:solidFill>
-                <a:latin typeface="Noto Sans"/>
-              </a:defRPr>
-            </a:pPr>
-            <a:r>
-              <a:rPr sz="2000" b="0" lang="ja-JP" altLang="en-US">
-                <a:solidFill>
-                  <a:srgbClr val="303437"/>
-                </a:solidFill>
-                <a:latin typeface="Noto Sans"/>
-                <a:ea typeface="Noto Sans CJK JP"/>
-                <a:cs typeface="Noto Sans"/>
-              </a:rPr>
-              <a:t>質問：心嚢にはどのような働きがあるか。</a:t>
-            </a:r>
-          </a:p>
-        </p:txBody>
-      </p:sp>
-      <p:sp>
-        <p:nvSpPr>
-          <p:cNvPr id="6" name="TextBox 5"/>
-          <p:cNvSpPr txBox="1"/>
-          <p:nvPr/>
-        </p:nvSpPr>
-        <p:spPr>
-          <a:xfrm>
-            <a:off x="594360" y="3105189"/>
-            <a:ext cx="3886200" cy="1301496"/>
-          </a:xfrm>
-          <a:prstGeom prst="rect">
-            <a:avLst/>
-          </a:prstGeom>
-          <a:noFill/>
-        </p:spPr>
-        <p:txBody>
-          <a:bodyPr wrap="square" lIns="0" rIns="0" tIns="0" bIns="0">
-            <a:noAutofit/>
-          </a:bodyPr>
-          <a:lstStyle/>
-          <a:p>
-            <a:pPr algn="l">
-              <a:lnSpc>
-                <a:spcPts val="2436"/>
-              </a:lnSpc>
-              <a:spcBef>
-                <a:spcPts val="0"/>
-              </a:spcBef>
-              <a:spcAft>
-                <a:spcPts val="0"/>
-              </a:spcAft>
-              <a:buNone/>
-              <a:defRPr sz="2100" b="0">
-                <a:solidFill>
-                  <a:srgbClr val="303437"/>
-                </a:solidFill>
-                <a:latin typeface="Noto Sans"/>
-              </a:defRPr>
-            </a:pPr>
-            <a:r>
-              <a:rPr sz="2100" b="1" lang="ja-JP" altLang="en-US">
-                <a:solidFill>
-                  <a:srgbClr val="B13731"/>
-                </a:solidFill>
-                <a:latin typeface="Noto Sans"/>
-                <a:ea typeface="Noto Sans CJK JP"/>
-                <a:cs typeface="Noto Sans"/>
-              </a:rPr>
-              <a:t>心臓を縦隔内に固定し、動きを制限する</a:t>
-            </a:r>
-          </a:p>
-          <a:p>
-            <a:pPr algn="l">
-              <a:lnSpc>
-                <a:spcPts val="2436"/>
-              </a:lnSpc>
-              <a:spcBef>
-                <a:spcPts val="0"/>
-              </a:spcBef>
-              <a:spcAft>
-                <a:spcPts val="0"/>
-              </a:spcAft>
-              <a:buNone/>
-              <a:defRPr sz="2100" b="0">
-                <a:solidFill>
-                  <a:srgbClr val="303437"/>
-                </a:solidFill>
-                <a:latin typeface="Noto Sans"/>
-              </a:defRPr>
-            </a:pPr>
-            <a:r>
-              <a:rPr sz="2100" b="1" lang="ja-JP" altLang="en-US">
-                <a:solidFill>
-                  <a:srgbClr val="B13731"/>
-                </a:solidFill>
-                <a:latin typeface="Noto Sans"/>
-                <a:ea typeface="Noto Sans CJK JP"/>
-                <a:cs typeface="Noto Sans"/>
-              </a:rPr>
-              <a:t>他の臓器（肺など）からの感染を防ぐ</a:t>
-            </a:r>
-          </a:p>
-        </p:txBody>
-      </p:sp>
-      <p:sp>
-        <p:nvSpPr>
-          <p:cNvPr id="7" name="TextBox 6"/>
-          <p:cNvSpPr txBox="1"/>
-          <p:nvPr/>
-        </p:nvSpPr>
-        <p:spPr>
-          <a:xfrm>
-            <a:off x="4681728" y="3105189"/>
-            <a:ext cx="3886200" cy="1301496"/>
-          </a:xfrm>
-          <a:prstGeom prst="rect">
-            <a:avLst/>
-          </a:prstGeom>
-          <a:noFill/>
-        </p:spPr>
-        <p:txBody>
-          <a:bodyPr wrap="square" lIns="0" rIns="0" tIns="0" bIns="0">
-            <a:noAutofit/>
-          </a:bodyPr>
-          <a:lstStyle/>
-          <a:p>
-            <a:pPr algn="l">
-              <a:lnSpc>
-                <a:spcPts val="2436"/>
-              </a:lnSpc>
-              <a:spcBef>
-                <a:spcPts val="0"/>
-              </a:spcBef>
-              <a:spcAft>
-                <a:spcPts val="0"/>
-              </a:spcAft>
-              <a:buNone/>
-              <a:defRPr sz="2100" b="0">
-                <a:solidFill>
-                  <a:srgbClr val="303437"/>
-                </a:solidFill>
-                <a:latin typeface="Noto Sans"/>
-              </a:defRPr>
-            </a:pPr>
-            <a:r>
-              <a:rPr sz="2100" b="1" lang="ja-JP" altLang="en-US">
-                <a:solidFill>
-                  <a:srgbClr val="B13731"/>
-                </a:solidFill>
-                <a:latin typeface="Noto Sans"/>
-                <a:ea typeface="Noto Sans CJK JP"/>
-                <a:cs typeface="Noto Sans"/>
-              </a:rPr>
-              <a:t>急激な容量負荷時の心臓の過度な拡張を防ぐ</a:t>
-            </a:r>
-          </a:p>
-          <a:p>
-            <a:pPr algn="l">
-              <a:lnSpc>
-                <a:spcPts val="2436"/>
-              </a:lnSpc>
-              <a:spcBef>
-                <a:spcPts val="0"/>
-              </a:spcBef>
-              <a:spcAft>
-                <a:spcPts val="0"/>
-              </a:spcAft>
-              <a:buNone/>
-              <a:defRPr sz="2100" b="0">
-                <a:solidFill>
-                  <a:srgbClr val="303437"/>
-                </a:solidFill>
-                <a:latin typeface="Noto Sans"/>
-              </a:defRPr>
-            </a:pPr>
-            <a:r>
-              <a:rPr sz="2100" b="1" lang="ja-JP" altLang="en-US">
-                <a:solidFill>
-                  <a:srgbClr val="B13731"/>
-                </a:solidFill>
-                <a:latin typeface="Noto Sans"/>
-                <a:ea typeface="Noto Sans CJK JP"/>
-                <a:cs typeface="Noto Sans"/>
-              </a:rPr>
-              <a:t>心臓の動きを滑らかにする</a:t>
-            </a:r>
-          </a:p>
-        </p:txBody>
-      </p:sp>
-      <p:sp>
-        <p:nvSpPr>
-          <p:cNvPr id="8" name="sources"/>
-          <p:cNvSpPr txBox="1"/>
-          <p:nvPr/>
-        </p:nvSpPr>
-        <p:spPr>
-          <a:xfrm>
-            <a:off x="502920" y="4700016"/>
-            <a:ext cx="8183879" cy="530352"/>
-          </a:xfrm>
-          <a:prstGeom prst="rect">
-            <a:avLst/>
-          </a:prstGeom>
-          <a:noFill/>
-        </p:spPr>
-        <p:txBody>
-          <a:bodyPr wrap="square" lIns="0" rIns="0" tIns="0" bIns="0">
-            <a:noAutofit/>
-          </a:bodyPr>
-          <a:lstStyle/>
-          <a:p>
-            <a:pPr algn="l">
-              <a:lnSpc>
-                <a:spcPts val="940"/>
-              </a:lnSpc>
-              <a:spcBef>
-                <a:spcPts val="0"/>
-              </a:spcBef>
-              <a:spcAft>
-                <a:spcPts val="140"/>
-              </a:spcAft>
-              <a:buNone/>
-              <a:defRPr sz="810" b="0">
-                <a:solidFill>
-                  <a:srgbClr val="303437"/>
-                </a:solidFill>
-                <a:latin typeface="Noto Sans"/>
-              </a:defRPr>
-            </a:pPr>
-            <a:r>
-              <a:rPr sz="810" b="0" lang="ja-JP" altLang="en-US">
-                <a:solidFill>
-                  <a:srgbClr val="626669"/>
-                </a:solidFill>
-                <a:latin typeface="Noto Sans"/>
-                <a:ea typeface="Noto Sans CJK JP"/>
-                <a:cs typeface="Noto Sans"/>
-              </a:rPr>
-              <a:t>[1] Google Research, Natural Questions. dev / Hugging Face公開配布。 dev / example_id: -7044678620071639460</a:t>
-            </a:r>
-          </a:p>
-          <a:p>
-            <a:pPr>
-              <a:lnSpc>
-                <a:spcPts val="940"/>
-              </a:lnSpc>
-              <a:buNone/>
-              <a:defRPr sz="810" b="0">
-                <a:solidFill>
-                  <a:srgbClr val="303437"/>
-                </a:solidFill>
-                <a:latin typeface="Noto Sans"/>
-              </a:defRPr>
-            </a:pPr>
-            <a:r>
-              <a:rPr sz="810" b="0" lang="ja-JP" altLang="en-US">
-                <a:solidFill>
-                  <a:srgbClr val="626669"/>
-                </a:solidFill>
-                <a:latin typeface="Noto Sans"/>
-                <a:ea typeface="Noto Sans CJK JP"/>
-                <a:cs typeface="Noto Sans"/>
-                <a:hlinkClick r:id="rId2"/>
-              </a:rPr>
-              <a:t>https://huggingface.co/datasets/google-research-datasets/natural_questions</a:t>
+              <a:t>Appendix: 2. 注釈と実行条件の補足</a:t>
             </a:r>
           </a:p>
         </p:txBody>
@@ -28176,424 +28049,6 @@
 </file>
 
 <file path=ppt/slides/slide59.xml><?xml version="1.0" encoding="utf-8"?>
-<p:sld xmlns:a="http://schemas.openxmlformats.org/drawingml/2006/main" xmlns:p="http://schemas.openxmlformats.org/presentationml/2006/main" xmlns:r="http://schemas.openxmlformats.org/officeDocument/2006/relationships">
-  <p:cSld>
-    <p:spTree>
-      <p:nvGrpSpPr>
-        <p:cNvPr id="1" name=""/>
-        <p:cNvGrpSpPr/>
-        <p:nvPr/>
-      </p:nvGrpSpPr>
-      <p:grpSpPr/>
-      <p:sp>
-        <p:nvSpPr>
-          <p:cNvPr id="2" name="Title 1"/>
-          <p:cNvSpPr>
-            <a:spLocks noGrp="1"/>
-          </p:cNvSpPr>
-          <p:nvPr>
-            <p:ph type="title"/>
-          </p:nvPr>
-        </p:nvSpPr>
-        <p:spPr>
-          <a:xfrm>
-            <a:off x="548640" y="2506875"/>
-            <a:ext cx="8046720" cy="585216"/>
-          </a:xfrm>
-        </p:spPr>
-        <p:txBody>
-          <a:bodyPr wrap="square" lIns="0" rIns="0" tIns="0" bIns="0" anchor="ctr">
-            <a:noAutofit/>
-          </a:bodyPr>
-          <a:lstStyle/>
-          <a:p>
-            <a:pPr algn="ctr">
-              <a:lnSpc>
-                <a:spcPct val="110000"/>
-              </a:lnSpc>
-              <a:buNone/>
-              <a:defRPr sz="3600" b="0">
-                <a:solidFill>
-                  <a:srgbClr val="303437"/>
-                </a:solidFill>
-                <a:latin typeface="Noto Sans"/>
-              </a:defRPr>
-            </a:pPr>
-            <a:r>
-              <a:rPr sz="3600" b="1" lang="ja-JP" altLang="en-US">
-                <a:solidFill>
-                  <a:srgbClr val="303437"/>
-                </a:solidFill>
-                <a:latin typeface="Noto Sans"/>
-                <a:ea typeface="Noto Sans CJK JP"/>
-                <a:cs typeface="Noto Sans"/>
-              </a:rPr>
-              <a:t>注釈と実行条件の補足</a:t>
-            </a:r>
-          </a:p>
-        </p:txBody>
-      </p:sp>
-      <p:sp>
-        <p:nvSpPr>
-          <p:cNvPr id="3" name="Title 2"/>
-          <p:cNvSpPr>
-            <a:spLocks noGrp="1"/>
-          </p:cNvSpPr>
-          <p:nvPr>
-            <p:ph type="title" idx="2"/>
-          </p:nvPr>
-        </p:nvSpPr>
-        <p:spPr>
-          <a:xfrm>
-            <a:off x="75895" y="0"/>
-            <a:ext cx="8115300" cy="480060"/>
-          </a:xfrm>
-        </p:spPr>
-        <p:txBody>
-          <a:bodyPr wrap="square" lIns="0" rIns="0" tIns="0" bIns="0" anchor="ctr">
-            <a:noAutofit/>
-          </a:bodyPr>
-          <a:lstStyle/>
-          <a:p>
-            <a:pPr algn="l">
-              <a:lnSpc>
-                <a:spcPct val="110000"/>
-              </a:lnSpc>
-              <a:buNone/>
-              <a:defRPr sz="1400" b="0">
-                <a:solidFill>
-                  <a:srgbClr val="303437"/>
-                </a:solidFill>
-                <a:latin typeface="Noto Sans"/>
-              </a:defRPr>
-            </a:pPr>
-            <a:r>
-              <a:rPr sz="1400" b="1" lang="ja-JP" altLang="en-US">
-                <a:solidFill>
-                  <a:srgbClr val="FFFEF8"/>
-                </a:solidFill>
-                <a:latin typeface="Noto Sans"/>
-                <a:ea typeface="Noto Sans CJK JP"/>
-                <a:cs typeface="Noto Sans"/>
-              </a:rPr>
-              <a:t>Appendix: 2. 注釈と実行条件の補足</a:t>
-            </a:r>
-          </a:p>
-        </p:txBody>
-      </p:sp>
-    </p:spTree>
-  </p:cSld>
-  <p:clrMapOvr>
-    <a:masterClrMapping/>
-  </p:clrMapOvr>
-</p:sld>
-</file>
-
-<file path=ppt/slides/slide6.xml><?xml version="1.0" encoding="utf-8"?>
-<p:sld xmlns:a="http://schemas.openxmlformats.org/drawingml/2006/main" xmlns:p="http://schemas.openxmlformats.org/presentationml/2006/main" xmlns:r="http://schemas.openxmlformats.org/officeDocument/2006/relationships">
-  <p:cSld>
-    <p:spTree>
-      <p:nvGrpSpPr>
-        <p:cNvPr id="1" name=""/>
-        <p:cNvGrpSpPr/>
-        <p:nvPr/>
-      </p:nvGrpSpPr>
-      <p:grpSpPr/>
-      <p:sp>
-        <p:nvSpPr>
-          <p:cNvPr id="2" name="Title 1"/>
-          <p:cNvSpPr>
-            <a:spLocks noGrp="1"/>
-          </p:cNvSpPr>
-          <p:nvPr>
-            <p:ph type="title"/>
-          </p:nvPr>
-        </p:nvSpPr>
-        <p:spPr>
-          <a:xfrm>
-            <a:off x="468172" y="650138"/>
-            <a:ext cx="8206740" cy="616305"/>
-          </a:xfrm>
-        </p:spPr>
-        <p:txBody>
-          <a:bodyPr wrap="square" lIns="0" rIns="0" tIns="0" bIns="0">
-            <a:noAutofit/>
-          </a:bodyPr>
-          <a:lstStyle/>
-          <a:p>
-            <a:pPr algn="l">
-              <a:lnSpc>
-                <a:spcPct val="110000"/>
-              </a:lnSpc>
-              <a:buNone/>
-              <a:defRPr sz="2800" b="0">
-                <a:solidFill>
-                  <a:srgbClr val="303437"/>
-                </a:solidFill>
-                <a:latin typeface="Noto Sans"/>
-              </a:defRPr>
-            </a:pPr>
-            <a:r>
-              <a:rPr sz="2800" b="1" lang="ja-JP" altLang="en-US">
-                <a:solidFill>
-                  <a:srgbClr val="303437"/>
-                </a:solidFill>
-                <a:latin typeface="Noto Sans"/>
-                <a:ea typeface="Noto Sans CJK JP"/>
-                <a:cs typeface="Noto Sans"/>
-              </a:rPr>
-              <a:t>長い回答は根拠、短い回答は答え</a:t>
-            </a:r>
-          </a:p>
-        </p:txBody>
-      </p:sp>
-      <p:sp>
-        <p:nvSpPr>
-          <p:cNvPr id="3" name="Text Placeholder 2"/>
-          <p:cNvSpPr>
-            <a:spLocks noGrp="1"/>
-          </p:cNvSpPr>
-          <p:nvPr>
-            <p:ph type="body" idx="1"/>
-          </p:nvPr>
-        </p:nvSpPr>
-        <p:spPr>
-          <a:xfrm>
-            <a:off x="594360" y="1463040"/>
-            <a:ext cx="7955279" cy="3044952"/>
-          </a:xfrm>
-        </p:spPr>
-        <p:txBody>
-          <a:bodyPr wrap="square" tIns="91440" bIns="91440">
-            <a:noAutofit/>
-          </a:bodyPr>
-          <a:lstStyle/>
-          <a:p>
-            <a:pPr marL="457200" indent="-355600">
-              <a:lnSpc>
-                <a:spcPts val="2618"/>
-              </a:lnSpc>
-              <a:spcAft>
-                <a:spcPts val="700"/>
-              </a:spcAft>
-              <a:buSzPct val="60455"/>
-              <a:buFont typeface="Noto Sans CJK JP"/>
-              <a:buChar char="●"/>
-              <a:defRPr sz="2200" b="0">
-                <a:solidFill>
-                  <a:srgbClr val="303437"/>
-                </a:solidFill>
-                <a:latin typeface="Noto Sans"/>
-              </a:defRPr>
-            </a:pPr>
-            <a:r>
-              <a:rPr sz="2200" b="0" lang="ja-JP" altLang="en-US">
-                <a:solidFill>
-                  <a:srgbClr val="303437"/>
-                </a:solidFill>
-                <a:latin typeface="Noto Sans"/>
-                <a:ea typeface="Noto Sans CJK JP"/>
-                <a:cs typeface="Noto Sans"/>
-              </a:rPr>
-              <a:t>long answerは、答えを導ける段落・表・リストなどの範囲。</a:t>
-            </a:r>
-          </a:p>
-          <a:p>
-            <a:pPr marL="457200" indent="-355600">
-              <a:lnSpc>
-                <a:spcPts val="2618"/>
-              </a:lnSpc>
-              <a:spcAft>
-                <a:spcPts val="700"/>
-              </a:spcAft>
-              <a:buSzPct val="60455"/>
-              <a:buFont typeface="Noto Sans CJK JP"/>
-              <a:buChar char="●"/>
-              <a:defRPr sz="2200" b="0">
-                <a:solidFill>
-                  <a:srgbClr val="303437"/>
-                </a:solidFill>
-                <a:latin typeface="Noto Sans"/>
-              </a:defRPr>
-            </a:pPr>
-            <a:r>
-              <a:rPr sz="2200" b="0" lang="ja-JP" altLang="en-US">
-                <a:solidFill>
-                  <a:srgbClr val="303437"/>
-                </a:solidFill>
-                <a:latin typeface="Noto Sans"/>
-                <a:ea typeface="Noto Sans CJK JP"/>
-                <a:cs typeface="Noto Sans"/>
-              </a:rPr>
-              <a:t>short answerは、その中の1つ以上の文字列、またはyes／no。長い回答だけがある例もある。</a:t>
-            </a:r>
-          </a:p>
-          <a:p>
-            <a:pPr marL="457200" indent="-355600">
-              <a:lnSpc>
-                <a:spcPts val="2618"/>
-              </a:lnSpc>
-              <a:spcAft>
-                <a:spcPts val="0"/>
-              </a:spcAft>
-              <a:buSzPct val="60455"/>
-              <a:buFont typeface="Noto Sans CJK JP"/>
-              <a:buChar char="●"/>
-              <a:defRPr sz="2200" b="0">
-                <a:solidFill>
-                  <a:srgbClr val="303437"/>
-                </a:solidFill>
-                <a:latin typeface="Noto Sans"/>
-              </a:defRPr>
-            </a:pPr>
-            <a:r>
-              <a:rPr sz="2200" b="0" lang="ja-JP" altLang="en-US">
-                <a:solidFill>
-                  <a:srgbClr val="303437"/>
-                </a:solidFill>
-                <a:latin typeface="Noto Sans"/>
-                <a:ea typeface="Noto Sans CJK JP"/>
-                <a:cs typeface="Noto Sans"/>
-              </a:rPr>
-              <a:t>以下の実例では、注釈されたlong answer全体をタグ除去・空白整形して示す。記事名と質問も添える。</a:t>
-            </a:r>
-          </a:p>
-        </p:txBody>
-      </p:sp>
-      <p:sp>
-        <p:nvSpPr>
-          <p:cNvPr id="4" name="Title 3"/>
-          <p:cNvSpPr>
-            <a:spLocks noGrp="1"/>
-          </p:cNvSpPr>
-          <p:nvPr>
-            <p:ph type="title" idx="2"/>
-          </p:nvPr>
-        </p:nvSpPr>
-        <p:spPr>
-          <a:xfrm>
-            <a:off x="75895" y="0"/>
-            <a:ext cx="8115300" cy="480060"/>
-          </a:xfrm>
-        </p:spPr>
-        <p:txBody>
-          <a:bodyPr wrap="square" lIns="0" rIns="0" tIns="0" bIns="0" anchor="ctr">
-            <a:noAutofit/>
-          </a:bodyPr>
-          <a:lstStyle/>
-          <a:p>
-            <a:pPr algn="l">
-              <a:lnSpc>
-                <a:spcPct val="110000"/>
-              </a:lnSpc>
-              <a:buNone/>
-              <a:defRPr sz="1400" b="0">
-                <a:solidFill>
-                  <a:srgbClr val="303437"/>
-                </a:solidFill>
-                <a:latin typeface="Noto Sans"/>
-              </a:defRPr>
-            </a:pPr>
-            <a:r>
-              <a:rPr sz="1400" b="1" lang="ja-JP" altLang="en-US">
-                <a:solidFill>
-                  <a:srgbClr val="FFFEF8"/>
-                </a:solidFill>
-                <a:latin typeface="Noto Sans"/>
-                <a:ea typeface="Noto Sans CJK JP"/>
-                <a:cs typeface="Noto Sans"/>
-              </a:rPr>
-              <a:t>1. 検索質問と実際の回答</a:t>
-            </a:r>
-          </a:p>
-        </p:txBody>
-      </p:sp>
-      <p:sp>
-        <p:nvSpPr>
-          <p:cNvPr id="5" name="sources"/>
-          <p:cNvSpPr txBox="1"/>
-          <p:nvPr/>
-        </p:nvSpPr>
-        <p:spPr>
-          <a:xfrm>
-            <a:off x="502920" y="4700016"/>
-            <a:ext cx="8183879" cy="530352"/>
-          </a:xfrm>
-          <a:prstGeom prst="rect">
-            <a:avLst/>
-          </a:prstGeom>
-          <a:noFill/>
-        </p:spPr>
-        <p:txBody>
-          <a:bodyPr wrap="square" lIns="0" rIns="0" tIns="0" bIns="0">
-            <a:noAutofit/>
-          </a:bodyPr>
-          <a:lstStyle/>
-          <a:p>
-            <a:pPr algn="l">
-              <a:lnSpc>
-                <a:spcPts val="940"/>
-              </a:lnSpc>
-              <a:spcBef>
-                <a:spcPts val="0"/>
-              </a:spcBef>
-              <a:spcAft>
-                <a:spcPts val="140"/>
-              </a:spcAft>
-              <a:buNone/>
-              <a:defRPr sz="810" b="0">
-                <a:solidFill>
-                  <a:srgbClr val="303437"/>
-                </a:solidFill>
-                <a:latin typeface="Noto Sans"/>
-              </a:defRPr>
-            </a:pPr>
-            <a:r>
-              <a:rPr sz="810" b="0" lang="ja-JP" altLang="en-US">
-                <a:solidFill>
-                  <a:srgbClr val="626669"/>
-                </a:solidFill>
-                <a:latin typeface="Noto Sans"/>
-                <a:ea typeface="Noto Sans CJK JP"/>
-                <a:cs typeface="Noto Sans"/>
-              </a:rPr>
-              <a:t>[1] Kwiatkowski et al. (2019), Natural Questions: A Benchmark for Question Answering Research. TACL 7:453–466.</a:t>
-            </a:r>
-            <a:r>
-              <a:rPr sz="810" b="0" lang="ja-JP" altLang="en-US">
-                <a:solidFill>
-                  <a:srgbClr val="626669"/>
-                </a:solidFill>
-                <a:latin typeface="Noto Sans"/>
-                <a:ea typeface="Noto Sans CJK JP"/>
-                <a:cs typeface="Noto Sans"/>
-              </a:rPr>
-              <a:t>  </a:t>
-            </a:r>
-            <a:r>
-              <a:rPr sz="810" b="0" lang="ja-JP" altLang="en-US">
-                <a:solidFill>
-                  <a:srgbClr val="626669"/>
-                </a:solidFill>
-                <a:latin typeface="Noto Sans"/>
-                <a:ea typeface="Noto Sans CJK JP"/>
-                <a:cs typeface="Noto Sans"/>
-                <a:hlinkClick r:id="rId2"/>
-              </a:rPr>
-              <a:t>https://aclanthology.org/Q19-1026/</a:t>
-            </a:r>
-          </a:p>
-        </p:txBody>
-      </p:sp>
-    </p:spTree>
-  </p:cSld>
-  <p:clrMapOvr>
-    <a:masterClrMapping/>
-  </p:clrMapOvr>
-</p:sld>
-</file>
-
-<file path=ppt/slides/slide60.xml><?xml version="1.0" encoding="utf-8"?>
 <p:sld xmlns:a="http://schemas.openxmlformats.org/drawingml/2006/main" xmlns:p="http://schemas.openxmlformats.org/presentationml/2006/main" xmlns:r="http://schemas.openxmlformats.org/officeDocument/2006/relationships">
   <p:cSld>
     <p:spTree>
@@ -29294,7 +28749,7 @@
 </p:sld>
 </file>
 
-<file path=ppt/slides/slide61.xml><?xml version="1.0" encoding="utf-8"?>
+<file path=ppt/slides/slide6.xml><?xml version="1.0" encoding="utf-8"?>
 <p:sld xmlns:a="http://schemas.openxmlformats.org/drawingml/2006/main" xmlns:p="http://schemas.openxmlformats.org/presentationml/2006/main" xmlns:r="http://schemas.openxmlformats.org/officeDocument/2006/relationships">
   <p:cSld>
     <p:spTree>
@@ -29347,7 +28802,7 @@
                 <a:ea typeface="Noto Sans CJK JP"/>
                 <a:cs typeface="Noto Sans"/>
               </a:rPr>
-              <a:t>人の得点は別の標本で推定した</a:t>
+              <a:t>長い回答は根拠、短い回答は答え</a:t>
             </a:r>
           </a:p>
         </p:txBody>
@@ -29400,7 +28855,7 @@
                 <a:ea typeface="Noto Sans CJK JP"/>
                 <a:cs typeface="Noto Sans"/>
               </a:rPr>
-              <a:t>25人が注釈した別標本から、1人の注釈者の得点と、人の判断から得られる上限を推定した。</a:t>
+              <a:t>long answerは、答えを導ける段落・表・リストなどの範囲。</a:t>
             </a:r>
           </a:p>
           <a:p>
@@ -29430,7 +28885,7 @@
                 <a:ea typeface="Noto Sans CJK JP"/>
                 <a:cs typeface="Noto Sans"/>
               </a:rPr>
-              <a:t>1人の注釈者はlong F1 73.4、short F1 57.5。上限の推定はそれぞれ87.2、75.7。</a:t>
+              <a:t>short answerは、その中の1つ以上の文字列、またはyes／no。長い回答だけがある例もある。</a:t>
             </a:r>
           </a:p>
           <a:p>
@@ -29460,7 +28915,7 @@
                 <a:ea typeface="Noto Sans CJK JP"/>
                 <a:cs typeface="Noto Sans"/>
               </a:rPr>
-              <a:t>通常の開発集合で全注釈者の回答をそのまま平均した得点ではない。</a:t>
+              <a:t>以下の実例では、注釈されたlong answer全体をタグ除去・空白整形して示す。記事名と質問も添える。</a:t>
             </a:r>
           </a:p>
         </p:txBody>
@@ -29508,7 +28963,7 @@
                 <a:ea typeface="Noto Sans CJK JP"/>
                 <a:cs typeface="Noto Sans"/>
               </a:rPr>
-              <a:t>Appendix: 2. 注釈と実行条件の補足</a:t>
+              <a:t>1. 検索質問と実際の回答</a:t>
             </a:r>
           </a:p>
         </p:txBody>
@@ -29598,7 +29053,311 @@
 </p:sld>
 </file>
 
-<file path=ppt/slides/slide62.xml><?xml version="1.0" encoding="utf-8"?>
+<file path=ppt/slides/slide60.xml><?xml version="1.0" encoding="utf-8"?>
+<p:sld xmlns:a="http://schemas.openxmlformats.org/drawingml/2006/main" xmlns:p="http://schemas.openxmlformats.org/presentationml/2006/main" xmlns:r="http://schemas.openxmlformats.org/officeDocument/2006/relationships">
+  <p:cSld>
+    <p:spTree>
+      <p:nvGrpSpPr>
+        <p:cNvPr id="1" name=""/>
+        <p:cNvGrpSpPr/>
+        <p:nvPr/>
+      </p:nvGrpSpPr>
+      <p:grpSpPr/>
+      <p:sp>
+        <p:nvSpPr>
+          <p:cNvPr id="2" name="Title 1"/>
+          <p:cNvSpPr>
+            <a:spLocks noGrp="1"/>
+          </p:cNvSpPr>
+          <p:nvPr>
+            <p:ph type="title"/>
+          </p:nvPr>
+        </p:nvSpPr>
+        <p:spPr>
+          <a:xfrm>
+            <a:off x="468172" y="650138"/>
+            <a:ext cx="8206740" cy="616305"/>
+          </a:xfrm>
+        </p:spPr>
+        <p:txBody>
+          <a:bodyPr wrap="square" lIns="0" rIns="0" tIns="0" bIns="0">
+            <a:noAutofit/>
+          </a:bodyPr>
+          <a:lstStyle/>
+          <a:p>
+            <a:pPr algn="l">
+              <a:lnSpc>
+                <a:spcPct val="110000"/>
+              </a:lnSpc>
+              <a:buNone/>
+              <a:defRPr sz="2800" b="0">
+                <a:solidFill>
+                  <a:srgbClr val="303437"/>
+                </a:solidFill>
+                <a:latin typeface="Noto Sans"/>
+              </a:defRPr>
+            </a:pPr>
+            <a:r>
+              <a:rPr sz="2800" b="1" lang="ja-JP" altLang="en-US">
+                <a:solidFill>
+                  <a:srgbClr val="303437"/>
+                </a:solidFill>
+                <a:latin typeface="Noto Sans"/>
+                <a:ea typeface="Noto Sans CJK JP"/>
+                <a:cs typeface="Noto Sans"/>
+              </a:rPr>
+              <a:t>人の得点は別の標本で推定した</a:t>
+            </a:r>
+          </a:p>
+        </p:txBody>
+      </p:sp>
+      <p:sp>
+        <p:nvSpPr>
+          <p:cNvPr id="3" name="Text Placeholder 2"/>
+          <p:cNvSpPr>
+            <a:spLocks noGrp="1"/>
+          </p:cNvSpPr>
+          <p:nvPr>
+            <p:ph type="body" idx="1"/>
+          </p:nvPr>
+        </p:nvSpPr>
+        <p:spPr>
+          <a:xfrm>
+            <a:off x="594360" y="1463040"/>
+            <a:ext cx="7955279" cy="3044952"/>
+          </a:xfrm>
+        </p:spPr>
+        <p:txBody>
+          <a:bodyPr wrap="square" tIns="91440" bIns="91440">
+            <a:noAutofit/>
+          </a:bodyPr>
+          <a:lstStyle/>
+          <a:p>
+            <a:pPr marL="457200" indent="-355600">
+              <a:lnSpc>
+                <a:spcPts val="2618"/>
+              </a:lnSpc>
+              <a:spcAft>
+                <a:spcPts val="700"/>
+              </a:spcAft>
+              <a:buSzPct val="60455"/>
+              <a:buFont typeface="Noto Sans CJK JP"/>
+              <a:buChar char="●"/>
+              <a:defRPr sz="2200" b="0">
+                <a:solidFill>
+                  <a:srgbClr val="303437"/>
+                </a:solidFill>
+                <a:latin typeface="Noto Sans"/>
+              </a:defRPr>
+            </a:pPr>
+            <a:r>
+              <a:rPr sz="2200" b="0" lang="ja-JP" altLang="en-US">
+                <a:solidFill>
+                  <a:srgbClr val="303437"/>
+                </a:solidFill>
+                <a:latin typeface="Noto Sans"/>
+                <a:ea typeface="Noto Sans CJK JP"/>
+                <a:cs typeface="Noto Sans"/>
+              </a:rPr>
+              <a:t>25人が注釈した別標本から、1人の注釈者の得点と、人の判断から得られる上限を推定した。</a:t>
+            </a:r>
+          </a:p>
+          <a:p>
+            <a:pPr marL="457200" indent="-355600">
+              <a:lnSpc>
+                <a:spcPts val="2618"/>
+              </a:lnSpc>
+              <a:spcAft>
+                <a:spcPts val="700"/>
+              </a:spcAft>
+              <a:buSzPct val="60455"/>
+              <a:buFont typeface="Noto Sans CJK JP"/>
+              <a:buChar char="●"/>
+              <a:defRPr sz="2200" b="0">
+                <a:solidFill>
+                  <a:srgbClr val="303437"/>
+                </a:solidFill>
+                <a:latin typeface="Noto Sans"/>
+              </a:defRPr>
+            </a:pPr>
+            <a:r>
+              <a:rPr sz="2200" b="0" lang="ja-JP" altLang="en-US">
+                <a:solidFill>
+                  <a:srgbClr val="303437"/>
+                </a:solidFill>
+                <a:latin typeface="Noto Sans"/>
+                <a:ea typeface="Noto Sans CJK JP"/>
+                <a:cs typeface="Noto Sans"/>
+              </a:rPr>
+              <a:t>1人の注釈者はlong F1 73.4、short F1 57.5。上限の推定はそれぞれ87.2、75.7。</a:t>
+            </a:r>
+          </a:p>
+          <a:p>
+            <a:pPr marL="457200" indent="-355600">
+              <a:lnSpc>
+                <a:spcPts val="2618"/>
+              </a:lnSpc>
+              <a:spcAft>
+                <a:spcPts val="0"/>
+              </a:spcAft>
+              <a:buSzPct val="60455"/>
+              <a:buFont typeface="Noto Sans CJK JP"/>
+              <a:buChar char="●"/>
+              <a:defRPr sz="2200" b="0">
+                <a:solidFill>
+                  <a:srgbClr val="303437"/>
+                </a:solidFill>
+                <a:latin typeface="Noto Sans"/>
+              </a:defRPr>
+            </a:pPr>
+            <a:r>
+              <a:rPr sz="2200" b="0" lang="ja-JP" altLang="en-US">
+                <a:solidFill>
+                  <a:srgbClr val="303437"/>
+                </a:solidFill>
+                <a:latin typeface="Noto Sans"/>
+                <a:ea typeface="Noto Sans CJK JP"/>
+                <a:cs typeface="Noto Sans"/>
+              </a:rPr>
+              <a:t>通常の開発集合で全注釈者の回答をそのまま平均した得点ではない。</a:t>
+            </a:r>
+          </a:p>
+        </p:txBody>
+      </p:sp>
+      <p:sp>
+        <p:nvSpPr>
+          <p:cNvPr id="4" name="Title 3"/>
+          <p:cNvSpPr>
+            <a:spLocks noGrp="1"/>
+          </p:cNvSpPr>
+          <p:nvPr>
+            <p:ph type="title" idx="2"/>
+          </p:nvPr>
+        </p:nvSpPr>
+        <p:spPr>
+          <a:xfrm>
+            <a:off x="75895" y="0"/>
+            <a:ext cx="8115300" cy="480060"/>
+          </a:xfrm>
+        </p:spPr>
+        <p:txBody>
+          <a:bodyPr wrap="square" lIns="0" rIns="0" tIns="0" bIns="0" anchor="ctr">
+            <a:noAutofit/>
+          </a:bodyPr>
+          <a:lstStyle/>
+          <a:p>
+            <a:pPr algn="l">
+              <a:lnSpc>
+                <a:spcPct val="110000"/>
+              </a:lnSpc>
+              <a:buNone/>
+              <a:defRPr sz="1400" b="0">
+                <a:solidFill>
+                  <a:srgbClr val="303437"/>
+                </a:solidFill>
+                <a:latin typeface="Noto Sans"/>
+              </a:defRPr>
+            </a:pPr>
+            <a:r>
+              <a:rPr sz="1400" b="1" lang="ja-JP" altLang="en-US">
+                <a:solidFill>
+                  <a:srgbClr val="FFFEF8"/>
+                </a:solidFill>
+                <a:latin typeface="Noto Sans"/>
+                <a:ea typeface="Noto Sans CJK JP"/>
+                <a:cs typeface="Noto Sans"/>
+              </a:rPr>
+              <a:t>Appendix: 2. 注釈と実行条件の補足</a:t>
+            </a:r>
+          </a:p>
+        </p:txBody>
+      </p:sp>
+      <p:sp>
+        <p:nvSpPr>
+          <p:cNvPr id="5" name="sources"/>
+          <p:cNvSpPr txBox="1"/>
+          <p:nvPr/>
+        </p:nvSpPr>
+        <p:spPr>
+          <a:xfrm>
+            <a:off x="502920" y="4700016"/>
+            <a:ext cx="8183879" cy="530352"/>
+          </a:xfrm>
+          <a:prstGeom prst="rect">
+            <a:avLst/>
+          </a:prstGeom>
+          <a:noFill/>
+        </p:spPr>
+        <p:txBody>
+          <a:bodyPr wrap="square" lIns="0" rIns="0" tIns="0" bIns="0">
+            <a:noAutofit/>
+          </a:bodyPr>
+          <a:lstStyle/>
+          <a:p>
+            <a:pPr algn="l">
+              <a:lnSpc>
+                <a:spcPts val="940"/>
+              </a:lnSpc>
+              <a:spcBef>
+                <a:spcPts val="0"/>
+              </a:spcBef>
+              <a:spcAft>
+                <a:spcPts val="140"/>
+              </a:spcAft>
+              <a:buNone/>
+              <a:defRPr sz="810" b="0">
+                <a:solidFill>
+                  <a:srgbClr val="303437"/>
+                </a:solidFill>
+                <a:latin typeface="Noto Sans"/>
+              </a:defRPr>
+            </a:pPr>
+            <a:r>
+              <a:rPr sz="810" b="0" lang="ja-JP" altLang="en-US">
+                <a:solidFill>
+                  <a:srgbClr val="626669"/>
+                </a:solidFill>
+                <a:latin typeface="Noto Sans"/>
+                <a:ea typeface="Noto Sans CJK JP"/>
+                <a:cs typeface="Noto Sans"/>
+              </a:rPr>
+              <a:t>[1] Kwiatkowski et al. (2019), Natural Questions: A Benchmark for Question Answering Research. TACL 7:453–466.</a:t>
+            </a:r>
+            <a:r>
+              <a:rPr sz="810" b="0" lang="ja-JP" altLang="en-US">
+                <a:solidFill>
+                  <a:srgbClr val="626669"/>
+                </a:solidFill>
+                <a:latin typeface="Noto Sans"/>
+                <a:ea typeface="Noto Sans CJK JP"/>
+                <a:cs typeface="Noto Sans"/>
+              </a:rPr>
+              <a:t>  </a:t>
+            </a:r>
+            <a:r>
+              <a:rPr sz="810" b="0" lang="ja-JP" altLang="en-US">
+                <a:solidFill>
+                  <a:srgbClr val="626669"/>
+                </a:solidFill>
+                <a:latin typeface="Noto Sans"/>
+                <a:ea typeface="Noto Sans CJK JP"/>
+                <a:cs typeface="Noto Sans"/>
+                <a:hlinkClick r:id="rId2"/>
+              </a:rPr>
+              <a:t>https://aclanthology.org/Q19-1026/</a:t>
+            </a:r>
+          </a:p>
+        </p:txBody>
+      </p:sp>
+    </p:spTree>
+  </p:cSld>
+  <p:clrMapOvr>
+    <a:masterClrMapping/>
+  </p:clrMapOvr>
+</p:sld>
+</file>
+
+<file path=ppt/slides/slide61.xml><?xml version="1.0" encoding="utf-8"?>
 <p:sld xmlns:a="http://schemas.openxmlformats.org/drawingml/2006/main" xmlns:p="http://schemas.openxmlformats.org/presentationml/2006/main" xmlns:r="http://schemas.openxmlformats.org/officeDocument/2006/relationships">
   <p:cSld>
     <p:spTree>
@@ -30515,7 +30274,7 @@
 </p:sld>
 </file>
 
-<file path=ppt/slides/slide63.xml><?xml version="1.0" encoding="utf-8"?>
+<file path=ppt/slides/slide62.xml><?xml version="1.0" encoding="utf-8"?>
 <p:sld xmlns:a="http://schemas.openxmlformats.org/drawingml/2006/main" xmlns:p="http://schemas.openxmlformats.org/presentationml/2006/main" xmlns:r="http://schemas.openxmlformats.org/officeDocument/2006/relationships">
   <p:cSld>
     <p:spTree>
@@ -31339,7 +31098,7 @@
                 <a:ea typeface="Noto Sans CJK JP"/>
                 <a:cs typeface="Noto Sans"/>
               </a:rPr>
-              <a:t>最大5例、temperature 0、最大出力100トークン。切り詰め率はprompt_truncatedの平均。</a:t>
+              <a:t>最大5例、temperature 0、最大出力300トークン。切り詰め率はprompt_truncatedの平均。</a:t>
             </a:r>
           </a:p>
         </p:txBody>
@@ -31420,6 +31179,310 @@
                 <a:hlinkClick r:id="rId2"/>
               </a:rPr>
               <a:t>https://crfm.stanford.edu/helm/classic/v0.4.0/#/groups/natural_qa_openbook_longans</a:t>
+            </a:r>
+          </a:p>
+        </p:txBody>
+      </p:sp>
+    </p:spTree>
+  </p:cSld>
+  <p:clrMapOvr>
+    <a:masterClrMapping/>
+  </p:clrMapOvr>
+</p:sld>
+</file>
+
+<file path=ppt/slides/slide63.xml><?xml version="1.0" encoding="utf-8"?>
+<p:sld xmlns:a="http://schemas.openxmlformats.org/drawingml/2006/main" xmlns:p="http://schemas.openxmlformats.org/presentationml/2006/main" xmlns:r="http://schemas.openxmlformats.org/officeDocument/2006/relationships">
+  <p:cSld>
+    <p:spTree>
+      <p:nvGrpSpPr>
+        <p:cNvPr id="1" name=""/>
+        <p:cNvGrpSpPr/>
+        <p:nvPr/>
+      </p:nvGrpSpPr>
+      <p:grpSpPr/>
+      <p:sp>
+        <p:nvSpPr>
+          <p:cNvPr id="2" name="Title 1"/>
+          <p:cNvSpPr>
+            <a:spLocks noGrp="1"/>
+          </p:cNvSpPr>
+          <p:nvPr>
+            <p:ph type="title"/>
+          </p:nvPr>
+        </p:nvSpPr>
+        <p:spPr>
+          <a:xfrm>
+            <a:off x="468172" y="650138"/>
+            <a:ext cx="8206740" cy="616305"/>
+          </a:xfrm>
+        </p:spPr>
+        <p:txBody>
+          <a:bodyPr wrap="square" lIns="0" rIns="0" tIns="0" bIns="0">
+            <a:noAutofit/>
+          </a:bodyPr>
+          <a:lstStyle/>
+          <a:p>
+            <a:pPr algn="l">
+              <a:lnSpc>
+                <a:spcPct val="110000"/>
+              </a:lnSpc>
+              <a:buNone/>
+              <a:defRPr sz="2800" b="0">
+                <a:solidFill>
+                  <a:srgbClr val="303437"/>
+                </a:solidFill>
+                <a:latin typeface="Noto Sans"/>
+              </a:defRPr>
+            </a:pPr>
+            <a:r>
+              <a:rPr sz="2800" b="1" lang="ja-JP" altLang="en-US">
+                <a:solidFill>
+                  <a:srgbClr val="303437"/>
+                </a:solidFill>
+                <a:latin typeface="Noto Sans"/>
+                <a:ea typeface="Noto Sans CJK JP"/>
+                <a:cs typeface="Noto Sans"/>
+              </a:rPr>
+              <a:t>取得データと公開実行記録を照合した</a:t>
+            </a:r>
+          </a:p>
+        </p:txBody>
+      </p:sp>
+      <p:sp>
+        <p:nvSpPr>
+          <p:cNvPr id="3" name="Text Placeholder 2"/>
+          <p:cNvSpPr>
+            <a:spLocks noGrp="1"/>
+          </p:cNvSpPr>
+          <p:nvPr>
+            <p:ph type="body" idx="1"/>
+          </p:nvPr>
+        </p:nvSpPr>
+        <p:spPr>
+          <a:xfrm>
+            <a:off x="594360" y="1463040"/>
+            <a:ext cx="7955279" cy="3044952"/>
+          </a:xfrm>
+        </p:spPr>
+        <p:txBody>
+          <a:bodyPr wrap="square" tIns="91440" bIns="91440">
+            <a:noAutofit/>
+          </a:bodyPr>
+          <a:lstStyle/>
+          <a:p>
+            <a:pPr marL="457200" indent="-355600">
+              <a:lnSpc>
+                <a:spcPts val="2618"/>
+              </a:lnSpc>
+              <a:spcAft>
+                <a:spcPts val="700"/>
+              </a:spcAft>
+              <a:buSzPct val="60455"/>
+              <a:buFont typeface="Noto Sans CJK JP"/>
+              <a:buChar char="●"/>
+              <a:defRPr sz="2200" b="0">
+                <a:solidFill>
+                  <a:srgbClr val="303437"/>
+                </a:solidFill>
+                <a:latin typeface="Noto Sans"/>
+              </a:defRPr>
+            </a:pPr>
+            <a:r>
+              <a:rPr sz="2200" b="0" lang="ja-JP" altLang="en-US">
+                <a:solidFill>
+                  <a:srgbClr val="303437"/>
+                </a:solidFill>
+                <a:latin typeface="Noto Sans"/>
+                <a:ea typeface="Noto Sans CJK JP"/>
+                <a:cs typeface="Noto Sans"/>
+              </a:rPr>
+              <a:t>旧GCSのdev URLは匿名アクセスで403になったため、公開Hugging Face配布を取得した。</a:t>
+            </a:r>
+          </a:p>
+          <a:p>
+            <a:pPr marL="457200" indent="-355600">
+              <a:lnSpc>
+                <a:spcPts val="2618"/>
+              </a:lnSpc>
+              <a:spcAft>
+                <a:spcPts val="700"/>
+              </a:spcAft>
+              <a:buSzPct val="60455"/>
+              <a:buFont typeface="Noto Sans CJK JP"/>
+              <a:buChar char="●"/>
+              <a:defRPr sz="2200" b="0">
+                <a:solidFill>
+                  <a:srgbClr val="303437"/>
+                </a:solidFill>
+                <a:latin typeface="Noto Sans"/>
+              </a:defRPr>
+            </a:pPr>
+            <a:r>
+              <a:rPr sz="2200" b="0" lang="ja-JP" altLang="en-US">
+                <a:solidFill>
+                  <a:srgbClr val="303437"/>
+                </a:solidFill>
+                <a:latin typeface="Noto Sans"/>
+                <a:ea typeface="Noto Sans CJK JP"/>
+                <a:cs typeface="Noto Sans"/>
+              </a:rPr>
+              <a:t>HELMの公開scenario_stateから、摂動なし・第1試行の1,000例を取り出した。</a:t>
+            </a:r>
+          </a:p>
+          <a:p>
+            <a:pPr marL="457200" indent="-355600">
+              <a:lnSpc>
+                <a:spcPts val="2618"/>
+              </a:lnSpc>
+              <a:spcAft>
+                <a:spcPts val="0"/>
+              </a:spcAft>
+              <a:buSzPct val="60455"/>
+              <a:buFont typeface="Noto Sans CJK JP"/>
+              <a:buChar char="●"/>
+              <a:defRPr sz="2200" b="0">
+                <a:solidFill>
+                  <a:srgbClr val="303437"/>
+                </a:solidFill>
+                <a:latin typeface="Noto Sans"/>
+              </a:defRPr>
+            </a:pPr>
+            <a:r>
+              <a:rPr sz="2200" b="0" lang="ja-JP" altLang="en-US">
+                <a:solidFill>
+                  <a:srgbClr val="303437"/>
+                </a:solidFill>
+                <a:latin typeface="Noto Sans"/>
+                <a:ea typeface="Noto Sans CJK JP"/>
+                <a:cs typeface="Noto Sans"/>
+              </a:rPr>
+              <a:t>取得した開発集合と質問・参照回答を照合し、1,000例すべてで一致を確認した。</a:t>
+            </a:r>
+          </a:p>
+        </p:txBody>
+      </p:sp>
+      <p:sp>
+        <p:nvSpPr>
+          <p:cNvPr id="4" name="Title 3"/>
+          <p:cNvSpPr>
+            <a:spLocks noGrp="1"/>
+          </p:cNvSpPr>
+          <p:nvPr>
+            <p:ph type="title" idx="2"/>
+          </p:nvPr>
+        </p:nvSpPr>
+        <p:spPr>
+          <a:xfrm>
+            <a:off x="75895" y="0"/>
+            <a:ext cx="8115300" cy="480060"/>
+          </a:xfrm>
+        </p:spPr>
+        <p:txBody>
+          <a:bodyPr wrap="square" lIns="0" rIns="0" tIns="0" bIns="0" anchor="ctr">
+            <a:noAutofit/>
+          </a:bodyPr>
+          <a:lstStyle/>
+          <a:p>
+            <a:pPr algn="l">
+              <a:lnSpc>
+                <a:spcPct val="110000"/>
+              </a:lnSpc>
+              <a:buNone/>
+              <a:defRPr sz="1400" b="0">
+                <a:solidFill>
+                  <a:srgbClr val="303437"/>
+                </a:solidFill>
+                <a:latin typeface="Noto Sans"/>
+              </a:defRPr>
+            </a:pPr>
+            <a:r>
+              <a:rPr sz="1400" b="1" lang="ja-JP" altLang="en-US">
+                <a:solidFill>
+                  <a:srgbClr val="FFFEF8"/>
+                </a:solidFill>
+                <a:latin typeface="Noto Sans"/>
+                <a:ea typeface="Noto Sans CJK JP"/>
+                <a:cs typeface="Noto Sans"/>
+              </a:rPr>
+              <a:t>Appendix: 2. 注釈と実行条件の補足</a:t>
+            </a:r>
+          </a:p>
+        </p:txBody>
+      </p:sp>
+      <p:sp>
+        <p:nvSpPr>
+          <p:cNvPr id="5" name="sources"/>
+          <p:cNvSpPr txBox="1"/>
+          <p:nvPr/>
+        </p:nvSpPr>
+        <p:spPr>
+          <a:xfrm>
+            <a:off x="502920" y="4700016"/>
+            <a:ext cx="8183879" cy="530352"/>
+          </a:xfrm>
+          <a:prstGeom prst="rect">
+            <a:avLst/>
+          </a:prstGeom>
+          <a:noFill/>
+        </p:spPr>
+        <p:txBody>
+          <a:bodyPr wrap="square" lIns="0" rIns="0" tIns="0" bIns="0">
+            <a:noAutofit/>
+          </a:bodyPr>
+          <a:lstStyle/>
+          <a:p>
+            <a:pPr algn="l">
+              <a:lnSpc>
+                <a:spcPts val="940"/>
+              </a:lnSpc>
+              <a:spcBef>
+                <a:spcPts val="0"/>
+              </a:spcBef>
+              <a:spcAft>
+                <a:spcPts val="140"/>
+              </a:spcAft>
+              <a:buNone/>
+              <a:defRPr sz="810" b="0">
+                <a:solidFill>
+                  <a:srgbClr val="303437"/>
+                </a:solidFill>
+                <a:latin typeface="Noto Sans"/>
+              </a:defRPr>
+            </a:pPr>
+            <a:r>
+              <a:rPr sz="810" b="0" lang="ja-JP" altLang="en-US">
+                <a:solidFill>
+                  <a:srgbClr val="626669"/>
+                </a:solidFill>
+                <a:latin typeface="Noto Sans"/>
+                <a:ea typeface="Noto Sans CJK JP"/>
+                <a:cs typeface="Noto Sans"/>
+              </a:rPr>
+              <a:t>[1] Google Research, Natural Questions. dev / Hugging Face公開配布。</a:t>
+            </a:r>
+            <a:r>
+              <a:rPr sz="810" b="0" lang="ja-JP" altLang="en-US">
+                <a:solidFill>
+                  <a:srgbClr val="626669"/>
+                </a:solidFill>
+                <a:latin typeface="Noto Sans"/>
+                <a:ea typeface="Noto Sans CJK JP"/>
+                <a:cs typeface="Noto Sans"/>
+              </a:rPr>
+              <a:t>  </a:t>
+            </a:r>
+            <a:r>
+              <a:rPr sz="810" b="0" lang="ja-JP" altLang="en-US">
+                <a:solidFill>
+                  <a:srgbClr val="626669"/>
+                </a:solidFill>
+                <a:latin typeface="Noto Sans"/>
+                <a:ea typeface="Noto Sans CJK JP"/>
+                <a:cs typeface="Noto Sans"/>
+                <a:hlinkClick r:id="rId2"/>
+              </a:rPr>
+              <a:t>https://huggingface.co/datasets/google-research-datasets/natural_questions</a:t>
             </a:r>
           </a:p>
         </p:txBody>
@@ -31454,158 +31517,45 @@
         </p:nvSpPr>
         <p:spPr>
           <a:xfrm>
-            <a:off x="468172" y="650138"/>
-            <a:ext cx="8206740" cy="616305"/>
-          </a:xfrm>
-        </p:spPr>
-        <p:txBody>
-          <a:bodyPr wrap="square" lIns="0" rIns="0" tIns="0" bIns="0">
+            <a:off x="548640" y="2506875"/>
+            <a:ext cx="8046720" cy="585216"/>
+          </a:xfrm>
+        </p:spPr>
+        <p:txBody>
+          <a:bodyPr wrap="square" lIns="0" rIns="0" tIns="0" bIns="0" anchor="ctr">
             <a:noAutofit/>
           </a:bodyPr>
           <a:lstStyle/>
           <a:p>
-            <a:pPr algn="l">
+            <a:pPr algn="ctr">
               <a:lnSpc>
                 <a:spcPct val="110000"/>
               </a:lnSpc>
               <a:buNone/>
-              <a:defRPr sz="2800" b="0">
-                <a:solidFill>
-                  <a:srgbClr val="303437"/>
-                </a:solidFill>
-                <a:latin typeface="Noto Sans"/>
-              </a:defRPr>
-            </a:pPr>
-            <a:r>
-              <a:rPr sz="2800" b="1" lang="ja-JP" altLang="en-US">
-                <a:solidFill>
-                  <a:srgbClr val="303437"/>
-                </a:solidFill>
-                <a:latin typeface="Noto Sans"/>
-                <a:ea typeface="Noto Sans CJK JP"/>
-                <a:cs typeface="Noto Sans"/>
-              </a:rPr>
-              <a:t>取得データと公開実行記録を照合した</a:t>
-            </a:r>
-          </a:p>
-        </p:txBody>
-      </p:sp>
-      <p:sp>
-        <p:nvSpPr>
-          <p:cNvPr id="3" name="Text Placeholder 2"/>
-          <p:cNvSpPr>
-            <a:spLocks noGrp="1"/>
-          </p:cNvSpPr>
-          <p:nvPr>
-            <p:ph type="body" idx="1"/>
-          </p:nvPr>
-        </p:nvSpPr>
-        <p:spPr>
-          <a:xfrm>
-            <a:off x="594360" y="1463040"/>
-            <a:ext cx="7955279" cy="3044952"/>
-          </a:xfrm>
-        </p:spPr>
-        <p:txBody>
-          <a:bodyPr wrap="square" tIns="91440" bIns="91440">
-            <a:noAutofit/>
-          </a:bodyPr>
-          <a:lstStyle/>
-          <a:p>
-            <a:pPr marL="457200" indent="-355600">
-              <a:lnSpc>
-                <a:spcPts val="2618"/>
-              </a:lnSpc>
-              <a:spcAft>
-                <a:spcPts val="700"/>
-              </a:spcAft>
-              <a:buSzPct val="60455"/>
-              <a:buFont typeface="Noto Sans CJK JP"/>
-              <a:buChar char="●"/>
-              <a:defRPr sz="2200" b="0">
-                <a:solidFill>
-                  <a:srgbClr val="303437"/>
-                </a:solidFill>
-                <a:latin typeface="Noto Sans"/>
-              </a:defRPr>
-            </a:pPr>
-            <a:r>
-              <a:rPr sz="2200" b="0" lang="ja-JP" altLang="en-US">
-                <a:solidFill>
-                  <a:srgbClr val="303437"/>
-                </a:solidFill>
-                <a:latin typeface="Noto Sans"/>
-                <a:ea typeface="Noto Sans CJK JP"/>
-                <a:cs typeface="Noto Sans"/>
-              </a:rPr>
-              <a:t>旧GCSのdev URLは匿名アクセスで403になったため、公開Hugging Face配布を取得した。</a:t>
-            </a:r>
-          </a:p>
-          <a:p>
-            <a:pPr marL="457200" indent="-355600">
-              <a:lnSpc>
-                <a:spcPts val="2618"/>
-              </a:lnSpc>
-              <a:spcAft>
-                <a:spcPts val="700"/>
-              </a:spcAft>
-              <a:buSzPct val="60455"/>
-              <a:buFont typeface="Noto Sans CJK JP"/>
-              <a:buChar char="●"/>
-              <a:defRPr sz="2200" b="0">
-                <a:solidFill>
-                  <a:srgbClr val="303437"/>
-                </a:solidFill>
-                <a:latin typeface="Noto Sans"/>
-              </a:defRPr>
-            </a:pPr>
-            <a:r>
-              <a:rPr sz="2200" b="0" lang="ja-JP" altLang="en-US">
-                <a:solidFill>
-                  <a:srgbClr val="303437"/>
-                </a:solidFill>
-                <a:latin typeface="Noto Sans"/>
-                <a:ea typeface="Noto Sans CJK JP"/>
-                <a:cs typeface="Noto Sans"/>
-              </a:rPr>
-              <a:t>HELMの公開scenario_stateから、摂動なし・第1試行の1,000例を取り出した。</a:t>
-            </a:r>
-          </a:p>
-          <a:p>
-            <a:pPr marL="457200" indent="-355600">
-              <a:lnSpc>
-                <a:spcPts val="2618"/>
-              </a:lnSpc>
-              <a:spcAft>
-                <a:spcPts val="0"/>
-              </a:spcAft>
-              <a:buSzPct val="60455"/>
-              <a:buFont typeface="Noto Sans CJK JP"/>
-              <a:buChar char="●"/>
-              <a:defRPr sz="2200" b="0">
-                <a:solidFill>
-                  <a:srgbClr val="303437"/>
-                </a:solidFill>
-                <a:latin typeface="Noto Sans"/>
-              </a:defRPr>
-            </a:pPr>
-            <a:r>
-              <a:rPr sz="2200" b="0" lang="ja-JP" altLang="en-US">
-                <a:solidFill>
-                  <a:srgbClr val="303437"/>
-                </a:solidFill>
-                <a:latin typeface="Noto Sans"/>
-                <a:ea typeface="Noto Sans CJK JP"/>
-                <a:cs typeface="Noto Sans"/>
-              </a:rPr>
-              <a:t>取得した開発集合と質問・参照回答を照合し、1,000例すべてで一致を確認した。</a:t>
-            </a:r>
-          </a:p>
-        </p:txBody>
-      </p:sp>
-      <p:sp>
-        <p:nvSpPr>
-          <p:cNvPr id="4" name="Title 3"/>
+              <a:defRPr sz="3600" b="0">
+                <a:solidFill>
+                  <a:srgbClr val="303437"/>
+                </a:solidFill>
+                <a:latin typeface="Noto Sans"/>
+              </a:defRPr>
+            </a:pPr>
+            <a:r>
+              <a:rPr sz="3600" b="1" lang="ja-JP" altLang="en-US">
+                <a:solidFill>
+                  <a:srgbClr val="303437"/>
+                </a:solidFill>
+                <a:latin typeface="Noto Sans"/>
+                <a:ea typeface="Noto Sans CJK JP"/>
+                <a:cs typeface="Noto Sans"/>
+              </a:rPr>
+              <a:t>研究と参考文献</a:t>
+            </a:r>
+          </a:p>
+        </p:txBody>
+      </p:sp>
+      <p:sp>
+        <p:nvSpPr>
+          <p:cNvPr id="3" name="Title 2"/>
           <p:cNvSpPr>
             <a:spLocks noGrp="1"/>
           </p:cNvSpPr>
@@ -31646,84 +31596,7 @@
                 <a:ea typeface="Noto Sans CJK JP"/>
                 <a:cs typeface="Noto Sans"/>
               </a:rPr>
-              <a:t>Appendix: 2. 注釈と実行条件の補足</a:t>
-            </a:r>
-          </a:p>
-        </p:txBody>
-      </p:sp>
-      <p:sp>
-        <p:nvSpPr>
-          <p:cNvPr id="5" name="sources"/>
-          <p:cNvSpPr txBox="1"/>
-          <p:nvPr/>
-        </p:nvSpPr>
-        <p:spPr>
-          <a:xfrm>
-            <a:off x="502920" y="4700016"/>
-            <a:ext cx="8183879" cy="530352"/>
-          </a:xfrm>
-          <a:prstGeom prst="rect">
-            <a:avLst/>
-          </a:prstGeom>
-          <a:noFill/>
-        </p:spPr>
-        <p:txBody>
-          <a:bodyPr wrap="square" lIns="0" rIns="0" tIns="0" bIns="0">
-            <a:noAutofit/>
-          </a:bodyPr>
-          <a:lstStyle/>
-          <a:p>
-            <a:pPr algn="l">
-              <a:lnSpc>
-                <a:spcPts val="940"/>
-              </a:lnSpc>
-              <a:spcBef>
-                <a:spcPts val="0"/>
-              </a:spcBef>
-              <a:spcAft>
-                <a:spcPts val="140"/>
-              </a:spcAft>
-              <a:buNone/>
-              <a:defRPr sz="810" b="0">
-                <a:solidFill>
-                  <a:srgbClr val="303437"/>
-                </a:solidFill>
-                <a:latin typeface="Noto Sans"/>
-              </a:defRPr>
-            </a:pPr>
-            <a:r>
-              <a:rPr sz="810" b="0" lang="ja-JP" altLang="en-US">
-                <a:solidFill>
-                  <a:srgbClr val="626669"/>
-                </a:solidFill>
-                <a:latin typeface="Noto Sans"/>
-                <a:ea typeface="Noto Sans CJK JP"/>
-                <a:cs typeface="Noto Sans"/>
-              </a:rPr>
-              <a:t>[1] Google Research, Natural Questions. dev / Hugging Face公開配布。</a:t>
-            </a:r>
-            <a:r>
-              <a:rPr sz="810" b="0" lang="ja-JP" altLang="en-US">
-                <a:solidFill>
-                  <a:srgbClr val="626669"/>
-                </a:solidFill>
-                <a:latin typeface="Noto Sans"/>
-                <a:ea typeface="Noto Sans CJK JP"/>
-                <a:cs typeface="Noto Sans"/>
-              </a:rPr>
-              <a:t>  </a:t>
-            </a:r>
-            <a:r>
-              <a:rPr sz="810" b="0" lang="ja-JP" altLang="en-US">
-                <a:solidFill>
-                  <a:srgbClr val="626669"/>
-                </a:solidFill>
-                <a:latin typeface="Noto Sans"/>
-                <a:ea typeface="Noto Sans CJK JP"/>
-                <a:cs typeface="Noto Sans"/>
-                <a:hlinkClick r:id="rId2"/>
-              </a:rPr>
-              <a:t>https://huggingface.co/datasets/google-research-datasets/natural_questions</a:t>
+              <a:t>Appendix: 3. 研究と参考文献</a:t>
             </a:r>
           </a:p>
         </p:txBody>
@@ -31758,45 +31631,158 @@
         </p:nvSpPr>
         <p:spPr>
           <a:xfrm>
-            <a:off x="548640" y="2506875"/>
-            <a:ext cx="8046720" cy="585216"/>
-          </a:xfrm>
-        </p:spPr>
-        <p:txBody>
-          <a:bodyPr wrap="square" lIns="0" rIns="0" tIns="0" bIns="0" anchor="ctr">
+            <a:off x="468172" y="650138"/>
+            <a:ext cx="8206740" cy="616305"/>
+          </a:xfrm>
+        </p:spPr>
+        <p:txBody>
+          <a:bodyPr wrap="square" lIns="0" rIns="0" tIns="0" bIns="0">
             <a:noAutofit/>
           </a:bodyPr>
           <a:lstStyle/>
           <a:p>
-            <a:pPr algn="ctr">
+            <a:pPr algn="l">
               <a:lnSpc>
                 <a:spcPct val="110000"/>
               </a:lnSpc>
               <a:buNone/>
-              <a:defRPr sz="3600" b="0">
-                <a:solidFill>
-                  <a:srgbClr val="303437"/>
-                </a:solidFill>
-                <a:latin typeface="Noto Sans"/>
-              </a:defRPr>
-            </a:pPr>
-            <a:r>
-              <a:rPr sz="3600" b="1" lang="ja-JP" altLang="en-US">
-                <a:solidFill>
-                  <a:srgbClr val="303437"/>
-                </a:solidFill>
-                <a:latin typeface="Noto Sans"/>
-                <a:ea typeface="Noto Sans CJK JP"/>
-                <a:cs typeface="Noto Sans"/>
-              </a:rPr>
-              <a:t>研究と参考文献</a:t>
-            </a:r>
-          </a:p>
-        </p:txBody>
-      </p:sp>
-      <p:sp>
-        <p:nvSpPr>
-          <p:cNvPr id="3" name="Title 2"/>
+              <a:defRPr sz="2800" b="0">
+                <a:solidFill>
+                  <a:srgbClr val="303437"/>
+                </a:solidFill>
+                <a:latin typeface="Noto Sans"/>
+              </a:defRPr>
+            </a:pPr>
+            <a:r>
+              <a:rPr sz="2800" b="1" lang="ja-JP" altLang="en-US">
+                <a:solidFill>
+                  <a:srgbClr val="303437"/>
+                </a:solidFill>
+                <a:latin typeface="Noto Sans"/>
+                <a:ea typeface="Noto Sans CJK JP"/>
+                <a:cs typeface="Noto Sans"/>
+              </a:rPr>
+              <a:t>Google Researchによる検索質問の課題</a:t>
+            </a:r>
+          </a:p>
+        </p:txBody>
+      </p:sp>
+      <p:sp>
+        <p:nvSpPr>
+          <p:cNvPr id="3" name="Text Placeholder 2"/>
+          <p:cNvSpPr>
+            <a:spLocks noGrp="1"/>
+          </p:cNvSpPr>
+          <p:nvPr>
+            <p:ph type="body" idx="1"/>
+          </p:nvPr>
+        </p:nvSpPr>
+        <p:spPr>
+          <a:xfrm>
+            <a:off x="594360" y="1463040"/>
+            <a:ext cx="7955279" cy="3044952"/>
+          </a:xfrm>
+        </p:spPr>
+        <p:txBody>
+          <a:bodyPr wrap="square" tIns="91440" bIns="91440">
+            <a:noAutofit/>
+          </a:bodyPr>
+          <a:lstStyle/>
+          <a:p>
+            <a:pPr marL="457200" indent="-355600">
+              <a:lnSpc>
+                <a:spcPts val="2618"/>
+              </a:lnSpc>
+              <a:spcAft>
+                <a:spcPts val="700"/>
+              </a:spcAft>
+              <a:buSzPct val="60455"/>
+              <a:buFont typeface="Noto Sans CJK JP"/>
+              <a:buChar char="●"/>
+              <a:defRPr sz="2200" b="0">
+                <a:solidFill>
+                  <a:srgbClr val="303437"/>
+                </a:solidFill>
+                <a:latin typeface="Noto Sans"/>
+              </a:defRPr>
+            </a:pPr>
+            <a:r>
+              <a:rPr sz="2200" b="0" lang="ja-JP" altLang="en-US">
+                <a:solidFill>
+                  <a:srgbClr val="303437"/>
+                </a:solidFill>
+                <a:latin typeface="Noto Sans"/>
+                <a:ea typeface="Noto Sans CJK JP"/>
+                <a:cs typeface="Noto Sans"/>
+              </a:rPr>
+              <a:t>第一著者はTom Kwiatkowski、最終著者はSlav Petrov。Google Researchのチームが構築した。</a:t>
+            </a:r>
+          </a:p>
+          <a:p>
+            <a:pPr marL="457200" indent="-355600">
+              <a:lnSpc>
+                <a:spcPts val="2618"/>
+              </a:lnSpc>
+              <a:spcAft>
+                <a:spcPts val="700"/>
+              </a:spcAft>
+              <a:buSzPct val="60455"/>
+              <a:buFont typeface="Noto Sans CJK JP"/>
+              <a:buChar char="●"/>
+              <a:defRPr sz="2200" b="0">
+                <a:solidFill>
+                  <a:srgbClr val="303437"/>
+                </a:solidFill>
+                <a:latin typeface="Noto Sans"/>
+              </a:defRPr>
+            </a:pPr>
+            <a:r>
+              <a:rPr sz="2200" b="0" lang="ja-JP" altLang="en-US">
+                <a:solidFill>
+                  <a:srgbClr val="303437"/>
+                </a:solidFill>
+                <a:latin typeface="Noto Sans"/>
+                <a:ea typeface="Noto Sans CJK JP"/>
+                <a:cs typeface="Noto Sans"/>
+              </a:rPr>
+              <a:t>検索に使われる質問を基に、読解と回答の可否を扱う大規模な注釈付きデータを公開した。</a:t>
+            </a:r>
+          </a:p>
+          <a:p>
+            <a:pPr marL="457200" indent="-355600">
+              <a:lnSpc>
+                <a:spcPts val="2618"/>
+              </a:lnSpc>
+              <a:spcAft>
+                <a:spcPts val="0"/>
+              </a:spcAft>
+              <a:buSzPct val="60455"/>
+              <a:buFont typeface="Noto Sans CJK JP"/>
+              <a:buChar char="●"/>
+              <a:defRPr sz="2200" b="0">
+                <a:solidFill>
+                  <a:srgbClr val="303437"/>
+                </a:solidFill>
+                <a:latin typeface="Noto Sans"/>
+              </a:defRPr>
+            </a:pPr>
+            <a:r>
+              <a:rPr sz="2200" b="0" lang="ja-JP" altLang="en-US">
+                <a:solidFill>
+                  <a:srgbClr val="303437"/>
+                </a:solidFill>
+                <a:latin typeface="Noto Sans"/>
+                <a:ea typeface="Noto Sans CJK JP"/>
+                <a:cs typeface="Noto Sans"/>
+              </a:rPr>
+              <a:t>2019年にTACLで発表。注釈者の判断が割れることも、評価設計の中心に置いた。</a:t>
+            </a:r>
+          </a:p>
+        </p:txBody>
+      </p:sp>
+      <p:sp>
+        <p:nvSpPr>
+          <p:cNvPr id="4" name="Title 3"/>
           <p:cNvSpPr>
             <a:spLocks noGrp="1"/>
           </p:cNvSpPr>
@@ -31838,6 +31824,83 @@
                 <a:cs typeface="Noto Sans"/>
               </a:rPr>
               <a:t>Appendix: 3. 研究と参考文献</a:t>
+            </a:r>
+          </a:p>
+        </p:txBody>
+      </p:sp>
+      <p:sp>
+        <p:nvSpPr>
+          <p:cNvPr id="5" name="sources"/>
+          <p:cNvSpPr txBox="1"/>
+          <p:nvPr/>
+        </p:nvSpPr>
+        <p:spPr>
+          <a:xfrm>
+            <a:off x="502920" y="4700016"/>
+            <a:ext cx="8183879" cy="530352"/>
+          </a:xfrm>
+          <a:prstGeom prst="rect">
+            <a:avLst/>
+          </a:prstGeom>
+          <a:noFill/>
+        </p:spPr>
+        <p:txBody>
+          <a:bodyPr wrap="square" lIns="0" rIns="0" tIns="0" bIns="0">
+            <a:noAutofit/>
+          </a:bodyPr>
+          <a:lstStyle/>
+          <a:p>
+            <a:pPr algn="l">
+              <a:lnSpc>
+                <a:spcPts val="940"/>
+              </a:lnSpc>
+              <a:spcBef>
+                <a:spcPts val="0"/>
+              </a:spcBef>
+              <a:spcAft>
+                <a:spcPts val="140"/>
+              </a:spcAft>
+              <a:buNone/>
+              <a:defRPr sz="810" b="0">
+                <a:solidFill>
+                  <a:srgbClr val="303437"/>
+                </a:solidFill>
+                <a:latin typeface="Noto Sans"/>
+              </a:defRPr>
+            </a:pPr>
+            <a:r>
+              <a:rPr sz="810" b="0" lang="ja-JP" altLang="en-US">
+                <a:solidFill>
+                  <a:srgbClr val="626669"/>
+                </a:solidFill>
+                <a:latin typeface="Noto Sans"/>
+                <a:ea typeface="Noto Sans CJK JP"/>
+                <a:cs typeface="Noto Sans"/>
+              </a:rPr>
+              <a:t>[1] Kwiatkowski et al. (2019), Natural Questions: A Benchmark for Question Answering Research. TACL 7:453–466.</a:t>
+            </a:r>
+            <a:r>
+              <a:rPr sz="810" b="0" lang="ja-JP" altLang="en-US">
+                <a:solidFill>
+                  <a:srgbClr val="626669"/>
+                </a:solidFill>
+                <a:latin typeface="Noto Sans"/>
+                <a:ea typeface="Noto Sans CJK JP"/>
+                <a:cs typeface="Noto Sans"/>
+              </a:rPr>
+              <a:t>  </a:t>
+            </a:r>
+            <a:r>
+              <a:rPr sz="810" b="0" lang="ja-JP" altLang="en-US">
+                <a:solidFill>
+                  <a:srgbClr val="626669"/>
+                </a:solidFill>
+                <a:latin typeface="Noto Sans"/>
+                <a:ea typeface="Noto Sans CJK JP"/>
+                <a:cs typeface="Noto Sans"/>
+                <a:hlinkClick r:id="rId2"/>
+              </a:rPr>
+              <a:t>https://aclanthology.org/Q19-1026/</a:t>
             </a:r>
           </a:p>
         </p:txBody>
@@ -31903,127 +31966,14 @@
                 <a:ea typeface="Noto Sans CJK JP"/>
                 <a:cs typeface="Noto Sans"/>
               </a:rPr>
-              <a:t>Google Researchによる検索質問の課題</a:t>
-            </a:r>
-          </a:p>
-        </p:txBody>
-      </p:sp>
-      <p:sp>
-        <p:nvSpPr>
-          <p:cNvPr id="3" name="Text Placeholder 2"/>
-          <p:cNvSpPr>
-            <a:spLocks noGrp="1"/>
-          </p:cNvSpPr>
-          <p:nvPr>
-            <p:ph type="body" idx="1"/>
-          </p:nvPr>
-        </p:nvSpPr>
-        <p:spPr>
-          <a:xfrm>
-            <a:off x="594360" y="1463040"/>
-            <a:ext cx="7955279" cy="3044952"/>
-          </a:xfrm>
-        </p:spPr>
-        <p:txBody>
-          <a:bodyPr wrap="square" tIns="91440" bIns="91440">
-            <a:noAutofit/>
-          </a:bodyPr>
-          <a:lstStyle/>
-          <a:p>
-            <a:pPr marL="457200" indent="-355600">
-              <a:lnSpc>
-                <a:spcPts val="2618"/>
-              </a:lnSpc>
-              <a:spcAft>
-                <a:spcPts val="700"/>
-              </a:spcAft>
-              <a:buSzPct val="60455"/>
-              <a:buFont typeface="Noto Sans CJK JP"/>
-              <a:buChar char="●"/>
-              <a:defRPr sz="2200" b="0">
-                <a:solidFill>
-                  <a:srgbClr val="303437"/>
-                </a:solidFill>
-                <a:latin typeface="Noto Sans"/>
-              </a:defRPr>
-            </a:pPr>
-            <a:r>
-              <a:rPr sz="2200" b="0" lang="ja-JP" altLang="en-US">
-                <a:solidFill>
-                  <a:srgbClr val="303437"/>
-                </a:solidFill>
-                <a:latin typeface="Noto Sans"/>
-                <a:ea typeface="Noto Sans CJK JP"/>
-                <a:cs typeface="Noto Sans"/>
-              </a:rPr>
-              <a:t>第一著者はTom Kwiatkowski、最終著者はSlav Petrov。Google Researchのチームが構築した。</a:t>
-            </a:r>
-          </a:p>
-          <a:p>
-            <a:pPr marL="457200" indent="-355600">
-              <a:lnSpc>
-                <a:spcPts val="2618"/>
-              </a:lnSpc>
-              <a:spcAft>
-                <a:spcPts val="700"/>
-              </a:spcAft>
-              <a:buSzPct val="60455"/>
-              <a:buFont typeface="Noto Sans CJK JP"/>
-              <a:buChar char="●"/>
-              <a:defRPr sz="2200" b="0">
-                <a:solidFill>
-                  <a:srgbClr val="303437"/>
-                </a:solidFill>
-                <a:latin typeface="Noto Sans"/>
-              </a:defRPr>
-            </a:pPr>
-            <a:r>
-              <a:rPr sz="2200" b="0" lang="ja-JP" altLang="en-US">
-                <a:solidFill>
-                  <a:srgbClr val="303437"/>
-                </a:solidFill>
-                <a:latin typeface="Noto Sans"/>
-                <a:ea typeface="Noto Sans CJK JP"/>
-                <a:cs typeface="Noto Sans"/>
-              </a:rPr>
-              <a:t>検索に使われる質問を基に、読解と回答の可否を扱う大規模な注釈付きデータを公開した。</a:t>
-            </a:r>
-          </a:p>
-          <a:p>
-            <a:pPr marL="457200" indent="-355600">
-              <a:lnSpc>
-                <a:spcPts val="2618"/>
-              </a:lnSpc>
-              <a:spcAft>
-                <a:spcPts val="0"/>
-              </a:spcAft>
-              <a:buSzPct val="60455"/>
-              <a:buFont typeface="Noto Sans CJK JP"/>
-              <a:buChar char="●"/>
-              <a:defRPr sz="2200" b="0">
-                <a:solidFill>
-                  <a:srgbClr val="303437"/>
-                </a:solidFill>
-                <a:latin typeface="Noto Sans"/>
-              </a:defRPr>
-            </a:pPr>
-            <a:r>
-              <a:rPr sz="2200" b="0" lang="ja-JP" altLang="en-US">
-                <a:solidFill>
-                  <a:srgbClr val="303437"/>
-                </a:solidFill>
-                <a:latin typeface="Noto Sans"/>
-                <a:ea typeface="Noto Sans CJK JP"/>
-                <a:cs typeface="Noto Sans"/>
-              </a:rPr>
-              <a:t>2019年にTACLで発表。注釈者の判断が割れることも、評価設計の中心に置いた。</a:t>
-            </a:r>
-          </a:p>
-        </p:txBody>
-      </p:sp>
-      <p:sp>
-        <p:nvSpPr>
-          <p:cNvPr id="4" name="Title 3"/>
+              <a:t>参考文献</a:t>
+            </a:r>
+          </a:p>
+        </p:txBody>
+      </p:sp>
+      <p:sp>
+        <p:nvSpPr>
+          <p:cNvPr id="3" name="Title 2"/>
           <p:cNvSpPr>
             <a:spLocks noGrp="1"/>
           </p:cNvSpPr>
@@ -32071,14 +32021,14 @@
       </p:sp>
       <p:sp>
         <p:nvSpPr>
-          <p:cNvPr id="5" name="sources"/>
+          <p:cNvPr id="4" name="文献 1: Natural Questions: A Benchmark for Question Answering Research"/>
           <p:cNvSpPr txBox="1"/>
           <p:nvPr/>
         </p:nvSpPr>
         <p:spPr>
           <a:xfrm>
-            <a:off x="502920" y="4700016"/>
-            <a:ext cx="8183879" cy="530352"/>
+            <a:off x="548640" y="1463040"/>
+            <a:ext cx="8046720" cy="1715008"/>
           </a:xfrm>
           <a:prstGeom prst="rect">
             <a:avLst/>
@@ -32093,24 +32043,55 @@
           <a:p>
             <a:pPr algn="l">
               <a:lnSpc>
-                <a:spcPts val="940"/>
-              </a:lnSpc>
-              <a:spcBef>
-                <a:spcPts val="0"/>
-              </a:spcBef>
-              <a:spcAft>
-                <a:spcPts val="140"/>
-              </a:spcAft>
-              <a:buNone/>
-              <a:defRPr sz="810" b="0">
-                <a:solidFill>
-                  <a:srgbClr val="303437"/>
-                </a:solidFill>
-                <a:latin typeface="Noto Sans"/>
-              </a:defRPr>
-            </a:pPr>
-            <a:r>
-              <a:rPr sz="810" b="0" lang="ja-JP" altLang="en-US">
+                <a:spcPct val="114000"/>
+              </a:lnSpc>
+              <a:spcBef>
+                <a:spcPts val="0"/>
+              </a:spcBef>
+              <a:spcAft>
+                <a:spcPts val="400"/>
+              </a:spcAft>
+              <a:buNone/>
+              <a:defRPr sz="2000" b="0">
+                <a:solidFill>
+                  <a:srgbClr val="303437"/>
+                </a:solidFill>
+                <a:latin typeface="Noto Sans"/>
+              </a:defRPr>
+            </a:pPr>
+            <a:r>
+              <a:rPr sz="2000" b="1" lang="ja-JP" altLang="en-US">
+                <a:solidFill>
+                  <a:srgbClr val="303437"/>
+                </a:solidFill>
+                <a:latin typeface="Noto Sans"/>
+                <a:ea typeface="Noto Sans CJK JP"/>
+                <a:cs typeface="Noto Sans"/>
+              </a:rPr>
+              <a:t>Natural Questions: A Benchmark for Question Answering Research</a:t>
+            </a:r>
+          </a:p>
+          <a:p>
+            <a:pPr algn="l">
+              <a:lnSpc>
+                <a:spcPct val="114000"/>
+              </a:lnSpc>
+              <a:spcBef>
+                <a:spcPts val="0"/>
+              </a:spcBef>
+              <a:spcAft>
+                <a:spcPts val="500"/>
+              </a:spcAft>
+              <a:buNone/>
+              <a:defRPr sz="1350" b="0">
+                <a:solidFill>
+                  <a:srgbClr val="303437"/>
+                </a:solidFill>
+                <a:latin typeface="Noto Sans"/>
+              </a:defRPr>
+            </a:pPr>
+            <a:r>
+              <a:rPr sz="1350" b="0" lang="ja-JP" altLang="en-US">
                 <a:solidFill>
                   <a:srgbClr val="626669"/>
                 </a:solidFill>
@@ -32118,30 +32099,218 @@
                 <a:ea typeface="Noto Sans CJK JP"/>
                 <a:cs typeface="Noto Sans"/>
               </a:rPr>
-              <a:t>[1] Kwiatkowski et al. (2019), Natural Questions: A Benchmark for Question Answering Research. TACL 7:453–466.</a:t>
-            </a:r>
-            <a:r>
-              <a:rPr sz="810" b="0" lang="ja-JP" altLang="en-US">
+              <a:t>Kwiatkowski et al. · 2019 · TACL 7:453–466</a:t>
+            </a:r>
+          </a:p>
+          <a:p>
+            <a:pPr algn="l">
+              <a:lnSpc>
+                <a:spcPct val="114000"/>
+              </a:lnSpc>
+              <a:spcBef>
+                <a:spcPts val="0"/>
+              </a:spcBef>
+              <a:spcAft>
+                <a:spcPts val="400"/>
+              </a:spcAft>
+              <a:buNone/>
+              <a:defRPr sz="1850" b="0">
+                <a:solidFill>
+                  <a:srgbClr val="303437"/>
+                </a:solidFill>
+                <a:latin typeface="Noto Sans"/>
+              </a:defRPr>
+            </a:pPr>
+            <a:r>
+              <a:rPr sz="1850" b="0" lang="ja-JP" altLang="en-US">
+                <a:solidFill>
+                  <a:srgbClr val="303437"/>
+                </a:solidFill>
+                <a:latin typeface="Noto Sans"/>
+                <a:ea typeface="Noto Sans CJK JP"/>
+                <a:cs typeface="Noto Sans"/>
+              </a:rPr>
+              <a:t>検索質問の収集、HTML上の回答注釈、複数人の判断を使う採点を提案する。</a:t>
+            </a:r>
+          </a:p>
+          <a:p>
+            <a:pPr algn="l">
+              <a:lnSpc>
+                <a:spcPct val="114000"/>
+              </a:lnSpc>
+              <a:spcBef>
+                <a:spcPts val="0"/>
+              </a:spcBef>
+              <a:spcAft>
+                <a:spcPts val="0"/>
+              </a:spcAft>
+              <a:buNone/>
+              <a:defRPr sz="1150" b="0">
+                <a:solidFill>
+                  <a:srgbClr val="303437"/>
+                </a:solidFill>
+                <a:latin typeface="Noto Sans"/>
+              </a:defRPr>
+            </a:pPr>
+            <a:r>
+              <a:rPr sz="1150" b="0" lang="ja-JP" altLang="en-US">
                 <a:solidFill>
                   <a:srgbClr val="626669"/>
                 </a:solidFill>
                 <a:latin typeface="Noto Sans"/>
                 <a:ea typeface="Noto Sans CJK JP"/>
                 <a:cs typeface="Noto Sans"/>
-              </a:rPr>
-              <a:t>  </a:t>
-            </a:r>
-            <a:r>
-              <a:rPr sz="810" b="0" lang="ja-JP" altLang="en-US">
+                <a:hlinkClick r:id="rId2"/>
+              </a:rPr>
+              <a:t>https://aclanthology.org/Q19-1026/</a:t>
+            </a:r>
+          </a:p>
+        </p:txBody>
+      </p:sp>
+      <p:sp>
+        <p:nvSpPr>
+          <p:cNvPr id="5" name="文献 2: Holistic Evaluation of Language Models"/>
+          <p:cNvSpPr txBox="1"/>
+          <p:nvPr/>
+        </p:nvSpPr>
+        <p:spPr>
+          <a:xfrm>
+            <a:off x="548640" y="3689096"/>
+            <a:ext cx="8046720" cy="1157605"/>
+          </a:xfrm>
+          <a:prstGeom prst="rect">
+            <a:avLst/>
+          </a:prstGeom>
+          <a:noFill/>
+        </p:spPr>
+        <p:txBody>
+          <a:bodyPr wrap="square" lIns="0" rIns="0" tIns="0" bIns="0">
+            <a:noAutofit/>
+          </a:bodyPr>
+          <a:lstStyle/>
+          <a:p>
+            <a:pPr algn="l">
+              <a:lnSpc>
+                <a:spcPct val="114000"/>
+              </a:lnSpc>
+              <a:spcBef>
+                <a:spcPts val="0"/>
+              </a:spcBef>
+              <a:spcAft>
+                <a:spcPts val="400"/>
+              </a:spcAft>
+              <a:buNone/>
+              <a:defRPr sz="2000" b="0">
+                <a:solidFill>
+                  <a:srgbClr val="303437"/>
+                </a:solidFill>
+                <a:latin typeface="Noto Sans"/>
+              </a:defRPr>
+            </a:pPr>
+            <a:r>
+              <a:rPr sz="2000" b="1" lang="ja-JP" altLang="en-US">
+                <a:solidFill>
+                  <a:srgbClr val="303437"/>
+                </a:solidFill>
+                <a:latin typeface="Noto Sans"/>
+                <a:ea typeface="Noto Sans CJK JP"/>
+                <a:cs typeface="Noto Sans"/>
+              </a:rPr>
+              <a:t>Holistic Evaluation of Language Models</a:t>
+            </a:r>
+          </a:p>
+          <a:p>
+            <a:pPr algn="l">
+              <a:lnSpc>
+                <a:spcPct val="114000"/>
+              </a:lnSpc>
+              <a:spcBef>
+                <a:spcPts val="0"/>
+              </a:spcBef>
+              <a:spcAft>
+                <a:spcPts val="500"/>
+              </a:spcAft>
+              <a:buNone/>
+              <a:defRPr sz="1350" b="0">
+                <a:solidFill>
+                  <a:srgbClr val="303437"/>
+                </a:solidFill>
+                <a:latin typeface="Noto Sans"/>
+              </a:defRPr>
+            </a:pPr>
+            <a:r>
+              <a:rPr sz="1350" b="0" lang="ja-JP" altLang="en-US">
                 <a:solidFill>
                   <a:srgbClr val="626669"/>
                 </a:solidFill>
                 <a:latin typeface="Noto Sans"/>
                 <a:ea typeface="Noto Sans CJK JP"/>
                 <a:cs typeface="Noto Sans"/>
-                <a:hlinkClick r:id="rId2"/>
-              </a:rPr>
-              <a:t>https://aclanthology.org/Q19-1026/</a:t>
+              </a:rPr>
+              <a:t>Liang et al. · 2023 · TMLR</a:t>
+            </a:r>
+          </a:p>
+          <a:p>
+            <a:pPr algn="l">
+              <a:lnSpc>
+                <a:spcPct val="114000"/>
+              </a:lnSpc>
+              <a:spcBef>
+                <a:spcPts val="0"/>
+              </a:spcBef>
+              <a:spcAft>
+                <a:spcPts val="400"/>
+              </a:spcAft>
+              <a:buNone/>
+              <a:defRPr sz="1850" b="0">
+                <a:solidFill>
+                  <a:srgbClr val="303437"/>
+                </a:solidFill>
+                <a:latin typeface="Noto Sans"/>
+              </a:defRPr>
+            </a:pPr>
+            <a:r>
+              <a:rPr sz="1850" b="0" lang="ja-JP" altLang="en-US">
+                <a:solidFill>
+                  <a:srgbClr val="303437"/>
+                </a:solidFill>
+                <a:latin typeface="Noto Sans"/>
+                <a:ea typeface="Noto Sans CJK JP"/>
+                <a:cs typeface="Noto Sans"/>
+              </a:rPr>
+              <a:t>多数の課題と指標を通して言語モデルを比較する評価設計。</a:t>
+            </a:r>
+          </a:p>
+          <a:p>
+            <a:pPr algn="l">
+              <a:lnSpc>
+                <a:spcPct val="114000"/>
+              </a:lnSpc>
+              <a:spcBef>
+                <a:spcPts val="0"/>
+              </a:spcBef>
+              <a:spcAft>
+                <a:spcPts val="0"/>
+              </a:spcAft>
+              <a:buNone/>
+              <a:defRPr sz="1150" b="0">
+                <a:solidFill>
+                  <a:srgbClr val="303437"/>
+                </a:solidFill>
+                <a:latin typeface="Noto Sans"/>
+              </a:defRPr>
+            </a:pPr>
+            <a:r>
+              <a:rPr sz="1150" b="0" lang="ja-JP" altLang="en-US">
+                <a:solidFill>
+                  <a:srgbClr val="626669"/>
+                </a:solidFill>
+                <a:latin typeface="Noto Sans"/>
+                <a:ea typeface="Noto Sans CJK JP"/>
+                <a:cs typeface="Noto Sans"/>
+                <a:hlinkClick r:id="rId3"/>
+              </a:rPr>
+              <a:t>https://arxiv.org/abs/2211.09110</a:t>
             </a:r>
           </a:p>
         </p:txBody>
@@ -32262,416 +32431,6 @@
       </p:sp>
       <p:sp>
         <p:nvSpPr>
-          <p:cNvPr id="4" name="文献 1: Natural Questions: A Benchmark for Question Answering Research"/>
-          <p:cNvSpPr txBox="1"/>
-          <p:nvPr/>
-        </p:nvSpPr>
-        <p:spPr>
-          <a:xfrm>
-            <a:off x="548640" y="1463040"/>
-            <a:ext cx="8046720" cy="1715008"/>
-          </a:xfrm>
-          <a:prstGeom prst="rect">
-            <a:avLst/>
-          </a:prstGeom>
-          <a:noFill/>
-        </p:spPr>
-        <p:txBody>
-          <a:bodyPr wrap="square" lIns="0" rIns="0" tIns="0" bIns="0">
-            <a:noAutofit/>
-          </a:bodyPr>
-          <a:lstStyle/>
-          <a:p>
-            <a:pPr algn="l">
-              <a:lnSpc>
-                <a:spcPct val="114000"/>
-              </a:lnSpc>
-              <a:spcBef>
-                <a:spcPts val="0"/>
-              </a:spcBef>
-              <a:spcAft>
-                <a:spcPts val="400"/>
-              </a:spcAft>
-              <a:buNone/>
-              <a:defRPr sz="2000" b="0">
-                <a:solidFill>
-                  <a:srgbClr val="303437"/>
-                </a:solidFill>
-                <a:latin typeface="Noto Sans"/>
-              </a:defRPr>
-            </a:pPr>
-            <a:r>
-              <a:rPr sz="2000" b="1" lang="ja-JP" altLang="en-US">
-                <a:solidFill>
-                  <a:srgbClr val="303437"/>
-                </a:solidFill>
-                <a:latin typeface="Noto Sans"/>
-                <a:ea typeface="Noto Sans CJK JP"/>
-                <a:cs typeface="Noto Sans"/>
-              </a:rPr>
-              <a:t>Natural Questions: A Benchmark for Question Answering Research</a:t>
-            </a:r>
-          </a:p>
-          <a:p>
-            <a:pPr algn="l">
-              <a:lnSpc>
-                <a:spcPct val="114000"/>
-              </a:lnSpc>
-              <a:spcBef>
-                <a:spcPts val="0"/>
-              </a:spcBef>
-              <a:spcAft>
-                <a:spcPts val="500"/>
-              </a:spcAft>
-              <a:buNone/>
-              <a:defRPr sz="1350" b="0">
-                <a:solidFill>
-                  <a:srgbClr val="303437"/>
-                </a:solidFill>
-                <a:latin typeface="Noto Sans"/>
-              </a:defRPr>
-            </a:pPr>
-            <a:r>
-              <a:rPr sz="1350" b="0" lang="ja-JP" altLang="en-US">
-                <a:solidFill>
-                  <a:srgbClr val="626669"/>
-                </a:solidFill>
-                <a:latin typeface="Noto Sans"/>
-                <a:ea typeface="Noto Sans CJK JP"/>
-                <a:cs typeface="Noto Sans"/>
-              </a:rPr>
-              <a:t>Kwiatkowski et al. · 2019 · TACL 7:453–466</a:t>
-            </a:r>
-          </a:p>
-          <a:p>
-            <a:pPr algn="l">
-              <a:lnSpc>
-                <a:spcPct val="114000"/>
-              </a:lnSpc>
-              <a:spcBef>
-                <a:spcPts val="0"/>
-              </a:spcBef>
-              <a:spcAft>
-                <a:spcPts val="400"/>
-              </a:spcAft>
-              <a:buNone/>
-              <a:defRPr sz="1850" b="0">
-                <a:solidFill>
-                  <a:srgbClr val="303437"/>
-                </a:solidFill>
-                <a:latin typeface="Noto Sans"/>
-              </a:defRPr>
-            </a:pPr>
-            <a:r>
-              <a:rPr sz="1850" b="0" lang="ja-JP" altLang="en-US">
-                <a:solidFill>
-                  <a:srgbClr val="303437"/>
-                </a:solidFill>
-                <a:latin typeface="Noto Sans"/>
-                <a:ea typeface="Noto Sans CJK JP"/>
-                <a:cs typeface="Noto Sans"/>
-              </a:rPr>
-              <a:t>検索質問の収集、HTML上の回答注釈、複数人の判断を使う採点を提案する。</a:t>
-            </a:r>
-          </a:p>
-          <a:p>
-            <a:pPr algn="l">
-              <a:lnSpc>
-                <a:spcPct val="114000"/>
-              </a:lnSpc>
-              <a:spcBef>
-                <a:spcPts val="0"/>
-              </a:spcBef>
-              <a:spcAft>
-                <a:spcPts val="0"/>
-              </a:spcAft>
-              <a:buNone/>
-              <a:defRPr sz="1150" b="0">
-                <a:solidFill>
-                  <a:srgbClr val="303437"/>
-                </a:solidFill>
-                <a:latin typeface="Noto Sans"/>
-              </a:defRPr>
-            </a:pPr>
-            <a:r>
-              <a:rPr sz="1150" b="0" lang="ja-JP" altLang="en-US">
-                <a:solidFill>
-                  <a:srgbClr val="626669"/>
-                </a:solidFill>
-                <a:latin typeface="Noto Sans"/>
-                <a:ea typeface="Noto Sans CJK JP"/>
-                <a:cs typeface="Noto Sans"/>
-                <a:hlinkClick r:id="rId2"/>
-              </a:rPr>
-              <a:t>https://aclanthology.org/Q19-1026/</a:t>
-            </a:r>
-          </a:p>
-        </p:txBody>
-      </p:sp>
-      <p:sp>
-        <p:nvSpPr>
-          <p:cNvPr id="5" name="文献 2: Holistic Evaluation of Language Models"/>
-          <p:cNvSpPr txBox="1"/>
-          <p:nvPr/>
-        </p:nvSpPr>
-        <p:spPr>
-          <a:xfrm>
-            <a:off x="548640" y="3689096"/>
-            <a:ext cx="8046720" cy="1157605"/>
-          </a:xfrm>
-          <a:prstGeom prst="rect">
-            <a:avLst/>
-          </a:prstGeom>
-          <a:noFill/>
-        </p:spPr>
-        <p:txBody>
-          <a:bodyPr wrap="square" lIns="0" rIns="0" tIns="0" bIns="0">
-            <a:noAutofit/>
-          </a:bodyPr>
-          <a:lstStyle/>
-          <a:p>
-            <a:pPr algn="l">
-              <a:lnSpc>
-                <a:spcPct val="114000"/>
-              </a:lnSpc>
-              <a:spcBef>
-                <a:spcPts val="0"/>
-              </a:spcBef>
-              <a:spcAft>
-                <a:spcPts val="400"/>
-              </a:spcAft>
-              <a:buNone/>
-              <a:defRPr sz="2000" b="0">
-                <a:solidFill>
-                  <a:srgbClr val="303437"/>
-                </a:solidFill>
-                <a:latin typeface="Noto Sans"/>
-              </a:defRPr>
-            </a:pPr>
-            <a:r>
-              <a:rPr sz="2000" b="1" lang="ja-JP" altLang="en-US">
-                <a:solidFill>
-                  <a:srgbClr val="303437"/>
-                </a:solidFill>
-                <a:latin typeface="Noto Sans"/>
-                <a:ea typeface="Noto Sans CJK JP"/>
-                <a:cs typeface="Noto Sans"/>
-              </a:rPr>
-              <a:t>Holistic Evaluation of Language Models</a:t>
-            </a:r>
-          </a:p>
-          <a:p>
-            <a:pPr algn="l">
-              <a:lnSpc>
-                <a:spcPct val="114000"/>
-              </a:lnSpc>
-              <a:spcBef>
-                <a:spcPts val="0"/>
-              </a:spcBef>
-              <a:spcAft>
-                <a:spcPts val="500"/>
-              </a:spcAft>
-              <a:buNone/>
-              <a:defRPr sz="1350" b="0">
-                <a:solidFill>
-                  <a:srgbClr val="303437"/>
-                </a:solidFill>
-                <a:latin typeface="Noto Sans"/>
-              </a:defRPr>
-            </a:pPr>
-            <a:r>
-              <a:rPr sz="1350" b="0" lang="ja-JP" altLang="en-US">
-                <a:solidFill>
-                  <a:srgbClr val="626669"/>
-                </a:solidFill>
-                <a:latin typeface="Noto Sans"/>
-                <a:ea typeface="Noto Sans CJK JP"/>
-                <a:cs typeface="Noto Sans"/>
-              </a:rPr>
-              <a:t>Liang et al. · 2023 · TMLR</a:t>
-            </a:r>
-          </a:p>
-          <a:p>
-            <a:pPr algn="l">
-              <a:lnSpc>
-                <a:spcPct val="114000"/>
-              </a:lnSpc>
-              <a:spcBef>
-                <a:spcPts val="0"/>
-              </a:spcBef>
-              <a:spcAft>
-                <a:spcPts val="400"/>
-              </a:spcAft>
-              <a:buNone/>
-              <a:defRPr sz="1850" b="0">
-                <a:solidFill>
-                  <a:srgbClr val="303437"/>
-                </a:solidFill>
-                <a:latin typeface="Noto Sans"/>
-              </a:defRPr>
-            </a:pPr>
-            <a:r>
-              <a:rPr sz="1850" b="0" lang="ja-JP" altLang="en-US">
-                <a:solidFill>
-                  <a:srgbClr val="303437"/>
-                </a:solidFill>
-                <a:latin typeface="Noto Sans"/>
-                <a:ea typeface="Noto Sans CJK JP"/>
-                <a:cs typeface="Noto Sans"/>
-              </a:rPr>
-              <a:t>多数の課題と指標を通して言語モデルを比較する評価設計。</a:t>
-            </a:r>
-          </a:p>
-          <a:p>
-            <a:pPr algn="l">
-              <a:lnSpc>
-                <a:spcPct val="114000"/>
-              </a:lnSpc>
-              <a:spcBef>
-                <a:spcPts val="0"/>
-              </a:spcBef>
-              <a:spcAft>
-                <a:spcPts val="0"/>
-              </a:spcAft>
-              <a:buNone/>
-              <a:defRPr sz="1150" b="0">
-                <a:solidFill>
-                  <a:srgbClr val="303437"/>
-                </a:solidFill>
-                <a:latin typeface="Noto Sans"/>
-              </a:defRPr>
-            </a:pPr>
-            <a:r>
-              <a:rPr sz="1150" b="0" lang="ja-JP" altLang="en-US">
-                <a:solidFill>
-                  <a:srgbClr val="626669"/>
-                </a:solidFill>
-                <a:latin typeface="Noto Sans"/>
-                <a:ea typeface="Noto Sans CJK JP"/>
-                <a:cs typeface="Noto Sans"/>
-                <a:hlinkClick r:id="rId3"/>
-              </a:rPr>
-              <a:t>https://arxiv.org/abs/2211.09110</a:t>
-            </a:r>
-          </a:p>
-        </p:txBody>
-      </p:sp>
-    </p:spTree>
-  </p:cSld>
-  <p:clrMapOvr>
-    <a:masterClrMapping/>
-  </p:clrMapOvr>
-</p:sld>
-</file>
-
-<file path=ppt/slides/slide68.xml><?xml version="1.0" encoding="utf-8"?>
-<p:sld xmlns:a="http://schemas.openxmlformats.org/drawingml/2006/main" xmlns:p="http://schemas.openxmlformats.org/presentationml/2006/main" xmlns:r="http://schemas.openxmlformats.org/officeDocument/2006/relationships">
-  <p:cSld>
-    <p:spTree>
-      <p:nvGrpSpPr>
-        <p:cNvPr id="1" name=""/>
-        <p:cNvGrpSpPr/>
-        <p:nvPr/>
-      </p:nvGrpSpPr>
-      <p:grpSpPr/>
-      <p:sp>
-        <p:nvSpPr>
-          <p:cNvPr id="2" name="Title 1"/>
-          <p:cNvSpPr>
-            <a:spLocks noGrp="1"/>
-          </p:cNvSpPr>
-          <p:nvPr>
-            <p:ph type="title"/>
-          </p:nvPr>
-        </p:nvSpPr>
-        <p:spPr>
-          <a:xfrm>
-            <a:off x="468172" y="650138"/>
-            <a:ext cx="8206740" cy="616305"/>
-          </a:xfrm>
-        </p:spPr>
-        <p:txBody>
-          <a:bodyPr wrap="square" lIns="0" rIns="0" tIns="0" bIns="0">
-            <a:noAutofit/>
-          </a:bodyPr>
-          <a:lstStyle/>
-          <a:p>
-            <a:pPr algn="l">
-              <a:lnSpc>
-                <a:spcPct val="110000"/>
-              </a:lnSpc>
-              <a:buNone/>
-              <a:defRPr sz="2800" b="0">
-                <a:solidFill>
-                  <a:srgbClr val="303437"/>
-                </a:solidFill>
-                <a:latin typeface="Noto Sans"/>
-              </a:defRPr>
-            </a:pPr>
-            <a:r>
-              <a:rPr sz="2800" b="1" lang="ja-JP" altLang="en-US">
-                <a:solidFill>
-                  <a:srgbClr val="303437"/>
-                </a:solidFill>
-                <a:latin typeface="Noto Sans"/>
-                <a:ea typeface="Noto Sans CJK JP"/>
-                <a:cs typeface="Noto Sans"/>
-              </a:rPr>
-              <a:t>参考文献</a:t>
-            </a:r>
-          </a:p>
-        </p:txBody>
-      </p:sp>
-      <p:sp>
-        <p:nvSpPr>
-          <p:cNvPr id="3" name="Title 2"/>
-          <p:cNvSpPr>
-            <a:spLocks noGrp="1"/>
-          </p:cNvSpPr>
-          <p:nvPr>
-            <p:ph type="title" idx="2"/>
-          </p:nvPr>
-        </p:nvSpPr>
-        <p:spPr>
-          <a:xfrm>
-            <a:off x="75895" y="0"/>
-            <a:ext cx="8115300" cy="480060"/>
-          </a:xfrm>
-        </p:spPr>
-        <p:txBody>
-          <a:bodyPr wrap="square" lIns="0" rIns="0" tIns="0" bIns="0" anchor="ctr">
-            <a:noAutofit/>
-          </a:bodyPr>
-          <a:lstStyle/>
-          <a:p>
-            <a:pPr algn="l">
-              <a:lnSpc>
-                <a:spcPct val="110000"/>
-              </a:lnSpc>
-              <a:buNone/>
-              <a:defRPr sz="1400" b="0">
-                <a:solidFill>
-                  <a:srgbClr val="303437"/>
-                </a:solidFill>
-                <a:latin typeface="Noto Sans"/>
-              </a:defRPr>
-            </a:pPr>
-            <a:r>
-              <a:rPr sz="1400" b="1" lang="ja-JP" altLang="en-US">
-                <a:solidFill>
-                  <a:srgbClr val="FFFEF8"/>
-                </a:solidFill>
-                <a:latin typeface="Noto Sans"/>
-                <a:ea typeface="Noto Sans CJK JP"/>
-                <a:cs typeface="Noto Sans"/>
-              </a:rPr>
-              <a:t>Appendix: 3. 研究と参考文献</a:t>
-            </a:r>
-          </a:p>
-        </p:txBody>
-      </p:sp>
-      <p:sp>
-        <p:nvSpPr>
           <p:cNvPr id="4" name="文献 1: Natural Questions"/>
           <p:cNvSpPr txBox="1"/>
           <p:nvPr/>
@@ -32995,7 +32754,7 @@
         <p:spPr>
           <a:xfrm>
             <a:off x="548640" y="1600200"/>
-            <a:ext cx="3931920" cy="1984393"/>
+            <a:ext cx="3931920" cy="1895711"/>
           </a:xfrm>
           <a:prstGeom prst="rect">
             <a:avLst/>
@@ -33023,7 +32782,7 @@
           </a:fontRef>
         </p:style>
         <p:txBody>
-          <a:bodyPr rtlCol="0" anchor="t" wrap="square" lIns="177800" rIns="177800" tIns="63500" bIns="127000">
+          <a:bodyPr rtlCol="0" anchor="t" wrap="square" lIns="177800" rIns="177800" tIns="47203" bIns="127000">
             <a:noAutofit/>
           </a:bodyPr>
           <a:lstStyle/>
@@ -33099,7 +32858,7 @@
         </p:nvSpPr>
         <p:spPr>
           <a:xfrm>
-            <a:off x="548640" y="3694322"/>
+            <a:off x="548640" y="3605640"/>
             <a:ext cx="3931920" cy="373380"/>
           </a:xfrm>
           <a:prstGeom prst="rect">
@@ -33208,7 +32967,7 @@
         <p:spPr>
           <a:xfrm>
             <a:off x="4663440" y="1600200"/>
-            <a:ext cx="3931920" cy="1725910"/>
+            <a:ext cx="3931920" cy="1665706"/>
           </a:xfrm>
           <a:prstGeom prst="rect">
             <a:avLst/>
@@ -33236,7 +32995,7 @@
           </a:fontRef>
         </p:style>
         <p:txBody>
-          <a:bodyPr rtlCol="0" anchor="t" wrap="square" lIns="177800" rIns="177800" tIns="63500" bIns="127000">
+          <a:bodyPr rtlCol="0" anchor="t" wrap="square" lIns="177800" rIns="177800" tIns="58392" bIns="127000">
             <a:noAutofit/>
           </a:bodyPr>
           <a:lstStyle/>
@@ -33312,7 +33071,7 @@
         </p:nvSpPr>
         <p:spPr>
           <a:xfrm>
-            <a:off x="4663440" y="3435840"/>
+            <a:off x="4663440" y="3375636"/>
             <a:ext cx="3931920" cy="373380"/>
           </a:xfrm>
           <a:prstGeom prst="rect">
@@ -33889,7 +33648,7 @@
         <p:spPr>
           <a:xfrm>
             <a:off x="548640" y="1600200"/>
-            <a:ext cx="8046720" cy="1823636"/>
+            <a:ext cx="8046720" cy="1792916"/>
           </a:xfrm>
           <a:prstGeom prst="rect">
             <a:avLst/>
@@ -33917,7 +33676,7 @@
           </a:fontRef>
         </p:style>
         <p:txBody>
-          <a:bodyPr rtlCol="0" anchor="t" wrap="square" lIns="177800" rIns="177800" tIns="63500" bIns="127000">
+          <a:bodyPr rtlCol="0" anchor="t" wrap="square" lIns="177800" rIns="177800" tIns="45531" bIns="127000">
             <a:noAutofit/>
           </a:bodyPr>
           <a:lstStyle/>
@@ -33993,7 +33752,7 @@
         </p:nvSpPr>
         <p:spPr>
           <a:xfrm>
-            <a:off x="594360" y="3533565"/>
+            <a:off x="594360" y="3502845"/>
             <a:ext cx="3886200" cy="682751"/>
           </a:xfrm>
           <a:prstGeom prst="rect">
@@ -34078,7 +33837,7 @@
         </p:nvSpPr>
         <p:spPr>
           <a:xfrm>
-            <a:off x="4681728" y="3533565"/>
+            <a:off x="4681728" y="3502845"/>
             <a:ext cx="3886200" cy="682751"/>
           </a:xfrm>
           <a:prstGeom prst="rect">
